--- a/Presantation 1.pptx
+++ b/Presantation 1.pptx
@@ -18,8 +18,8 @@
     <p:sldId id="262" r:id="rId9"/>
     <p:sldId id="273" r:id="rId10"/>
     <p:sldId id="274" r:id="rId11"/>
-    <p:sldId id="277" r:id="rId12"/>
-    <p:sldId id="275" r:id="rId13"/>
+    <p:sldId id="275" r:id="rId12"/>
+    <p:sldId id="277" r:id="rId13"/>
     <p:sldId id="276" r:id="rId14"/>
   </p:sldIdLst>
   <p:sldSz cx="12192000" cy="6858000"/>
@@ -130,605 +130,10 @@
 <file path=ppt/revisionInfo.xml><?xml version="1.0" encoding="utf-8"?>
 <p1510:revInfo xmlns:a="http://schemas.openxmlformats.org/drawingml/2006/main" xmlns:r="http://schemas.openxmlformats.org/officeDocument/2006/relationships" xmlns:p1510="http://schemas.microsoft.com/office/powerpoint/2015/10/main">
   <p1510:revLst>
-    <p1510:client id="{5FAC232B-747B-F60A-6395-18A57DC5CFCA}" v="128" dt="2026-04-12T15:20:47.131"/>
-    <p1510:client id="{D9FD541B-B580-923B-DF89-3504367398DF}" v="741" dt="2026-04-12T16:24:12.388"/>
-    <p1510:client id="{DD9FBD9F-EC8B-4452-A4DB-38C7B2337E72}" v="31" dt="2026-04-12T15:25:21.875"/>
+    <p1510:client id="{0D237E11-1094-69AF-7060-21D0DF2FD91B}" v="1" dt="2026-04-18T16:56:16.584"/>
+    <p1510:client id="{F1D29410-C739-C86C-3727-DC63EC86CEF7}" v="33" dt="2026-04-17T16:24:43.660"/>
   </p1510:revLst>
 </p1510:revInfo>
-</file>
-
-<file path=ppt/changesInfos/changesInfo1.xml><?xml version="1.0" encoding="utf-8"?>
-<pc:chgInfo xmlns:a="http://schemas.openxmlformats.org/drawingml/2006/main" xmlns:r="http://schemas.openxmlformats.org/officeDocument/2006/relationships" xmlns:ac="http://schemas.microsoft.com/office/drawing/2013/main/command" xmlns:pc="http://schemas.microsoft.com/office/powerpoint/2013/main/command">
-  <pc:docChgLst>
-    <pc:chgData name="Farkas Miklós Tibor 171" userId="S::farmik171@hengersor.hu::18dfe6a4-9a0c-4bae-84a3-c95ba408505f" providerId="AD" clId="Web-{D9FD541B-B580-923B-DF89-3504367398DF}"/>
-    <pc:docChg chg="addSld modSld sldOrd">
-      <pc:chgData name="Farkas Miklós Tibor 171" userId="S::farmik171@hengersor.hu::18dfe6a4-9a0c-4bae-84a3-c95ba408505f" providerId="AD" clId="Web-{D9FD541B-B580-923B-DF89-3504367398DF}" dt="2026-04-12T16:24:12.388" v="538" actId="1076"/>
-      <pc:docMkLst>
-        <pc:docMk/>
-      </pc:docMkLst>
-      <pc:sldChg chg="modSp">
-        <pc:chgData name="Farkas Miklós Tibor 171" userId="S::farmik171@hengersor.hu::18dfe6a4-9a0c-4bae-84a3-c95ba408505f" providerId="AD" clId="Web-{D9FD541B-B580-923B-DF89-3504367398DF}" dt="2026-04-12T15:59:34.587" v="255" actId="20577"/>
-        <pc:sldMkLst>
-          <pc:docMk/>
-          <pc:sldMk cId="772907178" sldId="257"/>
-        </pc:sldMkLst>
-        <pc:spChg chg="mod">
-          <ac:chgData name="Farkas Miklós Tibor 171" userId="S::farmik171@hengersor.hu::18dfe6a4-9a0c-4bae-84a3-c95ba408505f" providerId="AD" clId="Web-{D9FD541B-B580-923B-DF89-3504367398DF}" dt="2026-04-12T15:59:34.587" v="255" actId="20577"/>
-          <ac:spMkLst>
-            <pc:docMk/>
-            <pc:sldMk cId="772907178" sldId="257"/>
-            <ac:spMk id="7" creationId="{BB60E4A7-BDC7-4213-A8A0-5A59846A409A}"/>
-          </ac:spMkLst>
-        </pc:spChg>
-      </pc:sldChg>
-      <pc:sldChg chg="add ord">
-        <pc:chgData name="Farkas Miklós Tibor 171" userId="S::farmik171@hengersor.hu::18dfe6a4-9a0c-4bae-84a3-c95ba408505f" providerId="AD" clId="Web-{D9FD541B-B580-923B-DF89-3504367398DF}" dt="2026-04-12T15:28:59.821" v="5"/>
-        <pc:sldMkLst>
-          <pc:docMk/>
-          <pc:sldMk cId="3786818564" sldId="260"/>
-        </pc:sldMkLst>
-      </pc:sldChg>
-      <pc:sldChg chg="modSp add">
-        <pc:chgData name="Farkas Miklós Tibor 171" userId="S::farmik171@hengersor.hu::18dfe6a4-9a0c-4bae-84a3-c95ba408505f" providerId="AD" clId="Web-{D9FD541B-B580-923B-DF89-3504367398DF}" dt="2026-04-12T15:31:59.103" v="94" actId="20577"/>
-        <pc:sldMkLst>
-          <pc:docMk/>
-          <pc:sldMk cId="1506197516" sldId="262"/>
-        </pc:sldMkLst>
-        <pc:spChg chg="mod">
-          <ac:chgData name="Farkas Miklós Tibor 171" userId="S::farmik171@hengersor.hu::18dfe6a4-9a0c-4bae-84a3-c95ba408505f" providerId="AD" clId="Web-{D9FD541B-B580-923B-DF89-3504367398DF}" dt="2026-04-12T15:31:59.103" v="94" actId="20577"/>
-          <ac:spMkLst>
-            <pc:docMk/>
-            <pc:sldMk cId="1506197516" sldId="262"/>
-            <ac:spMk id="2" creationId="{A02F74C0-95C9-24F7-9333-20F44CD5E6E1}"/>
-          </ac:spMkLst>
-        </pc:spChg>
-      </pc:sldChg>
-      <pc:sldChg chg="modSp">
-        <pc:chgData name="Farkas Miklós Tibor 171" userId="S::farmik171@hengersor.hu::18dfe6a4-9a0c-4bae-84a3-c95ba408505f" providerId="AD" clId="Web-{D9FD541B-B580-923B-DF89-3504367398DF}" dt="2026-04-12T16:24:12.388" v="538" actId="1076"/>
-        <pc:sldMkLst>
-          <pc:docMk/>
-          <pc:sldMk cId="4059739650" sldId="272"/>
-        </pc:sldMkLst>
-        <pc:spChg chg="mod">
-          <ac:chgData name="Farkas Miklós Tibor 171" userId="S::farmik171@hengersor.hu::18dfe6a4-9a0c-4bae-84a3-c95ba408505f" providerId="AD" clId="Web-{D9FD541B-B580-923B-DF89-3504367398DF}" dt="2026-04-12T15:25:57.257" v="0" actId="14100"/>
-          <ac:spMkLst>
-            <pc:docMk/>
-            <pc:sldMk cId="4059739650" sldId="272"/>
-            <ac:spMk id="4" creationId="{DECD01B4-FC90-7BBB-35DB-90164FE56B42}"/>
-          </ac:spMkLst>
-        </pc:spChg>
-        <pc:spChg chg="mod">
-          <ac:chgData name="Farkas Miklós Tibor 171" userId="S::farmik171@hengersor.hu::18dfe6a4-9a0c-4bae-84a3-c95ba408505f" providerId="AD" clId="Web-{D9FD541B-B580-923B-DF89-3504367398DF}" dt="2026-04-12T16:24:12.388" v="538" actId="1076"/>
-          <ac:spMkLst>
-            <pc:docMk/>
-            <pc:sldMk cId="4059739650" sldId="272"/>
-            <ac:spMk id="8" creationId="{51A41DDC-3521-4428-F7E2-AE00CA484243}"/>
-          </ac:spMkLst>
-        </pc:spChg>
-      </pc:sldChg>
-      <pc:sldChg chg="addSp delSp modSp add replId modNotes">
-        <pc:chgData name="Farkas Miklós Tibor 171" userId="S::farmik171@hengersor.hu::18dfe6a4-9a0c-4bae-84a3-c95ba408505f" providerId="AD" clId="Web-{D9FD541B-B580-923B-DF89-3504367398DF}" dt="2026-04-12T16:17:25.253" v="459"/>
-        <pc:sldMkLst>
-          <pc:docMk/>
-          <pc:sldMk cId="2672626487" sldId="273"/>
-        </pc:sldMkLst>
-        <pc:spChg chg="mod">
-          <ac:chgData name="Farkas Miklós Tibor 171" userId="S::farmik171@hengersor.hu::18dfe6a4-9a0c-4bae-84a3-c95ba408505f" providerId="AD" clId="Web-{D9FD541B-B580-923B-DF89-3504367398DF}" dt="2026-04-12T15:39:49.676" v="155" actId="1076"/>
-          <ac:spMkLst>
-            <pc:docMk/>
-            <pc:sldMk cId="2672626487" sldId="273"/>
-            <ac:spMk id="2" creationId="{D839A58D-3CBE-60FE-DA20-D2F7340AD175}"/>
-          </ac:spMkLst>
-        </pc:spChg>
-        <pc:spChg chg="del mod">
-          <ac:chgData name="Farkas Miklós Tibor 171" userId="S::farmik171@hengersor.hu::18dfe6a4-9a0c-4bae-84a3-c95ba408505f" providerId="AD" clId="Web-{D9FD541B-B580-923B-DF89-3504367398DF}" dt="2026-04-12T15:39:13.925" v="143"/>
-          <ac:spMkLst>
-            <pc:docMk/>
-            <pc:sldMk cId="2672626487" sldId="273"/>
-            <ac:spMk id="4" creationId="{9C0D7461-1F97-3FE8-C34F-C6E3CEF4AE54}"/>
-          </ac:spMkLst>
-        </pc:spChg>
-        <pc:spChg chg="mod">
-          <ac:chgData name="Farkas Miklós Tibor 171" userId="S::farmik171@hengersor.hu::18dfe6a4-9a0c-4bae-84a3-c95ba408505f" providerId="AD" clId="Web-{D9FD541B-B580-923B-DF89-3504367398DF}" dt="2026-04-12T15:39:39.207" v="152" actId="1076"/>
-          <ac:spMkLst>
-            <pc:docMk/>
-            <pc:sldMk cId="2672626487" sldId="273"/>
-            <ac:spMk id="6" creationId="{6631FC1A-ED6B-1761-7679-E24788132265}"/>
-          </ac:spMkLst>
-        </pc:spChg>
-        <pc:spChg chg="mod">
-          <ac:chgData name="Farkas Miklós Tibor 171" userId="S::farmik171@hengersor.hu::18dfe6a4-9a0c-4bae-84a3-c95ba408505f" providerId="AD" clId="Web-{D9FD541B-B580-923B-DF89-3504367398DF}" dt="2026-04-12T16:16:41.033" v="454" actId="1076"/>
-          <ac:spMkLst>
-            <pc:docMk/>
-            <pc:sldMk cId="2672626487" sldId="273"/>
-            <ac:spMk id="8" creationId="{333F52F3-0399-C7F5-6958-A9C6AA8372C2}"/>
-          </ac:spMkLst>
-        </pc:spChg>
-        <pc:spChg chg="add mod">
-          <ac:chgData name="Farkas Miklós Tibor 171" userId="S::farmik171@hengersor.hu::18dfe6a4-9a0c-4bae-84a3-c95ba408505f" providerId="AD" clId="Web-{D9FD541B-B580-923B-DF89-3504367398DF}" dt="2026-04-12T15:39:33.269" v="149"/>
-          <ac:spMkLst>
-            <pc:docMk/>
-            <pc:sldMk cId="2672626487" sldId="273"/>
-            <ac:spMk id="9" creationId="{E759B48B-11B4-D516-6B9D-152AF792A62B}"/>
-          </ac:spMkLst>
-        </pc:spChg>
-        <pc:picChg chg="del">
-          <ac:chgData name="Farkas Miklós Tibor 171" userId="S::farmik171@hengersor.hu::18dfe6a4-9a0c-4bae-84a3-c95ba408505f" providerId="AD" clId="Web-{D9FD541B-B580-923B-DF89-3504367398DF}" dt="2026-04-12T15:36:48.577" v="115"/>
-          <ac:picMkLst>
-            <pc:docMk/>
-            <pc:sldMk cId="2672626487" sldId="273"/>
-            <ac:picMk id="3" creationId="{216E80F6-9413-4B08-5A19-4DDECA03CE9D}"/>
-          </ac:picMkLst>
-        </pc:picChg>
-        <pc:picChg chg="mod">
-          <ac:chgData name="Farkas Miklós Tibor 171" userId="S::farmik171@hengersor.hu::18dfe6a4-9a0c-4bae-84a3-c95ba408505f" providerId="AD" clId="Web-{D9FD541B-B580-923B-DF89-3504367398DF}" dt="2026-04-12T15:37:55.643" v="125" actId="1076"/>
-          <ac:picMkLst>
-            <pc:docMk/>
-            <pc:sldMk cId="2672626487" sldId="273"/>
-            <ac:picMk id="5" creationId="{4C6DE3D0-545A-D129-C998-406987A6392A}"/>
-          </ac:picMkLst>
-        </pc:picChg>
-        <pc:picChg chg="add mod">
-          <ac:chgData name="Farkas Miklós Tibor 171" userId="S::farmik171@hengersor.hu::18dfe6a4-9a0c-4bae-84a3-c95ba408505f" providerId="AD" clId="Web-{D9FD541B-B580-923B-DF89-3504367398DF}" dt="2026-04-12T15:39:11.035" v="139" actId="14100"/>
-          <ac:picMkLst>
-            <pc:docMk/>
-            <pc:sldMk cId="2672626487" sldId="273"/>
-            <ac:picMk id="7" creationId="{F4F62F98-FCDD-71B3-DDD2-A9280497D9F3}"/>
-          </ac:picMkLst>
-        </pc:picChg>
-      </pc:sldChg>
-      <pc:sldChg chg="addSp delSp modSp add replId">
-        <pc:chgData name="Farkas Miklós Tibor 171" userId="S::farmik171@hengersor.hu::18dfe6a4-9a0c-4bae-84a3-c95ba408505f" providerId="AD" clId="Web-{D9FD541B-B580-923B-DF89-3504367398DF}" dt="2026-04-12T16:01:11.963" v="272" actId="14100"/>
-        <pc:sldMkLst>
-          <pc:docMk/>
-          <pc:sldMk cId="2110612215" sldId="274"/>
-        </pc:sldMkLst>
-        <pc:spChg chg="mod">
-          <ac:chgData name="Farkas Miklós Tibor 171" userId="S::farmik171@hengersor.hu::18dfe6a4-9a0c-4bae-84a3-c95ba408505f" providerId="AD" clId="Web-{D9FD541B-B580-923B-DF89-3504367398DF}" dt="2026-04-12T15:42:24.056" v="162" actId="1076"/>
-          <ac:spMkLst>
-            <pc:docMk/>
-            <pc:sldMk cId="2110612215" sldId="274"/>
-            <ac:spMk id="2" creationId="{870223A3-0DA1-513B-579D-83EF4A00FE48}"/>
-          </ac:spMkLst>
-        </pc:spChg>
-        <pc:spChg chg="del">
-          <ac:chgData name="Farkas Miklós Tibor 171" userId="S::farmik171@hengersor.hu::18dfe6a4-9a0c-4bae-84a3-c95ba408505f" providerId="AD" clId="Web-{D9FD541B-B580-923B-DF89-3504367398DF}" dt="2026-04-12T15:42:27.306" v="165"/>
-          <ac:spMkLst>
-            <pc:docMk/>
-            <pc:sldMk cId="2110612215" sldId="274"/>
-            <ac:spMk id="6" creationId="{E3722B54-D017-8DA1-0C86-1D8A3F68DFA9}"/>
-          </ac:spMkLst>
-        </pc:spChg>
-        <pc:spChg chg="del mod">
-          <ac:chgData name="Farkas Miklós Tibor 171" userId="S::farmik171@hengersor.hu::18dfe6a4-9a0c-4bae-84a3-c95ba408505f" providerId="AD" clId="Web-{D9FD541B-B580-923B-DF89-3504367398DF}" dt="2026-04-12T15:42:30.322" v="167"/>
-          <ac:spMkLst>
-            <pc:docMk/>
-            <pc:sldMk cId="2110612215" sldId="274"/>
-            <ac:spMk id="8" creationId="{97639AE4-7549-62D8-6F32-6D023284C0BD}"/>
-          </ac:spMkLst>
-        </pc:spChg>
-        <pc:spChg chg="del">
-          <ac:chgData name="Farkas Miklós Tibor 171" userId="S::farmik171@hengersor.hu::18dfe6a4-9a0c-4bae-84a3-c95ba408505f" providerId="AD" clId="Web-{D9FD541B-B580-923B-DF89-3504367398DF}" dt="2026-04-12T15:42:26.962" v="164"/>
-          <ac:spMkLst>
-            <pc:docMk/>
-            <pc:sldMk cId="2110612215" sldId="274"/>
-            <ac:spMk id="9" creationId="{C1E6C0B2-979D-B47D-1BAF-5B2EB9AA423F}"/>
-          </ac:spMkLst>
-        </pc:spChg>
-        <pc:spChg chg="add mod">
-          <ac:chgData name="Farkas Miklós Tibor 171" userId="S::farmik171@hengersor.hu::18dfe6a4-9a0c-4bae-84a3-c95ba408505f" providerId="AD" clId="Web-{D9FD541B-B580-923B-DF89-3504367398DF}" dt="2026-04-12T16:00:26.760" v="260"/>
-          <ac:spMkLst>
-            <pc:docMk/>
-            <pc:sldMk cId="2110612215" sldId="274"/>
-            <ac:spMk id="11" creationId="{4FC5E73B-AFB1-FEBC-1B57-FD685B3E837B}"/>
-          </ac:spMkLst>
-        </pc:spChg>
-        <pc:spChg chg="add mod">
-          <ac:chgData name="Farkas Miklós Tibor 171" userId="S::farmik171@hengersor.hu::18dfe6a4-9a0c-4bae-84a3-c95ba408505f" providerId="AD" clId="Web-{D9FD541B-B580-923B-DF89-3504367398DF}" dt="2026-04-12T16:00:46.885" v="268" actId="1076"/>
-          <ac:spMkLst>
-            <pc:docMk/>
-            <pc:sldMk cId="2110612215" sldId="274"/>
-            <ac:spMk id="12" creationId="{DFE0D0EE-5142-EC19-0E49-CBD2A3CC61F7}"/>
-          </ac:spMkLst>
-        </pc:spChg>
-        <pc:spChg chg="add mod">
-          <ac:chgData name="Farkas Miklós Tibor 171" userId="S::farmik171@hengersor.hu::18dfe6a4-9a0c-4bae-84a3-c95ba408505f" providerId="AD" clId="Web-{D9FD541B-B580-923B-DF89-3504367398DF}" dt="2026-04-12T16:01:11.963" v="272" actId="14100"/>
-          <ac:spMkLst>
-            <pc:docMk/>
-            <pc:sldMk cId="2110612215" sldId="274"/>
-            <ac:spMk id="13" creationId="{F385E0BE-CDB1-E4EE-FF20-D479C2DD0CFB}"/>
-          </ac:spMkLst>
-        </pc:spChg>
-        <pc:picChg chg="add mod">
-          <ac:chgData name="Farkas Miklós Tibor 171" userId="S::farmik171@hengersor.hu::18dfe6a4-9a0c-4bae-84a3-c95ba408505f" providerId="AD" clId="Web-{D9FD541B-B580-923B-DF89-3504367398DF}" dt="2026-04-12T15:58:26.024" v="252" actId="1076"/>
-          <ac:picMkLst>
-            <pc:docMk/>
-            <pc:sldMk cId="2110612215" sldId="274"/>
-            <ac:picMk id="3" creationId="{4AAF964F-2744-E478-34AB-F62A605655FD}"/>
-          </ac:picMkLst>
-        </pc:picChg>
-        <pc:picChg chg="add mod">
-          <ac:chgData name="Farkas Miklós Tibor 171" userId="S::farmik171@hengersor.hu::18dfe6a4-9a0c-4bae-84a3-c95ba408505f" providerId="AD" clId="Web-{D9FD541B-B580-923B-DF89-3504367398DF}" dt="2026-04-12T16:00:39.947" v="264" actId="1076"/>
-          <ac:picMkLst>
-            <pc:docMk/>
-            <pc:sldMk cId="2110612215" sldId="274"/>
-            <ac:picMk id="4" creationId="{BAD07F06-6893-36B2-0E87-76CEA8C499BC}"/>
-          </ac:picMkLst>
-        </pc:picChg>
-        <pc:picChg chg="mod">
-          <ac:chgData name="Farkas Miklós Tibor 171" userId="S::farmik171@hengersor.hu::18dfe6a4-9a0c-4bae-84a3-c95ba408505f" providerId="AD" clId="Web-{D9FD541B-B580-923B-DF89-3504367398DF}" dt="2026-04-12T16:00:43.869" v="266" actId="1076"/>
-          <ac:picMkLst>
-            <pc:docMk/>
-            <pc:sldMk cId="2110612215" sldId="274"/>
-            <ac:picMk id="5" creationId="{8847383B-AF26-80AA-D469-DA13B5CD74B3}"/>
-          </ac:picMkLst>
-        </pc:picChg>
-        <pc:picChg chg="del">
-          <ac:chgData name="Farkas Miklós Tibor 171" userId="S::farmik171@hengersor.hu::18dfe6a4-9a0c-4bae-84a3-c95ba408505f" providerId="AD" clId="Web-{D9FD541B-B580-923B-DF89-3504367398DF}" dt="2026-04-12T15:42:25.775" v="163"/>
-          <ac:picMkLst>
-            <pc:docMk/>
-            <pc:sldMk cId="2110612215" sldId="274"/>
-            <ac:picMk id="7" creationId="{292663B6-2E9D-D8DF-A416-CC529CF080F8}"/>
-          </ac:picMkLst>
-        </pc:picChg>
-        <pc:picChg chg="add mod">
-          <ac:chgData name="Farkas Miklós Tibor 171" userId="S::farmik171@hengersor.hu::18dfe6a4-9a0c-4bae-84a3-c95ba408505f" providerId="AD" clId="Web-{D9FD541B-B580-923B-DF89-3504367398DF}" dt="2026-04-12T15:58:23.649" v="251" actId="1076"/>
-          <ac:picMkLst>
-            <pc:docMk/>
-            <pc:sldMk cId="2110612215" sldId="274"/>
-            <ac:picMk id="10" creationId="{910E66C0-B067-6BBD-02EB-95C38577EC26}"/>
-          </ac:picMkLst>
-        </pc:picChg>
-      </pc:sldChg>
-      <pc:sldChg chg="addSp delSp modSp add ord replId">
-        <pc:chgData name="Farkas Miklós Tibor 171" userId="S::farmik171@hengersor.hu::18dfe6a4-9a0c-4bae-84a3-c95ba408505f" providerId="AD" clId="Web-{D9FD541B-B580-923B-DF89-3504367398DF}" dt="2026-04-12T16:21:22.322" v="494" actId="20577"/>
-        <pc:sldMkLst>
-          <pc:docMk/>
-          <pc:sldMk cId="3756856892" sldId="275"/>
-        </pc:sldMkLst>
-        <pc:spChg chg="mod">
-          <ac:chgData name="Farkas Miklós Tibor 171" userId="S::farmik171@hengersor.hu::18dfe6a4-9a0c-4bae-84a3-c95ba408505f" providerId="AD" clId="Web-{D9FD541B-B580-923B-DF89-3504367398DF}" dt="2026-04-12T15:44:30.012" v="179" actId="20577"/>
-          <ac:spMkLst>
-            <pc:docMk/>
-            <pc:sldMk cId="3756856892" sldId="275"/>
-            <ac:spMk id="2" creationId="{159DAE13-FAA4-C78C-0AB8-8EC7D6A1D5C3}"/>
-          </ac:spMkLst>
-        </pc:spChg>
-        <pc:spChg chg="add del">
-          <ac:chgData name="Farkas Miklós Tibor 171" userId="S::farmik171@hengersor.hu::18dfe6a4-9a0c-4bae-84a3-c95ba408505f" providerId="AD" clId="Web-{D9FD541B-B580-923B-DF89-3504367398DF}" dt="2026-04-12T15:44:42.168" v="183"/>
-          <ac:spMkLst>
-            <pc:docMk/>
-            <pc:sldMk cId="3756856892" sldId="275"/>
-            <ac:spMk id="4" creationId="{7F0E5D33-F493-3436-2833-92717197475B}"/>
-          </ac:spMkLst>
-        </pc:spChg>
-        <pc:spChg chg="add del">
-          <ac:chgData name="Farkas Miklós Tibor 171" userId="S::farmik171@hengersor.hu::18dfe6a4-9a0c-4bae-84a3-c95ba408505f" providerId="AD" clId="Web-{D9FD541B-B580-923B-DF89-3504367398DF}" dt="2026-04-12T15:44:40.949" v="182"/>
-          <ac:spMkLst>
-            <pc:docMk/>
-            <pc:sldMk cId="3756856892" sldId="275"/>
-            <ac:spMk id="7" creationId="{2A1FEC7F-B9A8-BC99-E79C-EA6032EFC08F}"/>
-          </ac:spMkLst>
-        </pc:spChg>
-        <pc:spChg chg="add mod">
-          <ac:chgData name="Farkas Miklós Tibor 171" userId="S::farmik171@hengersor.hu::18dfe6a4-9a0c-4bae-84a3-c95ba408505f" providerId="AD" clId="Web-{D9FD541B-B580-923B-DF89-3504367398DF}" dt="2026-04-12T15:44:50.262" v="185" actId="1076"/>
-          <ac:spMkLst>
-            <pc:docMk/>
-            <pc:sldMk cId="3756856892" sldId="275"/>
-            <ac:spMk id="9" creationId="{A3F1B03C-D66C-A957-BCBA-B93C7A606E51}"/>
-          </ac:spMkLst>
-        </pc:spChg>
-        <pc:spChg chg="add mod">
-          <ac:chgData name="Farkas Miklós Tibor 171" userId="S::farmik171@hengersor.hu::18dfe6a4-9a0c-4bae-84a3-c95ba408505f" providerId="AD" clId="Web-{D9FD541B-B580-923B-DF89-3504367398DF}" dt="2026-04-12T16:21:22.322" v="494" actId="20577"/>
-          <ac:spMkLst>
-            <pc:docMk/>
-            <pc:sldMk cId="3756856892" sldId="275"/>
-            <ac:spMk id="11" creationId="{F4567934-CAC1-FF63-0CBD-C6AD60624F29}"/>
-          </ac:spMkLst>
-        </pc:spChg>
-        <pc:picChg chg="add del mod">
-          <ac:chgData name="Farkas Miklós Tibor 171" userId="S::farmik171@hengersor.hu::18dfe6a4-9a0c-4bae-84a3-c95ba408505f" providerId="AD" clId="Web-{D9FD541B-B580-923B-DF89-3504367398DF}" dt="2026-04-12T16:19:33.865" v="472"/>
-          <ac:picMkLst>
-            <pc:docMk/>
-            <pc:sldMk cId="3756856892" sldId="275"/>
-            <ac:picMk id="12" creationId="{B68D1548-2F20-245F-3280-53A53A69C00D}"/>
-          </ac:picMkLst>
-        </pc:picChg>
-        <pc:picChg chg="add mod modCrop">
-          <ac:chgData name="Farkas Miklós Tibor 171" userId="S::farmik171@hengersor.hu::18dfe6a4-9a0c-4bae-84a3-c95ba408505f" providerId="AD" clId="Web-{D9FD541B-B580-923B-DF89-3504367398DF}" dt="2026-04-12T16:21:02.727" v="486" actId="1076"/>
-          <ac:picMkLst>
-            <pc:docMk/>
-            <pc:sldMk cId="3756856892" sldId="275"/>
-            <ac:picMk id="13" creationId="{4F0DF4D4-4FCB-E154-A46C-C3D07ADB59AF}"/>
-          </ac:picMkLst>
-        </pc:picChg>
-      </pc:sldChg>
-      <pc:sldChg chg="delSp modSp add ord replId">
-        <pc:chgData name="Farkas Miklós Tibor 171" userId="S::farmik171@hengersor.hu::18dfe6a4-9a0c-4bae-84a3-c95ba408505f" providerId="AD" clId="Web-{D9FD541B-B580-923B-DF89-3504367398DF}" dt="2026-04-12T16:21:40.009" v="499" actId="20577"/>
-        <pc:sldMkLst>
-          <pc:docMk/>
-          <pc:sldMk cId="4058511354" sldId="276"/>
-        </pc:sldMkLst>
-        <pc:spChg chg="mod">
-          <ac:chgData name="Farkas Miklós Tibor 171" userId="S::farmik171@hengersor.hu::18dfe6a4-9a0c-4bae-84a3-c95ba408505f" providerId="AD" clId="Web-{D9FD541B-B580-923B-DF89-3504367398DF}" dt="2026-04-12T16:21:40.009" v="499" actId="20577"/>
-          <ac:spMkLst>
-            <pc:docMk/>
-            <pc:sldMk cId="4058511354" sldId="276"/>
-            <ac:spMk id="2" creationId="{94CADF1D-B1E9-95BD-4AAB-6AA6FF7A329A}"/>
-          </ac:spMkLst>
-        </pc:spChg>
-        <pc:spChg chg="del mod">
-          <ac:chgData name="Farkas Miklós Tibor 171" userId="S::farmik171@hengersor.hu::18dfe6a4-9a0c-4bae-84a3-c95ba408505f" providerId="AD" clId="Web-{D9FD541B-B580-923B-DF89-3504367398DF}" dt="2026-04-12T15:47:13.791" v="221"/>
-          <ac:spMkLst>
-            <pc:docMk/>
-            <pc:sldMk cId="4058511354" sldId="276"/>
-            <ac:spMk id="3" creationId="{B23C3874-755C-D6BC-EAC9-5BD5B0E2202A}"/>
-          </ac:spMkLst>
-        </pc:spChg>
-      </pc:sldChg>
-      <pc:sldChg chg="addSp delSp modSp add replId">
-        <pc:chgData name="Farkas Miklós Tibor 171" userId="S::farmik171@hengersor.hu::18dfe6a4-9a0c-4bae-84a3-c95ba408505f" providerId="AD" clId="Web-{D9FD541B-B580-923B-DF89-3504367398DF}" dt="2026-04-12T16:11:09.648" v="420" actId="20577"/>
-        <pc:sldMkLst>
-          <pc:docMk/>
-          <pc:sldMk cId="4068225047" sldId="277"/>
-        </pc:sldMkLst>
-        <pc:spChg chg="mod">
-          <ac:chgData name="Farkas Miklós Tibor 171" userId="S::farmik171@hengersor.hu::18dfe6a4-9a0c-4bae-84a3-c95ba408505f" providerId="AD" clId="Web-{D9FD541B-B580-923B-DF89-3504367398DF}" dt="2026-04-12T16:02:43.171" v="278" actId="20577"/>
-          <ac:spMkLst>
-            <pc:docMk/>
-            <pc:sldMk cId="4068225047" sldId="277"/>
-            <ac:spMk id="2" creationId="{5EA53393-AA99-AFC9-8D1C-523CA3816854}"/>
-          </ac:spMkLst>
-        </pc:spChg>
-        <pc:spChg chg="add mod">
-          <ac:chgData name="Farkas Miklós Tibor 171" userId="S::farmik171@hengersor.hu::18dfe6a4-9a0c-4bae-84a3-c95ba408505f" providerId="AD" clId="Web-{D9FD541B-B580-923B-DF89-3504367398DF}" dt="2026-04-12T16:04:23.146" v="308" actId="14100"/>
-          <ac:spMkLst>
-            <pc:docMk/>
-            <pc:sldMk cId="4068225047" sldId="277"/>
-            <ac:spMk id="3" creationId="{753CAD71-16AF-F6AB-F666-AA055A2DB570}"/>
-          </ac:spMkLst>
-        </pc:spChg>
-        <pc:spChg chg="add mod">
-          <ac:chgData name="Farkas Miklós Tibor 171" userId="S::farmik171@hengersor.hu::18dfe6a4-9a0c-4bae-84a3-c95ba408505f" providerId="AD" clId="Web-{D9FD541B-B580-923B-DF89-3504367398DF}" dt="2026-04-12T16:04:08.848" v="301" actId="14100"/>
-          <ac:spMkLst>
-            <pc:docMk/>
-            <pc:sldMk cId="4068225047" sldId="277"/>
-            <ac:spMk id="4" creationId="{37D0E87B-AF20-517B-5B55-0129AEC68F7B}"/>
-          </ac:spMkLst>
-        </pc:spChg>
-        <pc:spChg chg="add del">
-          <ac:chgData name="Farkas Miklós Tibor 171" userId="S::farmik171@hengersor.hu::18dfe6a4-9a0c-4bae-84a3-c95ba408505f" providerId="AD" clId="Web-{D9FD541B-B580-923B-DF89-3504367398DF}" dt="2026-04-12T16:04:42.068" v="312"/>
-          <ac:spMkLst>
-            <pc:docMk/>
-            <pc:sldMk cId="4068225047" sldId="277"/>
-            <ac:spMk id="6" creationId="{60ECF125-883F-AA6E-16F4-914D2168A56F}"/>
-          </ac:spMkLst>
-        </pc:spChg>
-        <pc:spChg chg="add mod">
-          <ac:chgData name="Farkas Miklós Tibor 171" userId="S::farmik171@hengersor.hu::18dfe6a4-9a0c-4bae-84a3-c95ba408505f" providerId="AD" clId="Web-{D9FD541B-B580-923B-DF89-3504367398DF}" dt="2026-04-12T16:05:31.585" v="329" actId="20577"/>
-          <ac:spMkLst>
-            <pc:docMk/>
-            <pc:sldMk cId="4068225047" sldId="277"/>
-            <ac:spMk id="8" creationId="{732EC79A-7CB8-C175-6122-7A96A35B5EE2}"/>
-          </ac:spMkLst>
-        </pc:spChg>
-        <pc:spChg chg="mod">
-          <ac:chgData name="Farkas Miklós Tibor 171" userId="S::farmik171@hengersor.hu::18dfe6a4-9a0c-4bae-84a3-c95ba408505f" providerId="AD" clId="Web-{D9FD541B-B580-923B-DF89-3504367398DF}" dt="2026-04-12T16:08:37.448" v="373" actId="1076"/>
-          <ac:spMkLst>
-            <pc:docMk/>
-            <pc:sldMk cId="4068225047" sldId="277"/>
-            <ac:spMk id="9" creationId="{D49B2C24-1759-8E6B-945B-4A32A2ED0256}"/>
-          </ac:spMkLst>
-        </pc:spChg>
-        <pc:spChg chg="add mod">
-          <ac:chgData name="Farkas Miklós Tibor 171" userId="S::farmik171@hengersor.hu::18dfe6a4-9a0c-4bae-84a3-c95ba408505f" providerId="AD" clId="Web-{D9FD541B-B580-923B-DF89-3504367398DF}" dt="2026-04-12T16:05:59.727" v="338" actId="20577"/>
-          <ac:spMkLst>
-            <pc:docMk/>
-            <pc:sldMk cId="4068225047" sldId="277"/>
-            <ac:spMk id="10" creationId="{118B1B89-D005-51CF-345B-5564AB251523}"/>
-          </ac:spMkLst>
-        </pc:spChg>
-        <pc:spChg chg="mod">
-          <ac:chgData name="Farkas Miklós Tibor 171" userId="S::farmik171@hengersor.hu::18dfe6a4-9a0c-4bae-84a3-c95ba408505f" providerId="AD" clId="Web-{D9FD541B-B580-923B-DF89-3504367398DF}" dt="2026-04-12T16:10:05.903" v="389" actId="20577"/>
-          <ac:spMkLst>
-            <pc:docMk/>
-            <pc:sldMk cId="4068225047" sldId="277"/>
-            <ac:spMk id="11" creationId="{223F2F64-5320-B5C4-715D-52877364A1E9}"/>
-          </ac:spMkLst>
-        </pc:spChg>
-        <pc:spChg chg="add mod">
-          <ac:chgData name="Farkas Miklós Tibor 171" userId="S::farmik171@hengersor.hu::18dfe6a4-9a0c-4bae-84a3-c95ba408505f" providerId="AD" clId="Web-{D9FD541B-B580-923B-DF89-3504367398DF}" dt="2026-04-12T16:06:21.383" v="348" actId="14100"/>
-          <ac:spMkLst>
-            <pc:docMk/>
-            <pc:sldMk cId="4068225047" sldId="277"/>
-            <ac:spMk id="12" creationId="{2EB97A49-3BBA-7CB6-B7E9-5A498D18E9F6}"/>
-          </ac:spMkLst>
-        </pc:spChg>
-        <pc:spChg chg="add mod">
-          <ac:chgData name="Farkas Miklós Tibor 171" userId="S::farmik171@hengersor.hu::18dfe6a4-9a0c-4bae-84a3-c95ba408505f" providerId="AD" clId="Web-{D9FD541B-B580-923B-DF89-3504367398DF}" dt="2026-04-12T16:10:35.375" v="403" actId="20577"/>
-          <ac:spMkLst>
-            <pc:docMk/>
-            <pc:sldMk cId="4068225047" sldId="277"/>
-            <ac:spMk id="13" creationId="{5A6E3107-991C-D7AE-2ABA-0B463FF70131}"/>
-          </ac:spMkLst>
-        </pc:spChg>
-        <pc:spChg chg="add mod">
-          <ac:chgData name="Farkas Miklós Tibor 171" userId="S::farmik171@hengersor.hu::18dfe6a4-9a0c-4bae-84a3-c95ba408505f" providerId="AD" clId="Web-{D9FD541B-B580-923B-DF89-3504367398DF}" dt="2026-04-12T16:11:09.648" v="420" actId="20577"/>
-          <ac:spMkLst>
-            <pc:docMk/>
-            <pc:sldMk cId="4068225047" sldId="277"/>
-            <ac:spMk id="14" creationId="{519BF3D8-DE91-05E8-C295-6F8D3C89C278}"/>
-          </ac:spMkLst>
-        </pc:spChg>
-      </pc:sldChg>
-    </pc:docChg>
-  </pc:docChgLst>
-  <pc:docChgLst>
-    <pc:chgData name="Farkas Miklós Tibor 171" userId="S::farmik171@hengersor.hu::18dfe6a4-9a0c-4bae-84a3-c95ba408505f" providerId="AD" clId="Web-{5FAC232B-747B-F60A-6395-18A57DC5CFCA}"/>
-    <pc:docChg chg="addSld delSld modSld sldOrd">
-      <pc:chgData name="Farkas Miklós Tibor 171" userId="S::farmik171@hengersor.hu::18dfe6a4-9a0c-4bae-84a3-c95ba408505f" providerId="AD" clId="Web-{5FAC232B-747B-F60A-6395-18A57DC5CFCA}" dt="2026-04-12T15:20:47.131" v="73"/>
-      <pc:docMkLst>
-        <pc:docMk/>
-      </pc:docMkLst>
-      <pc:sldChg chg="del">
-        <pc:chgData name="Farkas Miklós Tibor 171" userId="S::farmik171@hengersor.hu::18dfe6a4-9a0c-4bae-84a3-c95ba408505f" providerId="AD" clId="Web-{5FAC232B-747B-F60A-6395-18A57DC5CFCA}" dt="2026-04-12T15:20:47.131" v="73"/>
-        <pc:sldMkLst>
-          <pc:docMk/>
-          <pc:sldMk cId="3786818564" sldId="260"/>
-        </pc:sldMkLst>
-      </pc:sldChg>
-      <pc:sldChg chg="del">
-        <pc:chgData name="Farkas Miklós Tibor 171" userId="S::farmik171@hengersor.hu::18dfe6a4-9a0c-4bae-84a3-c95ba408505f" providerId="AD" clId="Web-{5FAC232B-747B-F60A-6395-18A57DC5CFCA}" dt="2026-04-12T15:20:43.099" v="72"/>
-        <pc:sldMkLst>
-          <pc:docMk/>
-          <pc:sldMk cId="1323602992" sldId="261"/>
-        </pc:sldMkLst>
-      </pc:sldChg>
-      <pc:sldChg chg="del">
-        <pc:chgData name="Farkas Miklós Tibor 171" userId="S::farmik171@hengersor.hu::18dfe6a4-9a0c-4bae-84a3-c95ba408505f" providerId="AD" clId="Web-{5FAC232B-747B-F60A-6395-18A57DC5CFCA}" dt="2026-04-12T15:20:41.974" v="71"/>
-        <pc:sldMkLst>
-          <pc:docMk/>
-          <pc:sldMk cId="1506197516" sldId="262"/>
-        </pc:sldMkLst>
-      </pc:sldChg>
-      <pc:sldChg chg="del">
-        <pc:chgData name="Farkas Miklós Tibor 171" userId="S::farmik171@hengersor.hu::18dfe6a4-9a0c-4bae-84a3-c95ba408505f" providerId="AD" clId="Web-{5FAC232B-747B-F60A-6395-18A57DC5CFCA}" dt="2026-04-12T15:20:40.896" v="70"/>
-        <pc:sldMkLst>
-          <pc:docMk/>
-          <pc:sldMk cId="2048348239" sldId="263"/>
-        </pc:sldMkLst>
-      </pc:sldChg>
-      <pc:sldChg chg="del">
-        <pc:chgData name="Farkas Miklós Tibor 171" userId="S::farmik171@hengersor.hu::18dfe6a4-9a0c-4bae-84a3-c95ba408505f" providerId="AD" clId="Web-{5FAC232B-747B-F60A-6395-18A57DC5CFCA}" dt="2026-04-12T15:20:34.412" v="63"/>
-        <pc:sldMkLst>
-          <pc:docMk/>
-          <pc:sldMk cId="2846016438" sldId="264"/>
-        </pc:sldMkLst>
-      </pc:sldChg>
-      <pc:sldChg chg="del">
-        <pc:chgData name="Farkas Miklós Tibor 171" userId="S::farmik171@hengersor.hu::18dfe6a4-9a0c-4bae-84a3-c95ba408505f" providerId="AD" clId="Web-{5FAC232B-747B-F60A-6395-18A57DC5CFCA}" dt="2026-04-12T15:20:35.193" v="64"/>
-        <pc:sldMkLst>
-          <pc:docMk/>
-          <pc:sldMk cId="3771907162" sldId="265"/>
-        </pc:sldMkLst>
-      </pc:sldChg>
-      <pc:sldChg chg="del">
-        <pc:chgData name="Farkas Miklós Tibor 171" userId="S::farmik171@hengersor.hu::18dfe6a4-9a0c-4bae-84a3-c95ba408505f" providerId="AD" clId="Web-{5FAC232B-747B-F60A-6395-18A57DC5CFCA}" dt="2026-04-12T15:20:35.849" v="65"/>
-        <pc:sldMkLst>
-          <pc:docMk/>
-          <pc:sldMk cId="995410776" sldId="266"/>
-        </pc:sldMkLst>
-      </pc:sldChg>
-      <pc:sldChg chg="del">
-        <pc:chgData name="Farkas Miklós Tibor 171" userId="S::farmik171@hengersor.hu::18dfe6a4-9a0c-4bae-84a3-c95ba408505f" providerId="AD" clId="Web-{5FAC232B-747B-F60A-6395-18A57DC5CFCA}" dt="2026-04-12T15:20:36.521" v="66"/>
-        <pc:sldMkLst>
-          <pc:docMk/>
-          <pc:sldMk cId="1461151345" sldId="267"/>
-        </pc:sldMkLst>
-      </pc:sldChg>
-      <pc:sldChg chg="del">
-        <pc:chgData name="Farkas Miklós Tibor 171" userId="S::farmik171@hengersor.hu::18dfe6a4-9a0c-4bae-84a3-c95ba408505f" providerId="AD" clId="Web-{5FAC232B-747B-F60A-6395-18A57DC5CFCA}" dt="2026-04-12T15:20:37.115" v="67"/>
-        <pc:sldMkLst>
-          <pc:docMk/>
-          <pc:sldMk cId="2610049765" sldId="268"/>
-        </pc:sldMkLst>
-      </pc:sldChg>
-      <pc:sldChg chg="del">
-        <pc:chgData name="Farkas Miklós Tibor 171" userId="S::farmik171@hengersor.hu::18dfe6a4-9a0c-4bae-84a3-c95ba408505f" providerId="AD" clId="Web-{5FAC232B-747B-F60A-6395-18A57DC5CFCA}" dt="2026-04-12T15:20:37.693" v="68"/>
-        <pc:sldMkLst>
-          <pc:docMk/>
-          <pc:sldMk cId="2494251323" sldId="269"/>
-        </pc:sldMkLst>
-      </pc:sldChg>
-      <pc:sldChg chg="del">
-        <pc:chgData name="Farkas Miklós Tibor 171" userId="S::farmik171@hengersor.hu::18dfe6a4-9a0c-4bae-84a3-c95ba408505f" providerId="AD" clId="Web-{5FAC232B-747B-F60A-6395-18A57DC5CFCA}" dt="2026-04-12T15:20:39.068" v="69"/>
-        <pc:sldMkLst>
-          <pc:docMk/>
-          <pc:sldMk cId="680106883" sldId="270"/>
-        </pc:sldMkLst>
-      </pc:sldChg>
-      <pc:sldChg chg="modSp add ord replId">
-        <pc:chgData name="Farkas Miklós Tibor 171" userId="S::farmik171@hengersor.hu::18dfe6a4-9a0c-4bae-84a3-c95ba408505f" providerId="AD" clId="Web-{5FAC232B-747B-F60A-6395-18A57DC5CFCA}" dt="2026-04-12T15:19:50.692" v="62" actId="1076"/>
-        <pc:sldMkLst>
-          <pc:docMk/>
-          <pc:sldMk cId="2870810592" sldId="271"/>
-        </pc:sldMkLst>
-        <pc:spChg chg="mod">
-          <ac:chgData name="Farkas Miklós Tibor 171" userId="S::farmik171@hengersor.hu::18dfe6a4-9a0c-4bae-84a3-c95ba408505f" providerId="AD" clId="Web-{5FAC232B-747B-F60A-6395-18A57DC5CFCA}" dt="2026-04-12T15:17:57.753" v="8" actId="20577"/>
-          <ac:spMkLst>
-            <pc:docMk/>
-            <pc:sldMk cId="2870810592" sldId="271"/>
-            <ac:spMk id="2" creationId="{CC45702A-4635-9B9E-581C-6E89EFAA42A4}"/>
-          </ac:spMkLst>
-        </pc:spChg>
-        <pc:spChg chg="mod">
-          <ac:chgData name="Farkas Miklós Tibor 171" userId="S::farmik171@hengersor.hu::18dfe6a4-9a0c-4bae-84a3-c95ba408505f" providerId="AD" clId="Web-{5FAC232B-747B-F60A-6395-18A57DC5CFCA}" dt="2026-04-12T15:19:50.692" v="62" actId="1076"/>
-          <ac:spMkLst>
-            <pc:docMk/>
-            <pc:sldMk cId="2870810592" sldId="271"/>
-            <ac:spMk id="8" creationId="{DD7C3AB6-1221-CB27-C9C5-41B644873085}"/>
-          </ac:spMkLst>
-        </pc:spChg>
-      </pc:sldChg>
-    </pc:docChg>
-  </pc:docChgLst>
-  <pc:docChgLst>
-    <pc:chgData name="Farkas Miklós Tibor 171" userId="S::farmik171@hengersor.hu::18dfe6a4-9a0c-4bae-84a3-c95ba408505f" providerId="AD" clId="Web-{DD9FBD9F-EC8B-4452-A4DB-38C7B2337E72}"/>
-    <pc:docChg chg="addSld modSld">
-      <pc:chgData name="Farkas Miklós Tibor 171" userId="S::farmik171@hengersor.hu::18dfe6a4-9a0c-4bae-84a3-c95ba408505f" providerId="AD" clId="Web-{DD9FBD9F-EC8B-4452-A4DB-38C7B2337E72}" dt="2026-04-12T15:25:21.875" v="28" actId="14100"/>
-      <pc:docMkLst>
-        <pc:docMk/>
-      </pc:docMkLst>
-      <pc:sldChg chg="addSp modSp add replId">
-        <pc:chgData name="Farkas Miklós Tibor 171" userId="S::farmik171@hengersor.hu::18dfe6a4-9a0c-4bae-84a3-c95ba408505f" providerId="AD" clId="Web-{DD9FBD9F-EC8B-4452-A4DB-38C7B2337E72}" dt="2026-04-12T15:25:21.875" v="28" actId="14100"/>
-        <pc:sldMkLst>
-          <pc:docMk/>
-          <pc:sldMk cId="4059739650" sldId="272"/>
-        </pc:sldMkLst>
-        <pc:spChg chg="mod">
-          <ac:chgData name="Farkas Miklós Tibor 171" userId="S::farmik171@hengersor.hu::18dfe6a4-9a0c-4bae-84a3-c95ba408505f" providerId="AD" clId="Web-{DD9FBD9F-EC8B-4452-A4DB-38C7B2337E72}" dt="2026-04-12T15:22:15.637" v="15" actId="14100"/>
-          <ac:spMkLst>
-            <pc:docMk/>
-            <pc:sldMk cId="4059739650" sldId="272"/>
-            <ac:spMk id="2" creationId="{912303E3-5D9B-E17C-24E1-23B2B2C555F0}"/>
-          </ac:spMkLst>
-        </pc:spChg>
-        <pc:spChg chg="add mod">
-          <ac:chgData name="Farkas Miklós Tibor 171" userId="S::farmik171@hengersor.hu::18dfe6a4-9a0c-4bae-84a3-c95ba408505f" providerId="AD" clId="Web-{DD9FBD9F-EC8B-4452-A4DB-38C7B2337E72}" dt="2026-04-12T15:25:21.875" v="28" actId="14100"/>
-          <ac:spMkLst>
-            <pc:docMk/>
-            <pc:sldMk cId="4059739650" sldId="272"/>
-            <ac:spMk id="4" creationId="{DECD01B4-FC90-7BBB-35DB-90164FE56B42}"/>
-          </ac:spMkLst>
-        </pc:spChg>
-        <pc:spChg chg="mod">
-          <ac:chgData name="Farkas Miklós Tibor 171" userId="S::farmik171@hengersor.hu::18dfe6a4-9a0c-4bae-84a3-c95ba408505f" providerId="AD" clId="Web-{DD9FBD9F-EC8B-4452-A4DB-38C7B2337E72}" dt="2026-04-12T15:21:52.323" v="6" actId="14100"/>
-          <ac:spMkLst>
-            <pc:docMk/>
-            <pc:sldMk cId="4059739650" sldId="272"/>
-            <ac:spMk id="6" creationId="{78BB33E3-EC67-1775-98D9-582AB0A23A7A}"/>
-          </ac:spMkLst>
-        </pc:spChg>
-        <pc:spChg chg="mod">
-          <ac:chgData name="Farkas Miklós Tibor 171" userId="S::farmik171@hengersor.hu::18dfe6a4-9a0c-4bae-84a3-c95ba408505f" providerId="AD" clId="Web-{DD9FBD9F-EC8B-4452-A4DB-38C7B2337E72}" dt="2026-04-12T15:22:00.620" v="9" actId="1076"/>
-          <ac:spMkLst>
-            <pc:docMk/>
-            <pc:sldMk cId="4059739650" sldId="272"/>
-            <ac:spMk id="8" creationId="{51A41DDC-3521-4428-F7E2-AE00CA484243}"/>
-          </ac:spMkLst>
-        </pc:spChg>
-        <pc:picChg chg="add mod">
-          <ac:chgData name="Farkas Miklós Tibor 171" userId="S::farmik171@hengersor.hu::18dfe6a4-9a0c-4bae-84a3-c95ba408505f" providerId="AD" clId="Web-{DD9FBD9F-EC8B-4452-A4DB-38C7B2337E72}" dt="2026-04-12T15:23:06.498" v="20" actId="1076"/>
-          <ac:picMkLst>
-            <pc:docMk/>
-            <pc:sldMk cId="4059739650" sldId="272"/>
-            <ac:picMk id="3" creationId="{56623FA1-32CB-34DF-6DAC-FC4CB81CF75D}"/>
-          </ac:picMkLst>
-        </pc:picChg>
-      </pc:sldChg>
-    </pc:docChg>
-  </pc:docChgLst>
-</pc:chgInfo>
 </file>
 
 <file path=ppt/notesMasters/notesMaster1.xml><?xml version="1.0" encoding="utf-8"?>
@@ -813,7 +218,7 @@
           <a:p>
             <a:fld id="{3AD7DFB8-A25D-4343-B516-B1E8AB0AA4FB}" type="datetimeFigureOut">
               <a:rPr lang="hu-HU" smtClean="0"/>
-              <a:t>2026. 04. 12.</a:t>
+              <a:t>2026. 04. 18.</a:t>
             </a:fld>
             <a:endParaRPr lang="hu-HU"/>
           </a:p>
@@ -1125,48 +530,1056 @@
           <a:lstStyle/>
           <a:p>
             <a:r>
+              <a:rPr lang="en-US">
+                <a:ea typeface="Calibri"/>
+                <a:cs typeface="Calibri"/>
+              </a:rPr>
+              <a:t>Miki</a:t>
+            </a:r>
+          </a:p>
+        </p:txBody>
+      </p:sp>
+      <p:sp>
+        <p:nvSpPr>
+          <p:cNvPr id="4" name="Dia számának helye 3"/>
+          <p:cNvSpPr>
+            <a:spLocks noGrp="1"/>
+          </p:cNvSpPr>
+          <p:nvPr>
+            <p:ph type="sldNum" sz="quarter" idx="5"/>
+          </p:nvPr>
+        </p:nvSpPr>
+        <p:spPr/>
+        <p:txBody>
+          <a:bodyPr/>
+          <a:lstStyle/>
+          <a:p>
+            <a:fld id="{68CBD90C-AA85-4993-8EB6-76EB5E29832B}" type="slidenum">
+              <a:rPr lang="hu-HU" smtClean="0"/>
+              <a:t>2</a:t>
+            </a:fld>
+            <a:endParaRPr lang="hu-HU"/>
+          </a:p>
+        </p:txBody>
+      </p:sp>
+    </p:spTree>
+    <p:extLst>
+      <p:ext uri="{BB962C8B-B14F-4D97-AF65-F5344CB8AC3E}">
+        <p14:creationId xmlns:p14="http://schemas.microsoft.com/office/powerpoint/2010/main" val="3238341870"/>
+      </p:ext>
+    </p:extLst>
+  </p:cSld>
+  <p:clrMapOvr>
+    <a:masterClrMapping/>
+  </p:clrMapOvr>
+</p:notes>
+</file>
+
+<file path=ppt/notesSlides/notesSlide10.xml><?xml version="1.0" encoding="utf-8"?>
+<p:notes xmlns:a="http://schemas.openxmlformats.org/drawingml/2006/main" xmlns:r="http://schemas.openxmlformats.org/officeDocument/2006/relationships" xmlns:p="http://schemas.openxmlformats.org/presentationml/2006/main">
+  <p:cSld>
+    <p:spTree>
+      <p:nvGrpSpPr>
+        <p:cNvPr id="1" name=""/>
+        <p:cNvGrpSpPr/>
+        <p:nvPr/>
+      </p:nvGrpSpPr>
+      <p:grpSpPr>
+        <a:xfrm>
+          <a:off x="0" y="0"/>
+          <a:ext cx="0" cy="0"/>
+          <a:chOff x="0" y="0"/>
+          <a:chExt cx="0" cy="0"/>
+        </a:xfrm>
+      </p:grpSpPr>
+      <p:sp>
+        <p:nvSpPr>
+          <p:cNvPr id="2" name="Diakép helye 1"/>
+          <p:cNvSpPr>
+            <a:spLocks noGrp="1" noRot="1" noChangeAspect="1"/>
+          </p:cNvSpPr>
+          <p:nvPr>
+            <p:ph type="sldImg"/>
+          </p:nvPr>
+        </p:nvSpPr>
+        <p:spPr/>
+      </p:sp>
+      <p:sp>
+        <p:nvSpPr>
+          <p:cNvPr id="3" name="Jegyzetek helye 2"/>
+          <p:cNvSpPr>
+            <a:spLocks noGrp="1"/>
+          </p:cNvSpPr>
+          <p:nvPr>
+            <p:ph type="body" idx="1"/>
+          </p:nvPr>
+        </p:nvSpPr>
+        <p:spPr/>
+        <p:txBody>
+          <a:bodyPr/>
+          <a:lstStyle/>
+          <a:p>
+            <a:r>
+              <a:rPr lang="en-US" dirty="0" err="1">
+                <a:ea typeface="Calibri"/>
+                <a:cs typeface="Calibri"/>
+              </a:rPr>
+              <a:t>miki</a:t>
+            </a:r>
+          </a:p>
+        </p:txBody>
+      </p:sp>
+      <p:sp>
+        <p:nvSpPr>
+          <p:cNvPr id="4" name="Dia számának helye 3"/>
+          <p:cNvSpPr>
+            <a:spLocks noGrp="1"/>
+          </p:cNvSpPr>
+          <p:nvPr>
+            <p:ph type="sldNum" sz="quarter" idx="5"/>
+          </p:nvPr>
+        </p:nvSpPr>
+        <p:spPr/>
+        <p:txBody>
+          <a:bodyPr/>
+          <a:lstStyle/>
+          <a:p>
+            <a:fld id="{68CBD90C-AA85-4993-8EB6-76EB5E29832B}" type="slidenum">
+              <a:rPr lang="hu-HU" smtClean="0"/>
+              <a:t>11</a:t>
+            </a:fld>
+            <a:endParaRPr lang="hu-HU"/>
+          </a:p>
+        </p:txBody>
+      </p:sp>
+    </p:spTree>
+    <p:extLst>
+      <p:ext uri="{BB962C8B-B14F-4D97-AF65-F5344CB8AC3E}">
+        <p14:creationId xmlns:p14="http://schemas.microsoft.com/office/powerpoint/2010/main" val="4080454039"/>
+      </p:ext>
+    </p:extLst>
+  </p:cSld>
+  <p:clrMapOvr>
+    <a:masterClrMapping/>
+  </p:clrMapOvr>
+</p:notes>
+</file>
+
+<file path=ppt/notesSlides/notesSlide11.xml><?xml version="1.0" encoding="utf-8"?>
+<p:notes xmlns:a="http://schemas.openxmlformats.org/drawingml/2006/main" xmlns:r="http://schemas.openxmlformats.org/officeDocument/2006/relationships" xmlns:p="http://schemas.openxmlformats.org/presentationml/2006/main">
+  <p:cSld>
+    <p:spTree>
+      <p:nvGrpSpPr>
+        <p:cNvPr id="1" name=""/>
+        <p:cNvGrpSpPr/>
+        <p:nvPr/>
+      </p:nvGrpSpPr>
+      <p:grpSpPr>
+        <a:xfrm>
+          <a:off x="0" y="0"/>
+          <a:ext cx="0" cy="0"/>
+          <a:chOff x="0" y="0"/>
+          <a:chExt cx="0" cy="0"/>
+        </a:xfrm>
+      </p:grpSpPr>
+      <p:sp>
+        <p:nvSpPr>
+          <p:cNvPr id="2" name="Diakép helye 1"/>
+          <p:cNvSpPr>
+            <a:spLocks noGrp="1" noRot="1" noChangeAspect="1"/>
+          </p:cNvSpPr>
+          <p:nvPr>
+            <p:ph type="sldImg"/>
+          </p:nvPr>
+        </p:nvSpPr>
+        <p:spPr/>
+      </p:sp>
+      <p:sp>
+        <p:nvSpPr>
+          <p:cNvPr id="3" name="Jegyzetek helye 2"/>
+          <p:cNvSpPr>
+            <a:spLocks noGrp="1"/>
+          </p:cNvSpPr>
+          <p:nvPr>
+            <p:ph type="body" idx="1"/>
+          </p:nvPr>
+        </p:nvSpPr>
+        <p:spPr/>
+        <p:txBody>
+          <a:bodyPr/>
+          <a:lstStyle/>
+          <a:p>
+            <a:r>
+              <a:rPr lang="en-US" dirty="0" err="1">
+                <a:ea typeface="Calibri"/>
+                <a:cs typeface="Calibri"/>
+              </a:rPr>
+              <a:t>Mindeki</a:t>
+            </a:r>
+            <a:r>
+              <a:rPr lang="en-US" dirty="0">
+                <a:ea typeface="Calibri"/>
+                <a:cs typeface="Calibri"/>
+              </a:rPr>
+              <a:t> a </a:t>
+            </a:r>
+            <a:r>
+              <a:rPr lang="en-US" dirty="0" err="1">
+                <a:ea typeface="Calibri"/>
+                <a:cs typeface="Calibri"/>
+              </a:rPr>
+              <a:t>sajat</a:t>
+            </a:r>
+            <a:r>
+              <a:rPr lang="en-US" dirty="0">
+                <a:ea typeface="Calibri"/>
+                <a:cs typeface="Calibri"/>
+              </a:rPr>
+              <a:t> </a:t>
+            </a:r>
+            <a:r>
+              <a:rPr lang="en-US" dirty="0" err="1">
+                <a:ea typeface="Calibri"/>
+                <a:cs typeface="Calibri"/>
+              </a:rPr>
+              <a:t>maga</a:t>
+            </a:r>
+            <a:r>
+              <a:rPr lang="en-US" dirty="0">
+                <a:ea typeface="Calibri"/>
+                <a:cs typeface="Calibri"/>
+              </a:rPr>
+              <a:t> </a:t>
+            </a:r>
+            <a:r>
+              <a:rPr lang="en-US" dirty="0" err="1">
+                <a:ea typeface="Calibri"/>
+                <a:cs typeface="Calibri"/>
+              </a:rPr>
+              <a:t>dolgat</a:t>
+            </a:r>
+            <a:r>
+              <a:rPr lang="en-US" dirty="0">
+                <a:ea typeface="Calibri"/>
+                <a:cs typeface="Calibri"/>
+              </a:rPr>
+              <a:t> </a:t>
+            </a:r>
+            <a:r>
+              <a:rPr lang="en-US" dirty="0" err="1">
+                <a:ea typeface="Calibri"/>
+                <a:cs typeface="Calibri"/>
+              </a:rPr>
+              <a:t>elmondja</a:t>
+            </a:r>
+          </a:p>
+        </p:txBody>
+      </p:sp>
+      <p:sp>
+        <p:nvSpPr>
+          <p:cNvPr id="4" name="Dia számának helye 3"/>
+          <p:cNvSpPr>
+            <a:spLocks noGrp="1"/>
+          </p:cNvSpPr>
+          <p:nvPr>
+            <p:ph type="sldNum" sz="quarter" idx="5"/>
+          </p:nvPr>
+        </p:nvSpPr>
+        <p:spPr/>
+        <p:txBody>
+          <a:bodyPr/>
+          <a:lstStyle/>
+          <a:p>
+            <a:fld id="{68CBD90C-AA85-4993-8EB6-76EB5E29832B}" type="slidenum">
+              <a:rPr lang="hu-HU" smtClean="0"/>
+              <a:t>12</a:t>
+            </a:fld>
+            <a:endParaRPr lang="hu-HU"/>
+          </a:p>
+        </p:txBody>
+      </p:sp>
+    </p:spTree>
+    <p:extLst>
+      <p:ext uri="{BB962C8B-B14F-4D97-AF65-F5344CB8AC3E}">
+        <p14:creationId xmlns:p14="http://schemas.microsoft.com/office/powerpoint/2010/main" val="2936849826"/>
+      </p:ext>
+    </p:extLst>
+  </p:cSld>
+  <p:clrMapOvr>
+    <a:masterClrMapping/>
+  </p:clrMapOvr>
+</p:notes>
+</file>
+
+<file path=ppt/notesSlides/notesSlide12.xml><?xml version="1.0" encoding="utf-8"?>
+<p:notes xmlns:a="http://schemas.openxmlformats.org/drawingml/2006/main" xmlns:r="http://schemas.openxmlformats.org/officeDocument/2006/relationships" xmlns:p="http://schemas.openxmlformats.org/presentationml/2006/main">
+  <p:cSld>
+    <p:spTree>
+      <p:nvGrpSpPr>
+        <p:cNvPr id="1" name=""/>
+        <p:cNvGrpSpPr/>
+        <p:nvPr/>
+      </p:nvGrpSpPr>
+      <p:grpSpPr>
+        <a:xfrm>
+          <a:off x="0" y="0"/>
+          <a:ext cx="0" cy="0"/>
+          <a:chOff x="0" y="0"/>
+          <a:chExt cx="0" cy="0"/>
+        </a:xfrm>
+      </p:grpSpPr>
+      <p:sp>
+        <p:nvSpPr>
+          <p:cNvPr id="2" name="Diakép helye 1"/>
+          <p:cNvSpPr>
+            <a:spLocks noGrp="1" noRot="1" noChangeAspect="1"/>
+          </p:cNvSpPr>
+          <p:nvPr>
+            <p:ph type="sldImg"/>
+          </p:nvPr>
+        </p:nvSpPr>
+        <p:spPr/>
+      </p:sp>
+      <p:sp>
+        <p:nvSpPr>
+          <p:cNvPr id="3" name="Jegyzetek helye 2"/>
+          <p:cNvSpPr>
+            <a:spLocks noGrp="1"/>
+          </p:cNvSpPr>
+          <p:nvPr>
+            <p:ph type="body" idx="1"/>
+          </p:nvPr>
+        </p:nvSpPr>
+        <p:spPr/>
+        <p:txBody>
+          <a:bodyPr/>
+          <a:lstStyle/>
+          <a:p>
+            <a:r>
+              <a:rPr lang="en-US" dirty="0" err="1">
+                <a:ea typeface="Calibri"/>
+                <a:cs typeface="Calibri"/>
+              </a:rPr>
+              <a:t>Atvaltunk</a:t>
+            </a:r>
+            <a:r>
+              <a:rPr lang="en-US" dirty="0">
+                <a:ea typeface="Calibri"/>
+                <a:cs typeface="Calibri"/>
+              </a:rPr>
+              <a:t> </a:t>
+            </a:r>
+            <a:r>
+              <a:rPr lang="en-US" dirty="0" err="1">
+                <a:ea typeface="Calibri"/>
+                <a:cs typeface="Calibri"/>
+              </a:rPr>
+              <a:t>az</a:t>
+            </a:r>
+            <a:r>
+              <a:rPr lang="en-US" dirty="0">
+                <a:ea typeface="Calibri"/>
+                <a:cs typeface="Calibri"/>
+              </a:rPr>
+              <a:t> </a:t>
+            </a:r>
+            <a:r>
+              <a:rPr lang="en-US" dirty="0" err="1">
+                <a:ea typeface="Calibri"/>
+                <a:cs typeface="Calibri"/>
+              </a:rPr>
+              <a:t>oldalra</a:t>
+            </a:r>
+          </a:p>
+        </p:txBody>
+      </p:sp>
+      <p:sp>
+        <p:nvSpPr>
+          <p:cNvPr id="4" name="Dia számának helye 3"/>
+          <p:cNvSpPr>
+            <a:spLocks noGrp="1"/>
+          </p:cNvSpPr>
+          <p:nvPr>
+            <p:ph type="sldNum" sz="quarter" idx="5"/>
+          </p:nvPr>
+        </p:nvSpPr>
+        <p:spPr/>
+        <p:txBody>
+          <a:bodyPr/>
+          <a:lstStyle/>
+          <a:p>
+            <a:fld id="{68CBD90C-AA85-4993-8EB6-76EB5E29832B}" type="slidenum">
+              <a:rPr lang="hu-HU" smtClean="0"/>
+              <a:t>13</a:t>
+            </a:fld>
+            <a:endParaRPr lang="hu-HU"/>
+          </a:p>
+        </p:txBody>
+      </p:sp>
+    </p:spTree>
+    <p:extLst>
+      <p:ext uri="{BB962C8B-B14F-4D97-AF65-F5344CB8AC3E}">
+        <p14:creationId xmlns:p14="http://schemas.microsoft.com/office/powerpoint/2010/main" val="139410004"/>
+      </p:ext>
+    </p:extLst>
+  </p:cSld>
+  <p:clrMapOvr>
+    <a:masterClrMapping/>
+  </p:clrMapOvr>
+</p:notes>
+</file>
+
+<file path=ppt/notesSlides/notesSlide2.xml><?xml version="1.0" encoding="utf-8"?>
+<p:notes xmlns:a="http://schemas.openxmlformats.org/drawingml/2006/main" xmlns:r="http://schemas.openxmlformats.org/officeDocument/2006/relationships" xmlns:p="http://schemas.openxmlformats.org/presentationml/2006/main">
+  <p:cSld>
+    <p:spTree>
+      <p:nvGrpSpPr>
+        <p:cNvPr id="1" name=""/>
+        <p:cNvGrpSpPr/>
+        <p:nvPr/>
+      </p:nvGrpSpPr>
+      <p:grpSpPr>
+        <a:xfrm>
+          <a:off x="0" y="0"/>
+          <a:ext cx="0" cy="0"/>
+          <a:chOff x="0" y="0"/>
+          <a:chExt cx="0" cy="0"/>
+        </a:xfrm>
+      </p:grpSpPr>
+      <p:sp>
+        <p:nvSpPr>
+          <p:cNvPr id="2" name="Diakép helye 1"/>
+          <p:cNvSpPr>
+            <a:spLocks noGrp="1" noRot="1" noChangeAspect="1"/>
+          </p:cNvSpPr>
+          <p:nvPr>
+            <p:ph type="sldImg"/>
+          </p:nvPr>
+        </p:nvSpPr>
+        <p:spPr/>
+      </p:sp>
+      <p:sp>
+        <p:nvSpPr>
+          <p:cNvPr id="3" name="Jegyzetek helye 2"/>
+          <p:cNvSpPr>
+            <a:spLocks noGrp="1"/>
+          </p:cNvSpPr>
+          <p:nvPr>
+            <p:ph type="body" idx="1"/>
+          </p:nvPr>
+        </p:nvSpPr>
+        <p:spPr/>
+        <p:txBody>
+          <a:bodyPr/>
+          <a:lstStyle/>
+          <a:p>
+            <a:r>
+              <a:rPr lang="en-US">
+                <a:ea typeface="Calibri"/>
+                <a:cs typeface="Calibri"/>
+              </a:rPr>
+              <a:t>Miki</a:t>
+            </a:r>
+          </a:p>
+        </p:txBody>
+      </p:sp>
+      <p:sp>
+        <p:nvSpPr>
+          <p:cNvPr id="4" name="Dia számának helye 3"/>
+          <p:cNvSpPr>
+            <a:spLocks noGrp="1"/>
+          </p:cNvSpPr>
+          <p:nvPr>
+            <p:ph type="sldNum" sz="quarter" idx="5"/>
+          </p:nvPr>
+        </p:nvSpPr>
+        <p:spPr/>
+        <p:txBody>
+          <a:bodyPr/>
+          <a:lstStyle/>
+          <a:p>
+            <a:fld id="{68CBD90C-AA85-4993-8EB6-76EB5E29832B}" type="slidenum">
+              <a:rPr lang="hu-HU" smtClean="0"/>
+              <a:t>3</a:t>
+            </a:fld>
+            <a:endParaRPr lang="hu-HU"/>
+          </a:p>
+        </p:txBody>
+      </p:sp>
+    </p:spTree>
+    <p:extLst>
+      <p:ext uri="{BB962C8B-B14F-4D97-AF65-F5344CB8AC3E}">
+        <p14:creationId xmlns:p14="http://schemas.microsoft.com/office/powerpoint/2010/main" val="2844467173"/>
+      </p:ext>
+    </p:extLst>
+  </p:cSld>
+  <p:clrMapOvr>
+    <a:masterClrMapping/>
+  </p:clrMapOvr>
+</p:notes>
+</file>
+
+<file path=ppt/notesSlides/notesSlide3.xml><?xml version="1.0" encoding="utf-8"?>
+<p:notes xmlns:a="http://schemas.openxmlformats.org/drawingml/2006/main" xmlns:r="http://schemas.openxmlformats.org/officeDocument/2006/relationships" xmlns:p="http://schemas.openxmlformats.org/presentationml/2006/main">
+  <p:cSld>
+    <p:spTree>
+      <p:nvGrpSpPr>
+        <p:cNvPr id="1" name=""/>
+        <p:cNvGrpSpPr/>
+        <p:nvPr/>
+      </p:nvGrpSpPr>
+      <p:grpSpPr>
+        <a:xfrm>
+          <a:off x="0" y="0"/>
+          <a:ext cx="0" cy="0"/>
+          <a:chOff x="0" y="0"/>
+          <a:chExt cx="0" cy="0"/>
+        </a:xfrm>
+      </p:grpSpPr>
+      <p:sp>
+        <p:nvSpPr>
+          <p:cNvPr id="2" name="Diakép helye 1"/>
+          <p:cNvSpPr>
+            <a:spLocks noGrp="1" noRot="1" noChangeAspect="1"/>
+          </p:cNvSpPr>
+          <p:nvPr>
+            <p:ph type="sldImg"/>
+          </p:nvPr>
+        </p:nvSpPr>
+        <p:spPr/>
+      </p:sp>
+      <p:sp>
+        <p:nvSpPr>
+          <p:cNvPr id="3" name="Jegyzetek helye 2"/>
+          <p:cNvSpPr>
+            <a:spLocks noGrp="1"/>
+          </p:cNvSpPr>
+          <p:nvPr>
+            <p:ph type="body" idx="1"/>
+          </p:nvPr>
+        </p:nvSpPr>
+        <p:spPr/>
+        <p:txBody>
+          <a:bodyPr/>
+          <a:lstStyle/>
+          <a:p>
+            <a:r>
+              <a:rPr lang="en-US">
+                <a:ea typeface="Calibri"/>
+                <a:cs typeface="Calibri"/>
+              </a:rPr>
+              <a:t>Simo</a:t>
+            </a:r>
+          </a:p>
+        </p:txBody>
+      </p:sp>
+      <p:sp>
+        <p:nvSpPr>
+          <p:cNvPr id="4" name="Dia számának helye 3"/>
+          <p:cNvSpPr>
+            <a:spLocks noGrp="1"/>
+          </p:cNvSpPr>
+          <p:nvPr>
+            <p:ph type="sldNum" sz="quarter" idx="5"/>
+          </p:nvPr>
+        </p:nvSpPr>
+        <p:spPr/>
+        <p:txBody>
+          <a:bodyPr/>
+          <a:lstStyle/>
+          <a:p>
+            <a:fld id="{68CBD90C-AA85-4993-8EB6-76EB5E29832B}" type="slidenum">
+              <a:rPr lang="hu-HU" smtClean="0"/>
+              <a:t>4</a:t>
+            </a:fld>
+            <a:endParaRPr lang="hu-HU"/>
+          </a:p>
+        </p:txBody>
+      </p:sp>
+    </p:spTree>
+    <p:extLst>
+      <p:ext uri="{BB962C8B-B14F-4D97-AF65-F5344CB8AC3E}">
+        <p14:creationId xmlns:p14="http://schemas.microsoft.com/office/powerpoint/2010/main" val="1873010660"/>
+      </p:ext>
+    </p:extLst>
+  </p:cSld>
+  <p:clrMapOvr>
+    <a:masterClrMapping/>
+  </p:clrMapOvr>
+</p:notes>
+</file>
+
+<file path=ppt/notesSlides/notesSlide4.xml><?xml version="1.0" encoding="utf-8"?>
+<p:notes xmlns:a="http://schemas.openxmlformats.org/drawingml/2006/main" xmlns:r="http://schemas.openxmlformats.org/officeDocument/2006/relationships" xmlns:p="http://schemas.openxmlformats.org/presentationml/2006/main">
+  <p:cSld>
+    <p:spTree>
+      <p:nvGrpSpPr>
+        <p:cNvPr id="1" name=""/>
+        <p:cNvGrpSpPr/>
+        <p:nvPr/>
+      </p:nvGrpSpPr>
+      <p:grpSpPr>
+        <a:xfrm>
+          <a:off x="0" y="0"/>
+          <a:ext cx="0" cy="0"/>
+          <a:chOff x="0" y="0"/>
+          <a:chExt cx="0" cy="0"/>
+        </a:xfrm>
+      </p:grpSpPr>
+      <p:sp>
+        <p:nvSpPr>
+          <p:cNvPr id="2" name="Diakép helye 1"/>
+          <p:cNvSpPr>
+            <a:spLocks noGrp="1" noRot="1" noChangeAspect="1"/>
+          </p:cNvSpPr>
+          <p:nvPr>
+            <p:ph type="sldImg"/>
+          </p:nvPr>
+        </p:nvSpPr>
+        <p:spPr/>
+      </p:sp>
+      <p:sp>
+        <p:nvSpPr>
+          <p:cNvPr id="3" name="Jegyzetek helye 2"/>
+          <p:cNvSpPr>
+            <a:spLocks noGrp="1"/>
+          </p:cNvSpPr>
+          <p:nvPr>
+            <p:ph type="body" idx="1"/>
+          </p:nvPr>
+        </p:nvSpPr>
+        <p:spPr/>
+        <p:txBody>
+          <a:bodyPr/>
+          <a:lstStyle/>
+          <a:p>
+            <a:r>
+              <a:rPr lang="en-US">
+                <a:ea typeface="Calibri"/>
+                <a:cs typeface="Calibri"/>
+              </a:rPr>
+              <a:t>Vendel</a:t>
+            </a:r>
+          </a:p>
+        </p:txBody>
+      </p:sp>
+      <p:sp>
+        <p:nvSpPr>
+          <p:cNvPr id="4" name="Dia számának helye 3"/>
+          <p:cNvSpPr>
+            <a:spLocks noGrp="1"/>
+          </p:cNvSpPr>
+          <p:nvPr>
+            <p:ph type="sldNum" sz="quarter" idx="5"/>
+          </p:nvPr>
+        </p:nvSpPr>
+        <p:spPr/>
+        <p:txBody>
+          <a:bodyPr/>
+          <a:lstStyle/>
+          <a:p>
+            <a:fld id="{68CBD90C-AA85-4993-8EB6-76EB5E29832B}" type="slidenum">
+              <a:rPr lang="hu-HU" smtClean="0"/>
+              <a:t>5</a:t>
+            </a:fld>
+            <a:endParaRPr lang="hu-HU"/>
+          </a:p>
+        </p:txBody>
+      </p:sp>
+    </p:spTree>
+    <p:extLst>
+      <p:ext uri="{BB962C8B-B14F-4D97-AF65-F5344CB8AC3E}">
+        <p14:creationId xmlns:p14="http://schemas.microsoft.com/office/powerpoint/2010/main" val="4213966022"/>
+      </p:ext>
+    </p:extLst>
+  </p:cSld>
+  <p:clrMapOvr>
+    <a:masterClrMapping/>
+  </p:clrMapOvr>
+</p:notes>
+</file>
+
+<file path=ppt/notesSlides/notesSlide5.xml><?xml version="1.0" encoding="utf-8"?>
+<p:notes xmlns:a="http://schemas.openxmlformats.org/drawingml/2006/main" xmlns:r="http://schemas.openxmlformats.org/officeDocument/2006/relationships" xmlns:p="http://schemas.openxmlformats.org/presentationml/2006/main">
+  <p:cSld>
+    <p:spTree>
+      <p:nvGrpSpPr>
+        <p:cNvPr id="1" name=""/>
+        <p:cNvGrpSpPr/>
+        <p:nvPr/>
+      </p:nvGrpSpPr>
+      <p:grpSpPr>
+        <a:xfrm>
+          <a:off x="0" y="0"/>
+          <a:ext cx="0" cy="0"/>
+          <a:chOff x="0" y="0"/>
+          <a:chExt cx="0" cy="0"/>
+        </a:xfrm>
+      </p:grpSpPr>
+      <p:sp>
+        <p:nvSpPr>
+          <p:cNvPr id="2" name="Diakép helye 1"/>
+          <p:cNvSpPr>
+            <a:spLocks noGrp="1" noRot="1" noChangeAspect="1"/>
+          </p:cNvSpPr>
+          <p:nvPr>
+            <p:ph type="sldImg"/>
+          </p:nvPr>
+        </p:nvSpPr>
+        <p:spPr/>
+      </p:sp>
+      <p:sp>
+        <p:nvSpPr>
+          <p:cNvPr id="3" name="Jegyzetek helye 2"/>
+          <p:cNvSpPr>
+            <a:spLocks noGrp="1"/>
+          </p:cNvSpPr>
+          <p:nvPr>
+            <p:ph type="body" idx="1"/>
+          </p:nvPr>
+        </p:nvSpPr>
+        <p:spPr/>
+        <p:txBody>
+          <a:bodyPr/>
+          <a:lstStyle/>
+          <a:p>
+            <a:r>
+              <a:rPr lang="en-US">
+                <a:ea typeface="Calibri"/>
+                <a:cs typeface="Calibri"/>
+              </a:rPr>
+              <a:t>simo</a:t>
+            </a:r>
+          </a:p>
+        </p:txBody>
+      </p:sp>
+      <p:sp>
+        <p:nvSpPr>
+          <p:cNvPr id="4" name="Dia számának helye 3"/>
+          <p:cNvSpPr>
+            <a:spLocks noGrp="1"/>
+          </p:cNvSpPr>
+          <p:nvPr>
+            <p:ph type="sldNum" sz="quarter" idx="5"/>
+          </p:nvPr>
+        </p:nvSpPr>
+        <p:spPr/>
+        <p:txBody>
+          <a:bodyPr/>
+          <a:lstStyle/>
+          <a:p>
+            <a:fld id="{68CBD90C-AA85-4993-8EB6-76EB5E29832B}" type="slidenum">
+              <a:rPr lang="hu-HU" smtClean="0"/>
+              <a:t>6</a:t>
+            </a:fld>
+            <a:endParaRPr lang="hu-HU"/>
+          </a:p>
+        </p:txBody>
+      </p:sp>
+    </p:spTree>
+    <p:extLst>
+      <p:ext uri="{BB962C8B-B14F-4D97-AF65-F5344CB8AC3E}">
+        <p14:creationId xmlns:p14="http://schemas.microsoft.com/office/powerpoint/2010/main" val="1921527805"/>
+      </p:ext>
+    </p:extLst>
+  </p:cSld>
+  <p:clrMapOvr>
+    <a:masterClrMapping/>
+  </p:clrMapOvr>
+</p:notes>
+</file>
+
+<file path=ppt/notesSlides/notesSlide6.xml><?xml version="1.0" encoding="utf-8"?>
+<p:notes xmlns:a="http://schemas.openxmlformats.org/drawingml/2006/main" xmlns:r="http://schemas.openxmlformats.org/officeDocument/2006/relationships" xmlns:p="http://schemas.openxmlformats.org/presentationml/2006/main">
+  <p:cSld>
+    <p:spTree>
+      <p:nvGrpSpPr>
+        <p:cNvPr id="1" name=""/>
+        <p:cNvGrpSpPr/>
+        <p:nvPr/>
+      </p:nvGrpSpPr>
+      <p:grpSpPr>
+        <a:xfrm>
+          <a:off x="0" y="0"/>
+          <a:ext cx="0" cy="0"/>
+          <a:chOff x="0" y="0"/>
+          <a:chExt cx="0" cy="0"/>
+        </a:xfrm>
+      </p:grpSpPr>
+      <p:sp>
+        <p:nvSpPr>
+          <p:cNvPr id="2" name="Diakép helye 1"/>
+          <p:cNvSpPr>
+            <a:spLocks noGrp="1" noRot="1" noChangeAspect="1"/>
+          </p:cNvSpPr>
+          <p:nvPr>
+            <p:ph type="sldImg"/>
+          </p:nvPr>
+        </p:nvSpPr>
+        <p:spPr/>
+      </p:sp>
+      <p:sp>
+        <p:nvSpPr>
+          <p:cNvPr id="3" name="Jegyzetek helye 2"/>
+          <p:cNvSpPr>
+            <a:spLocks noGrp="1"/>
+          </p:cNvSpPr>
+          <p:nvPr>
+            <p:ph type="body" idx="1"/>
+          </p:nvPr>
+        </p:nvSpPr>
+        <p:spPr/>
+        <p:txBody>
+          <a:bodyPr/>
+          <a:lstStyle/>
+          <a:p>
+            <a:r>
+              <a:rPr lang="en-US" dirty="0" err="1">
+                <a:ea typeface="Calibri"/>
+                <a:cs typeface="Calibri"/>
+              </a:rPr>
+              <a:t>vendel</a:t>
+            </a:r>
+          </a:p>
+        </p:txBody>
+      </p:sp>
+      <p:sp>
+        <p:nvSpPr>
+          <p:cNvPr id="4" name="Dia számának helye 3"/>
+          <p:cNvSpPr>
+            <a:spLocks noGrp="1"/>
+          </p:cNvSpPr>
+          <p:nvPr>
+            <p:ph type="sldNum" sz="quarter" idx="5"/>
+          </p:nvPr>
+        </p:nvSpPr>
+        <p:spPr/>
+        <p:txBody>
+          <a:bodyPr/>
+          <a:lstStyle/>
+          <a:p>
+            <a:fld id="{68CBD90C-AA85-4993-8EB6-76EB5E29832B}" type="slidenum">
+              <a:rPr lang="hu-HU" smtClean="0"/>
+              <a:t>7</a:t>
+            </a:fld>
+            <a:endParaRPr lang="hu-HU"/>
+          </a:p>
+        </p:txBody>
+      </p:sp>
+    </p:spTree>
+    <p:extLst>
+      <p:ext uri="{BB962C8B-B14F-4D97-AF65-F5344CB8AC3E}">
+        <p14:creationId xmlns:p14="http://schemas.microsoft.com/office/powerpoint/2010/main" val="2452180934"/>
+      </p:ext>
+    </p:extLst>
+  </p:cSld>
+  <p:clrMapOvr>
+    <a:masterClrMapping/>
+  </p:clrMapOvr>
+</p:notes>
+</file>
+
+<file path=ppt/notesSlides/notesSlide7.xml><?xml version="1.0" encoding="utf-8"?>
+<p:notes xmlns:a="http://schemas.openxmlformats.org/drawingml/2006/main" xmlns:r="http://schemas.openxmlformats.org/officeDocument/2006/relationships" xmlns:p="http://schemas.openxmlformats.org/presentationml/2006/main">
+  <p:cSld>
+    <p:spTree>
+      <p:nvGrpSpPr>
+        <p:cNvPr id="1" name=""/>
+        <p:cNvGrpSpPr/>
+        <p:nvPr/>
+      </p:nvGrpSpPr>
+      <p:grpSpPr>
+        <a:xfrm>
+          <a:off x="0" y="0"/>
+          <a:ext cx="0" cy="0"/>
+          <a:chOff x="0" y="0"/>
+          <a:chExt cx="0" cy="0"/>
+        </a:xfrm>
+      </p:grpSpPr>
+      <p:sp>
+        <p:nvSpPr>
+          <p:cNvPr id="2" name="Diakép helye 1"/>
+          <p:cNvSpPr>
+            <a:spLocks noGrp="1" noRot="1" noChangeAspect="1"/>
+          </p:cNvSpPr>
+          <p:nvPr>
+            <p:ph type="sldImg"/>
+          </p:nvPr>
+        </p:nvSpPr>
+        <p:spPr/>
+      </p:sp>
+      <p:sp>
+        <p:nvSpPr>
+          <p:cNvPr id="3" name="Jegyzetek helye 2"/>
+          <p:cNvSpPr>
+            <a:spLocks noGrp="1"/>
+          </p:cNvSpPr>
+          <p:nvPr>
+            <p:ph type="body" idx="1"/>
+          </p:nvPr>
+        </p:nvSpPr>
+        <p:spPr/>
+        <p:txBody>
+          <a:bodyPr/>
+          <a:lstStyle/>
+          <a:p>
+            <a:r>
+              <a:rPr lang="en-US" dirty="0" err="1">
+                <a:ea typeface="Calibri"/>
+                <a:cs typeface="Calibri"/>
+              </a:rPr>
+              <a:t>vendel</a:t>
+            </a:r>
+          </a:p>
+        </p:txBody>
+      </p:sp>
+      <p:sp>
+        <p:nvSpPr>
+          <p:cNvPr id="4" name="Dia számának helye 3"/>
+          <p:cNvSpPr>
+            <a:spLocks noGrp="1"/>
+          </p:cNvSpPr>
+          <p:nvPr>
+            <p:ph type="sldNum" sz="quarter" idx="5"/>
+          </p:nvPr>
+        </p:nvSpPr>
+        <p:spPr/>
+        <p:txBody>
+          <a:bodyPr/>
+          <a:lstStyle/>
+          <a:p>
+            <a:fld id="{68CBD90C-AA85-4993-8EB6-76EB5E29832B}" type="slidenum">
+              <a:rPr lang="hu-HU" smtClean="0"/>
+              <a:t>8</a:t>
+            </a:fld>
+            <a:endParaRPr lang="hu-HU"/>
+          </a:p>
+        </p:txBody>
+      </p:sp>
+    </p:spTree>
+    <p:extLst>
+      <p:ext uri="{BB962C8B-B14F-4D97-AF65-F5344CB8AC3E}">
+        <p14:creationId xmlns:p14="http://schemas.microsoft.com/office/powerpoint/2010/main" val="2120185809"/>
+      </p:ext>
+    </p:extLst>
+  </p:cSld>
+  <p:clrMapOvr>
+    <a:masterClrMapping/>
+  </p:clrMapOvr>
+</p:notes>
+</file>
+
+<file path=ppt/notesSlides/notesSlide8.xml><?xml version="1.0" encoding="utf-8"?>
+<p:notes xmlns:a="http://schemas.openxmlformats.org/drawingml/2006/main" xmlns:r="http://schemas.openxmlformats.org/officeDocument/2006/relationships" xmlns:p="http://schemas.openxmlformats.org/presentationml/2006/main">
+  <p:cSld>
+    <p:spTree>
+      <p:nvGrpSpPr>
+        <p:cNvPr id="1" name=""/>
+        <p:cNvGrpSpPr/>
+        <p:nvPr/>
+      </p:nvGrpSpPr>
+      <p:grpSpPr>
+        <a:xfrm>
+          <a:off x="0" y="0"/>
+          <a:ext cx="0" cy="0"/>
+          <a:chOff x="0" y="0"/>
+          <a:chExt cx="0" cy="0"/>
+        </a:xfrm>
+      </p:grpSpPr>
+      <p:sp>
+        <p:nvSpPr>
+          <p:cNvPr id="2" name="Diakép helye 1"/>
+          <p:cNvSpPr>
+            <a:spLocks noGrp="1" noRot="1" noChangeAspect="1"/>
+          </p:cNvSpPr>
+          <p:nvPr>
+            <p:ph type="sldImg"/>
+          </p:nvPr>
+        </p:nvSpPr>
+        <p:spPr/>
+      </p:sp>
+      <p:sp>
+        <p:nvSpPr>
+          <p:cNvPr id="3" name="Jegyzetek helye 2"/>
+          <p:cNvSpPr>
+            <a:spLocks noGrp="1"/>
+          </p:cNvSpPr>
+          <p:nvPr>
+            <p:ph type="body" idx="1"/>
+          </p:nvPr>
+        </p:nvSpPr>
+        <p:spPr/>
+        <p:txBody>
+          <a:bodyPr/>
+          <a:lstStyle/>
+          <a:p>
+            <a:r>
               <a:rPr lang="en-US" dirty="0"/>
               <a:t>A frontend </a:t>
             </a:r>
             <a:r>
               <a:rPr lang="en-US" dirty="0" err="1"/>
-              <a:t>Reacttel</a:t>
-            </a:r>
-            <a:r>
-              <a:rPr lang="en-US" dirty="0"/>
-              <a:t> </a:t>
-            </a:r>
-            <a:r>
-              <a:rPr lang="en-US" dirty="0" err="1"/>
-              <a:t>készült</a:t>
-            </a:r>
-            <a:r>
-              <a:rPr lang="en-US" dirty="0"/>
-              <a:t>, Vite </a:t>
-            </a:r>
-            <a:r>
-              <a:rPr lang="en-US" dirty="0" err="1"/>
-              <a:t>fejlesztői</a:t>
-            </a:r>
-            <a:r>
-              <a:rPr lang="en-US" dirty="0"/>
-              <a:t> </a:t>
-            </a:r>
-            <a:r>
-              <a:rPr lang="en-US" dirty="0" err="1"/>
-              <a:t>környezettel</a:t>
-            </a:r>
-            <a:r>
-              <a:rPr lang="en-US" dirty="0"/>
-              <a:t>. A </a:t>
-            </a:r>
-            <a:r>
-              <a:rPr lang="en-US" dirty="0" err="1"/>
-              <a:t>felületet</a:t>
-            </a:r>
-            <a:r>
-              <a:rPr lang="en-US" dirty="0"/>
-              <a:t> Bootstrap </a:t>
+              <a:t>egy</a:t>
+            </a:r>
+            <a:r>
+              <a:rPr lang="en-US" dirty="0"/>
+              <a:t> React </a:t>
+            </a:r>
+            <a:r>
+              <a:rPr lang="en-US" dirty="0" err="1"/>
+              <a:t>alapú</a:t>
+            </a:r>
+            <a:r>
+              <a:rPr lang="en-US" dirty="0"/>
+              <a:t>, Vite-</a:t>
+            </a:r>
+            <a:r>
+              <a:rPr lang="en-US" dirty="0" err="1"/>
+              <a:t>tel</a:t>
+            </a:r>
+            <a:r>
+              <a:rPr lang="en-US" dirty="0"/>
+              <a:t> </a:t>
+            </a:r>
+            <a:r>
+              <a:rPr lang="en-US" dirty="0" err="1"/>
+              <a:t>felépített</a:t>
+            </a:r>
+            <a:r>
+              <a:rPr lang="en-US" dirty="0"/>
+              <a:t> </a:t>
+            </a:r>
+            <a:r>
+              <a:rPr lang="en-US" dirty="0" err="1"/>
+              <a:t>alkalmazás</a:t>
+            </a:r>
+            <a:r>
+              <a:rPr lang="en-US" dirty="0"/>
+              <a:t>, </a:t>
+            </a:r>
+            <a:r>
+              <a:rPr lang="en-US" dirty="0" err="1"/>
+              <a:t>ami</a:t>
+            </a:r>
+            <a:r>
+              <a:rPr lang="en-US" dirty="0"/>
+              <a:t> </a:t>
+            </a:r>
+            <a:r>
+              <a:rPr lang="en-US" dirty="0" err="1"/>
+              <a:t>gyors</a:t>
+            </a:r>
+            <a:r>
+              <a:rPr lang="en-US" dirty="0"/>
+              <a:t> </a:t>
+            </a:r>
+            <a:r>
+              <a:rPr lang="en-US" dirty="0" err="1"/>
+              <a:t>fejlesztést</a:t>
+            </a:r>
+            <a:r>
+              <a:rPr lang="en-US" dirty="0"/>
+              <a:t> </a:t>
             </a:r>
             <a:r>
               <a:rPr lang="en-US" dirty="0" err="1"/>
@@ -1178,39 +1591,167 @@
             </a:r>
             <a:r>
               <a:rPr lang="en-US" dirty="0" err="1"/>
-              <a:t>ReactBootstrap</a:t>
-            </a:r>
-            <a:r>
-              <a:rPr lang="en-US" dirty="0"/>
-              <a:t> </a:t>
-            </a:r>
-            <a:r>
-              <a:rPr lang="en-US" dirty="0" err="1"/>
-              <a:t>segítségével</a:t>
-            </a:r>
-            <a:r>
-              <a:rPr lang="en-US" dirty="0"/>
-              <a:t> </a:t>
-            </a:r>
-            <a:r>
-              <a:rPr lang="en-US" dirty="0" err="1"/>
-              <a:t>alakítottuk</a:t>
-            </a:r>
-            <a:r>
-              <a:rPr lang="en-US" dirty="0"/>
-              <a:t> ki, </a:t>
-            </a:r>
-            <a:r>
-              <a:rPr lang="en-US" dirty="0" err="1"/>
-              <a:t>így</a:t>
-            </a:r>
-            <a:r>
-              <a:rPr lang="en-US" dirty="0"/>
-              <a:t> </a:t>
-            </a:r>
-            <a:r>
-              <a:rPr lang="en-US" dirty="0" err="1"/>
-              <a:t>reszponzív</a:t>
+              <a:t>tiszta</a:t>
+            </a:r>
+            <a:r>
+              <a:rPr lang="en-US" dirty="0"/>
+              <a:t> </a:t>
+            </a:r>
+            <a:r>
+              <a:rPr lang="en-US" dirty="0" err="1"/>
+              <a:t>projektstruktúrát</a:t>
+            </a:r>
+            <a:r>
+              <a:rPr lang="en-US" dirty="0"/>
+              <a:t> ad. A </a:t>
+            </a:r>
+            <a:r>
+              <a:rPr lang="en-US" dirty="0" err="1"/>
+              <a:t>legfontosabb</a:t>
+            </a:r>
+            <a:r>
+              <a:rPr lang="en-US" dirty="0"/>
+              <a:t> </a:t>
+            </a:r>
+            <a:r>
+              <a:rPr lang="en-US" dirty="0" err="1"/>
+              <a:t>tervezési</a:t>
+            </a:r>
+            <a:r>
+              <a:rPr lang="en-US" dirty="0"/>
+              <a:t> </a:t>
+            </a:r>
+            <a:r>
+              <a:rPr lang="en-US" dirty="0" err="1"/>
+              <a:t>elv</a:t>
+            </a:r>
+            <a:r>
+              <a:rPr lang="en-US" dirty="0"/>
+              <a:t> a </a:t>
+            </a:r>
+            <a:r>
+              <a:rPr lang="en-US" dirty="0" err="1"/>
+              <a:t>komponens</a:t>
+            </a:r>
+            <a:r>
+              <a:rPr lang="en-US" dirty="0"/>
+              <a:t> </a:t>
+            </a:r>
+            <a:r>
+              <a:rPr lang="en-US" dirty="0" err="1"/>
+              <a:t>alapú</a:t>
+            </a:r>
+            <a:r>
+              <a:rPr lang="en-US" dirty="0"/>
+              <a:t> </a:t>
+            </a:r>
+            <a:r>
+              <a:rPr lang="en-US" dirty="0" err="1"/>
+              <a:t>gondolkodás</a:t>
+            </a:r>
+            <a:r>
+              <a:rPr lang="en-US" dirty="0"/>
+              <a:t>: a </a:t>
+            </a:r>
+            <a:r>
+              <a:rPr lang="en-US" dirty="0" err="1"/>
+              <a:t>felület</a:t>
+            </a:r>
+            <a:r>
+              <a:rPr lang="en-US" dirty="0"/>
+              <a:t> </a:t>
+            </a:r>
+            <a:r>
+              <a:rPr lang="en-US" dirty="0" err="1"/>
+              <a:t>kisebb</a:t>
+            </a:r>
+            <a:r>
+              <a:rPr lang="en-US" dirty="0"/>
+              <a:t>, </a:t>
+            </a:r>
+            <a:r>
+              <a:rPr lang="en-US" dirty="0" err="1"/>
+              <a:t>újrahasznosítható</a:t>
+            </a:r>
+            <a:r>
+              <a:rPr lang="en-US" dirty="0"/>
+              <a:t> </a:t>
+            </a:r>
+            <a:r>
+              <a:rPr lang="en-US" dirty="0" err="1"/>
+              <a:t>egységekből</a:t>
+            </a:r>
+            <a:r>
+              <a:rPr lang="en-US" dirty="0"/>
+              <a:t> </a:t>
+            </a:r>
+            <a:r>
+              <a:rPr lang="en-US" dirty="0" err="1"/>
+              <a:t>áll</a:t>
+            </a:r>
+            <a:r>
+              <a:rPr lang="en-US" dirty="0"/>
+              <a:t>. </a:t>
+            </a:r>
+            <a:r>
+              <a:rPr lang="en-US" dirty="0" err="1"/>
+              <a:t>Ennek</a:t>
+            </a:r>
+            <a:r>
+              <a:rPr lang="en-US" dirty="0"/>
+              <a:t> </a:t>
+            </a:r>
+            <a:r>
+              <a:rPr lang="en-US" dirty="0" err="1"/>
+              <a:t>az</a:t>
+            </a:r>
+            <a:r>
+              <a:rPr lang="en-US" dirty="0"/>
+              <a:t> </a:t>
+            </a:r>
+            <a:r>
+              <a:rPr lang="en-US" dirty="0" err="1"/>
+              <a:t>az</a:t>
+            </a:r>
+            <a:r>
+              <a:rPr lang="en-US" dirty="0"/>
+              <a:t> </a:t>
+            </a:r>
+            <a:r>
+              <a:rPr lang="en-US" dirty="0" err="1"/>
+              <a:t>előnye</a:t>
+            </a:r>
+            <a:r>
+              <a:rPr lang="en-US" dirty="0"/>
+              <a:t>, </a:t>
+            </a:r>
+            <a:r>
+              <a:rPr lang="en-US" dirty="0" err="1"/>
+              <a:t>hogy</a:t>
+            </a:r>
+            <a:r>
+              <a:rPr lang="en-US" dirty="0"/>
+              <a:t> </a:t>
+            </a:r>
+            <a:r>
+              <a:rPr lang="en-US" dirty="0" err="1"/>
+              <a:t>könnyebb</a:t>
+            </a:r>
+            <a:r>
+              <a:rPr lang="en-US" dirty="0"/>
+              <a:t> </a:t>
+            </a:r>
+            <a:r>
+              <a:rPr lang="en-US" dirty="0" err="1"/>
+              <a:t>fejleszteni</a:t>
+            </a:r>
+            <a:r>
+              <a:rPr lang="en-US" dirty="0"/>
+              <a:t>, </a:t>
+            </a:r>
+            <a:r>
+              <a:rPr lang="en-US" dirty="0" err="1"/>
+              <a:t>tesztelni</a:t>
             </a:r>
             <a:r>
               <a:rPr lang="en-US" dirty="0"/>
@@ -1226,778 +1767,857 @@
             </a:r>
             <a:r>
               <a:rPr lang="en-US" dirty="0" err="1"/>
-              <a:t>felhasználóbarát</a:t>
-            </a:r>
-            <a:r>
-              <a:rPr lang="en-US" dirty="0"/>
-              <a:t> </a:t>
-            </a:r>
-            <a:r>
-              <a:rPr lang="en-US" dirty="0" err="1"/>
-              <a:t>lett</a:t>
-            </a:r>
-            <a:r>
-              <a:rPr lang="en-US" dirty="0"/>
-              <a:t>. A </a:t>
-            </a:r>
-            <a:r>
-              <a:rPr lang="en-US" dirty="0" err="1"/>
-              <a:t>projekt</a:t>
-            </a:r>
-            <a:r>
-              <a:rPr lang="en-US" dirty="0"/>
-              <a:t> </a:t>
-            </a:r>
-            <a:r>
-              <a:rPr lang="en-US" dirty="0" err="1"/>
-              <a:t>komponensekre</a:t>
-            </a:r>
-            <a:r>
-              <a:rPr lang="en-US" dirty="0"/>
-              <a:t> van </a:t>
-            </a:r>
-            <a:r>
-              <a:rPr lang="en-US" dirty="0" err="1"/>
-              <a:t>bontva</a:t>
-            </a:r>
-            <a:r>
-              <a:rPr lang="en-US" dirty="0"/>
-              <a:t>, </a:t>
-            </a:r>
-            <a:r>
-              <a:rPr lang="en-US" dirty="0" err="1"/>
-              <a:t>ami</a:t>
-            </a:r>
-            <a:r>
-              <a:rPr lang="en-US" dirty="0"/>
-              <a:t> </a:t>
-            </a:r>
-            <a:r>
-              <a:rPr lang="en-US" dirty="0" err="1"/>
-              <a:t>átláthatóbbá</a:t>
-            </a:r>
-            <a:r>
-              <a:rPr lang="en-US" dirty="0"/>
-              <a:t> </a:t>
-            </a:r>
-            <a:r>
-              <a:rPr lang="en-US" dirty="0" err="1"/>
-              <a:t>és</a:t>
-            </a:r>
-            <a:r>
-              <a:rPr lang="en-US" dirty="0"/>
-              <a:t> </a:t>
-            </a:r>
-            <a:r>
-              <a:rPr lang="en-US" dirty="0" err="1"/>
-              <a:t>könnyebben</a:t>
-            </a:r>
-            <a:r>
-              <a:rPr lang="en-US" dirty="0"/>
-              <a:t> </a:t>
-            </a:r>
-            <a:r>
-              <a:rPr lang="en-US" dirty="0" err="1"/>
-              <a:t>fejleszthetővé</a:t>
-            </a:r>
-            <a:r>
-              <a:rPr lang="en-US" dirty="0"/>
-              <a:t> </a:t>
-            </a:r>
-            <a:r>
-              <a:rPr lang="en-US" dirty="0" err="1"/>
-              <a:t>teszi</a:t>
-            </a:r>
-            <a:r>
-              <a:rPr lang="en-US" dirty="0"/>
-              <a:t> </a:t>
-            </a:r>
-            <a:r>
-              <a:rPr lang="en-US" dirty="0" err="1"/>
-              <a:t>az</a:t>
-            </a:r>
-            <a:r>
-              <a:rPr lang="en-US" dirty="0"/>
-              <a:t> </a:t>
-            </a:r>
-            <a:r>
-              <a:rPr lang="en-US" dirty="0" err="1"/>
-              <a:t>alkalmazást</a:t>
-            </a:r>
-            <a:r>
-              <a:rPr lang="en-US" dirty="0"/>
-              <a:t>.</a:t>
+              <a:t>később</a:t>
+            </a:r>
+            <a:r>
+              <a:rPr lang="en-US" dirty="0"/>
+              <a:t> </a:t>
+            </a:r>
+            <a:r>
+              <a:rPr lang="en-US" dirty="0" err="1"/>
+              <a:t>bővíteni</a:t>
+            </a:r>
+            <a:r>
+              <a:rPr lang="en-US" dirty="0"/>
+              <a:t> is.</a:t>
             </a:r>
             <a:endParaRPr lang="hu-HU" dirty="0"/>
-          </a:p>
-          <a:p>
-            <a:endParaRPr lang="en-US" b="1" dirty="0"/>
-          </a:p>
-          <a:p>
-            <a:r>
-              <a:rPr lang="en-US" b="1" dirty="0" err="1"/>
-              <a:t>Felhasznált</a:t>
-            </a:r>
-            <a:r>
-              <a:rPr lang="en-US" b="1" dirty="0"/>
-              <a:t> </a:t>
-            </a:r>
-            <a:r>
-              <a:rPr lang="en-US" b="1" dirty="0" err="1"/>
-              <a:t>technológiák</a:t>
-            </a:r>
-            <a:r>
-              <a:rPr lang="en-US" b="1" dirty="0"/>
-              <a:t>:</a:t>
-            </a:r>
-            <a:endParaRPr lang="hu-HU">
-              <a:ea typeface="Calibri"/>
-              <a:cs typeface="Calibri"/>
-            </a:endParaRPr>
-          </a:p>
-          <a:p>
-            <a:r>
-              <a:rPr lang="en-US" b="1"/>
-              <a:t>• React + Vite</a:t>
-            </a:r>
-            <a:endParaRPr lang="hu-HU"/>
-          </a:p>
-          <a:p>
-            <a:pPr marL="285750" indent="-285750">
-              <a:buFont typeface="Arial"/>
-              <a:buChar char="•"/>
-            </a:pPr>
-            <a:r>
-              <a:rPr lang="en-US" dirty="0"/>
-              <a:t>A frontend </a:t>
-            </a:r>
-            <a:r>
-              <a:rPr lang="en-US" dirty="0" err="1"/>
-              <a:t>fejlesztéséhez</a:t>
-            </a:r>
-            <a:r>
-              <a:rPr lang="en-US" dirty="0"/>
-              <a:t> </a:t>
-            </a:r>
-            <a:r>
-              <a:rPr lang="en-US" dirty="0" err="1"/>
-              <a:t>Reactet</a:t>
-            </a:r>
-            <a:r>
-              <a:rPr lang="en-US" dirty="0"/>
-              <a:t> </a:t>
-            </a:r>
-            <a:r>
-              <a:rPr lang="en-US" dirty="0" err="1"/>
-              <a:t>használtunk</a:t>
-            </a:r>
-            <a:r>
-              <a:rPr lang="en-US" dirty="0"/>
-              <a:t> </a:t>
-            </a:r>
-            <a:endParaRPr lang="hu-HU" dirty="0"/>
-          </a:p>
-          <a:p>
-            <a:pPr marL="285750" indent="-285750">
-              <a:buFont typeface="Arial"/>
-              <a:buChar char="•"/>
-            </a:pPr>
-            <a:r>
-              <a:rPr lang="en-US" dirty="0"/>
-              <a:t>A Vite </a:t>
-            </a:r>
-            <a:r>
-              <a:rPr lang="en-US" dirty="0" err="1"/>
-              <a:t>egy</a:t>
-            </a:r>
-            <a:r>
-              <a:rPr lang="en-US" dirty="0"/>
-              <a:t> modern build </a:t>
-            </a:r>
-            <a:r>
-              <a:rPr lang="en-US" dirty="0" err="1"/>
-              <a:t>eszköz</a:t>
-            </a:r>
-            <a:r>
-              <a:rPr lang="en-US" dirty="0"/>
-              <a:t>, </a:t>
-            </a:r>
-            <a:r>
-              <a:rPr lang="en-US" dirty="0" err="1"/>
-              <a:t>amely</a:t>
-            </a:r>
-            <a:r>
-              <a:rPr lang="en-US" dirty="0"/>
-              <a:t> </a:t>
-            </a:r>
-            <a:r>
-              <a:rPr lang="en-US" dirty="0" err="1"/>
-              <a:t>gyors</a:t>
-            </a:r>
-            <a:r>
-              <a:rPr lang="en-US" dirty="0"/>
-              <a:t> </a:t>
-            </a:r>
-            <a:r>
-              <a:rPr lang="en-US" dirty="0" err="1"/>
-              <a:t>fejlesztést</a:t>
-            </a:r>
-            <a:r>
-              <a:rPr lang="en-US" dirty="0"/>
-              <a:t> </a:t>
-            </a:r>
-            <a:r>
-              <a:rPr lang="en-US" dirty="0" err="1"/>
-              <a:t>és</a:t>
-            </a:r>
-            <a:r>
-              <a:rPr lang="en-US" dirty="0"/>
-              <a:t> </a:t>
-            </a:r>
-            <a:r>
-              <a:rPr lang="en-US" dirty="0" err="1"/>
-              <a:t>betöltést</a:t>
-            </a:r>
-            <a:r>
-              <a:rPr lang="en-US" dirty="0"/>
-              <a:t> </a:t>
-            </a:r>
-            <a:r>
-              <a:rPr lang="en-US" dirty="0" err="1"/>
-              <a:t>biztosít</a:t>
-            </a:r>
-            <a:r>
-              <a:rPr lang="en-US" dirty="0"/>
-              <a:t> </a:t>
-            </a:r>
-            <a:endParaRPr lang="hu-HU" dirty="0"/>
-          </a:p>
-          <a:p>
-            <a:pPr marL="285750" indent="-285750">
-              <a:buFont typeface="Arial"/>
-              <a:buChar char="•"/>
-            </a:pPr>
-            <a:r>
-              <a:rPr lang="en-US" dirty="0" err="1"/>
-              <a:t>Komponens</a:t>
-            </a:r>
-            <a:r>
-              <a:rPr lang="en-US" dirty="0"/>
-              <a:t> </a:t>
-            </a:r>
-            <a:r>
-              <a:rPr lang="en-US" dirty="0" err="1"/>
-              <a:t>alapú</a:t>
-            </a:r>
-            <a:r>
-              <a:rPr lang="en-US" dirty="0"/>
-              <a:t> </a:t>
-            </a:r>
-            <a:r>
-              <a:rPr lang="en-US" dirty="0" err="1"/>
-              <a:t>felépítés</a:t>
-            </a:r>
-            <a:r>
-              <a:rPr lang="en-US" dirty="0"/>
-              <a:t>, </a:t>
-            </a:r>
-            <a:r>
-              <a:rPr lang="en-US" dirty="0" err="1"/>
-              <a:t>ami</a:t>
-            </a:r>
-            <a:r>
-              <a:rPr lang="en-US" dirty="0"/>
-              <a:t> </a:t>
-            </a:r>
-            <a:r>
-              <a:rPr lang="en-US" dirty="0" err="1"/>
-              <a:t>átláthatóbbá</a:t>
-            </a:r>
-            <a:r>
-              <a:rPr lang="en-US" dirty="0"/>
-              <a:t> </a:t>
-            </a:r>
-            <a:r>
-              <a:rPr lang="en-US" dirty="0" err="1"/>
-              <a:t>és</a:t>
-            </a:r>
-            <a:r>
-              <a:rPr lang="en-US" dirty="0"/>
-              <a:t> </a:t>
-            </a:r>
-            <a:r>
-              <a:rPr lang="en-US" dirty="0" err="1"/>
-              <a:t>újrahasznosíthatóvá</a:t>
-            </a:r>
-            <a:r>
-              <a:rPr lang="en-US" dirty="0"/>
-              <a:t> </a:t>
-            </a:r>
-            <a:r>
-              <a:rPr lang="en-US" dirty="0" err="1"/>
-              <a:t>teszi</a:t>
-            </a:r>
-            <a:r>
-              <a:rPr lang="en-US" dirty="0"/>
-              <a:t> a </a:t>
-            </a:r>
-            <a:r>
-              <a:rPr lang="en-US" dirty="0" err="1"/>
-              <a:t>kódot</a:t>
-            </a:r>
-            <a:r>
-              <a:rPr lang="en-US" dirty="0"/>
-              <a:t> </a:t>
-            </a:r>
-            <a:endParaRPr lang="hu-HU" dirty="0"/>
-          </a:p>
-          <a:p>
-            <a:r>
-              <a:rPr lang="en-US" b="1" dirty="0"/>
-              <a:t>• </a:t>
-            </a:r>
-            <a:r>
-              <a:rPr lang="en-US" b="1" dirty="0" err="1"/>
-              <a:t>ReactBootstrap</a:t>
-            </a:r>
-            <a:r>
-              <a:rPr lang="en-US" b="1" dirty="0"/>
-              <a:t>, Bootstrap</a:t>
-            </a:r>
-            <a:endParaRPr lang="hu-HU" dirty="0"/>
-          </a:p>
-          <a:p>
-            <a:pPr marL="285750" indent="-285750">
-              <a:buFont typeface="Arial"/>
-              <a:buChar char="•"/>
-            </a:pPr>
-            <a:r>
-              <a:rPr lang="en-US" dirty="0"/>
-              <a:t>A </a:t>
-            </a:r>
-            <a:r>
-              <a:rPr lang="en-US" dirty="0" err="1"/>
-              <a:t>felhasználói</a:t>
-            </a:r>
-            <a:r>
-              <a:rPr lang="en-US" dirty="0"/>
-              <a:t> </a:t>
-            </a:r>
-            <a:r>
-              <a:rPr lang="en-US" dirty="0" err="1"/>
-              <a:t>felület</a:t>
-            </a:r>
-            <a:r>
-              <a:rPr lang="en-US" dirty="0"/>
-              <a:t> </a:t>
-            </a:r>
-            <a:r>
-              <a:rPr lang="en-US" dirty="0" err="1"/>
-              <a:t>kialakításához</a:t>
-            </a:r>
-            <a:r>
-              <a:rPr lang="en-US" dirty="0"/>
-              <a:t> Bootstrap </a:t>
-            </a:r>
-            <a:r>
-              <a:rPr lang="en-US" dirty="0" err="1"/>
-              <a:t>keretrendszert</a:t>
-            </a:r>
-            <a:r>
-              <a:rPr lang="en-US" dirty="0"/>
-              <a:t> </a:t>
-            </a:r>
-            <a:r>
-              <a:rPr lang="en-US" dirty="0" err="1"/>
-              <a:t>használtunk</a:t>
-            </a:r>
-            <a:r>
-              <a:rPr lang="en-US" dirty="0"/>
-              <a:t> </a:t>
-            </a:r>
-            <a:endParaRPr lang="hu-HU" dirty="0"/>
-          </a:p>
-          <a:p>
-            <a:pPr marL="285750" indent="-285750">
-              <a:buFont typeface="Arial"/>
-              <a:buChar char="•"/>
-            </a:pPr>
-            <a:r>
-              <a:rPr lang="en-US" dirty="0"/>
-              <a:t>A </a:t>
-            </a:r>
-            <a:r>
-              <a:rPr lang="en-US" dirty="0" err="1"/>
-              <a:t>ReactBootstrap</a:t>
-            </a:r>
-            <a:r>
-              <a:rPr lang="en-US" dirty="0"/>
-              <a:t> </a:t>
-            </a:r>
-            <a:r>
-              <a:rPr lang="en-US" dirty="0" err="1"/>
-              <a:t>segítségével</a:t>
-            </a:r>
-            <a:r>
-              <a:rPr lang="en-US" dirty="0"/>
-              <a:t> Bootstrap </a:t>
-            </a:r>
-            <a:r>
-              <a:rPr lang="en-US" dirty="0" err="1"/>
-              <a:t>elemeket</a:t>
-            </a:r>
-            <a:r>
-              <a:rPr lang="en-US" dirty="0"/>
-              <a:t> React </a:t>
-            </a:r>
-            <a:r>
-              <a:rPr lang="en-US" dirty="0" err="1"/>
-              <a:t>komponensként</a:t>
-            </a:r>
-            <a:r>
-              <a:rPr lang="en-US" dirty="0"/>
-              <a:t> </a:t>
-            </a:r>
-            <a:r>
-              <a:rPr lang="en-US" dirty="0" err="1"/>
-              <a:t>tudtunk</a:t>
-            </a:r>
-            <a:r>
-              <a:rPr lang="en-US" dirty="0"/>
-              <a:t> </a:t>
-            </a:r>
-            <a:r>
-              <a:rPr lang="en-US" dirty="0" err="1"/>
-              <a:t>használni</a:t>
-            </a:r>
-            <a:r>
-              <a:rPr lang="en-US" dirty="0"/>
-              <a:t> </a:t>
-            </a:r>
-            <a:endParaRPr lang="hu-HU" dirty="0"/>
-          </a:p>
-          <a:p>
-            <a:pPr marL="285750" indent="-285750">
-              <a:buFont typeface="Arial"/>
-              <a:buChar char="•"/>
-            </a:pPr>
-            <a:r>
-              <a:rPr lang="en-US" dirty="0" err="1"/>
-              <a:t>Reszponzív</a:t>
-            </a:r>
-            <a:r>
-              <a:rPr lang="en-US" dirty="0"/>
-              <a:t>, </a:t>
-            </a:r>
-            <a:r>
-              <a:rPr lang="en-US" dirty="0" err="1"/>
-              <a:t>mobilbarát</a:t>
-            </a:r>
-            <a:r>
-              <a:rPr lang="en-US" dirty="0"/>
-              <a:t> </a:t>
-            </a:r>
-            <a:r>
-              <a:rPr lang="en-US" dirty="0" err="1"/>
-              <a:t>megjelenést</a:t>
-            </a:r>
-            <a:r>
-              <a:rPr lang="en-US" dirty="0"/>
-              <a:t> </a:t>
-            </a:r>
-            <a:r>
-              <a:rPr lang="en-US" dirty="0" err="1"/>
-              <a:t>biztosít</a:t>
-            </a:r>
-            <a:r>
-              <a:rPr lang="en-US" dirty="0"/>
-              <a:t> </a:t>
-            </a:r>
-            <a:endParaRPr lang="hu-HU" dirty="0"/>
-          </a:p>
-          <a:p>
-            <a:r>
-              <a:rPr lang="en-US" b="1" dirty="0"/>
-              <a:t>• </a:t>
-            </a:r>
-            <a:r>
-              <a:rPr lang="en-US" b="1" dirty="0" err="1"/>
-              <a:t>Fő</a:t>
-            </a:r>
-            <a:r>
-              <a:rPr lang="en-US" b="1" dirty="0"/>
-              <a:t> </a:t>
-            </a:r>
-            <a:r>
-              <a:rPr lang="en-US" b="1" dirty="0" err="1"/>
-              <a:t>funkciók</a:t>
-            </a:r>
-            <a:r>
-              <a:rPr lang="en-US" b="1" dirty="0"/>
-              <a:t> a </a:t>
-            </a:r>
-            <a:r>
-              <a:rPr lang="en-US" b="1" dirty="0" err="1"/>
-              <a:t>frontendben</a:t>
-            </a:r>
-            <a:endParaRPr lang="hu-HU" dirty="0" err="1"/>
-          </a:p>
-          <a:p>
-            <a:pPr marL="285750" indent="-285750">
-              <a:buFont typeface="Arial"/>
-              <a:buChar char="•"/>
-            </a:pPr>
-            <a:r>
-              <a:rPr lang="en-US" dirty="0" err="1"/>
-              <a:t>Regisztráció</a:t>
-            </a:r>
-            <a:r>
-              <a:rPr lang="en-US" dirty="0"/>
-              <a:t> </a:t>
-            </a:r>
-            <a:r>
-              <a:rPr lang="en-US" dirty="0" err="1"/>
-              <a:t>és</a:t>
-            </a:r>
-            <a:r>
-              <a:rPr lang="en-US" dirty="0"/>
-              <a:t> </a:t>
-            </a:r>
-            <a:r>
-              <a:rPr lang="en-US" dirty="0" err="1"/>
-              <a:t>bejelentkezés</a:t>
-            </a:r>
-            <a:r>
-              <a:rPr lang="en-US" dirty="0"/>
-              <a:t> </a:t>
-            </a:r>
-            <a:r>
-              <a:rPr lang="en-US" dirty="0" err="1"/>
-              <a:t>felület</a:t>
-            </a:r>
-            <a:r>
-              <a:rPr lang="en-US" dirty="0"/>
-              <a:t> </a:t>
-            </a:r>
-            <a:endParaRPr lang="hu-HU" dirty="0"/>
-          </a:p>
-          <a:p>
-            <a:pPr marL="285750" indent="-285750">
-              <a:buFont typeface="Arial"/>
-              <a:buChar char="•"/>
-            </a:pPr>
-            <a:r>
-              <a:rPr lang="en-US" dirty="0" err="1"/>
-              <a:t>Rendelések</a:t>
-            </a:r>
-            <a:r>
-              <a:rPr lang="en-US" dirty="0"/>
-              <a:t> </a:t>
-            </a:r>
-            <a:r>
-              <a:rPr lang="en-US" dirty="0" err="1"/>
-              <a:t>létrehozása</a:t>
-            </a:r>
-            <a:r>
-              <a:rPr lang="en-US" dirty="0"/>
-              <a:t> </a:t>
-            </a:r>
-            <a:r>
-              <a:rPr lang="en-US" dirty="0" err="1"/>
-              <a:t>és</a:t>
-            </a:r>
-            <a:r>
-              <a:rPr lang="en-US" dirty="0"/>
-              <a:t> </a:t>
-            </a:r>
-            <a:r>
-              <a:rPr lang="en-US" dirty="0" err="1"/>
-              <a:t>kezelése</a:t>
-            </a:r>
-            <a:r>
-              <a:rPr lang="en-US" dirty="0"/>
-              <a:t> </a:t>
-            </a:r>
-            <a:endParaRPr lang="hu-HU" dirty="0"/>
-          </a:p>
-          <a:p>
-            <a:pPr marL="285750" indent="-285750">
-              <a:buFont typeface="Arial"/>
-              <a:buChar char="•"/>
-            </a:pPr>
-            <a:r>
-              <a:rPr lang="en-US" dirty="0"/>
-              <a:t>Élő chat </a:t>
-            </a:r>
-            <a:r>
-              <a:rPr lang="en-US" dirty="0" err="1"/>
-              <a:t>megjelenítése</a:t>
-            </a:r>
-            <a:r>
-              <a:rPr lang="en-US" dirty="0"/>
-              <a:t> </a:t>
-            </a:r>
-            <a:endParaRPr lang="hu-HU" dirty="0"/>
-          </a:p>
-          <a:p>
-            <a:pPr marL="285750" indent="-285750">
-              <a:buFont typeface="Arial"/>
-              <a:buChar char="•"/>
-            </a:pPr>
-            <a:r>
-              <a:rPr lang="en-US" dirty="0" err="1"/>
-              <a:t>Profil</a:t>
-            </a:r>
-            <a:r>
-              <a:rPr lang="en-US" dirty="0"/>
-              <a:t> </a:t>
-            </a:r>
-            <a:r>
-              <a:rPr lang="en-US" dirty="0" err="1"/>
-              <a:t>adatok</a:t>
-            </a:r>
-            <a:r>
-              <a:rPr lang="en-US" dirty="0"/>
-              <a:t> </a:t>
-            </a:r>
-            <a:r>
-              <a:rPr lang="en-US" dirty="0" err="1"/>
-              <a:t>módosítása</a:t>
-            </a:r>
-            <a:r>
-              <a:rPr lang="en-US" dirty="0"/>
-              <a:t> </a:t>
-            </a:r>
-            <a:endParaRPr lang="hu-HU" dirty="0"/>
-          </a:p>
-          <a:p>
-            <a:r>
-              <a:rPr lang="en-US" b="1" dirty="0"/>
-              <a:t>• Projekt </a:t>
-            </a:r>
-            <a:r>
-              <a:rPr lang="en-US" b="1" dirty="0" err="1"/>
-              <a:t>struktúra</a:t>
-            </a:r>
-            <a:endParaRPr lang="hu-HU" dirty="0" err="1"/>
-          </a:p>
-          <a:p>
-            <a:pPr marL="285750" indent="-285750">
-              <a:buFont typeface="Arial"/>
-              <a:buChar char="•"/>
-            </a:pPr>
-            <a:r>
-              <a:rPr lang="en-US" dirty="0" err="1"/>
-              <a:t>Komponensekre</a:t>
-            </a:r>
-            <a:r>
-              <a:rPr lang="en-US" dirty="0"/>
-              <a:t> </a:t>
-            </a:r>
-            <a:r>
-              <a:rPr lang="en-US" dirty="0" err="1"/>
-              <a:t>bontott</a:t>
-            </a:r>
-            <a:r>
-              <a:rPr lang="en-US" dirty="0"/>
-              <a:t> </a:t>
-            </a:r>
-            <a:r>
-              <a:rPr lang="en-US" dirty="0" err="1"/>
-              <a:t>felépítés</a:t>
-            </a:r>
-            <a:r>
-              <a:rPr lang="en-US" dirty="0"/>
-              <a:t> (pl. Header, Footer, </a:t>
-            </a:r>
-            <a:r>
-              <a:rPr lang="en-US" dirty="0" err="1"/>
-              <a:t>oldalak</a:t>
-            </a:r>
-            <a:r>
-              <a:rPr lang="en-US" dirty="0"/>
-              <a:t>) </a:t>
-            </a:r>
-            <a:endParaRPr lang="hu-HU" dirty="0"/>
-          </a:p>
-          <a:p>
-            <a:pPr marL="285750" indent="-285750">
-              <a:buFont typeface="Arial"/>
-              <a:buChar char="•"/>
-            </a:pPr>
-            <a:r>
-              <a:rPr lang="en-US" dirty="0" err="1"/>
-              <a:t>Külön</a:t>
-            </a:r>
-            <a:r>
-              <a:rPr lang="en-US" dirty="0"/>
-              <a:t> CSS </a:t>
-            </a:r>
-            <a:r>
-              <a:rPr lang="en-US" dirty="0" err="1"/>
-              <a:t>fájlok</a:t>
-            </a:r>
-            <a:r>
-              <a:rPr lang="en-US" dirty="0"/>
-              <a:t> a </a:t>
-            </a:r>
-            <a:r>
-              <a:rPr lang="en-US" dirty="0" err="1"/>
-              <a:t>stílusokhoz</a:t>
-            </a:r>
-            <a:r>
-              <a:rPr lang="en-US" dirty="0"/>
-              <a:t> </a:t>
-            </a:r>
-            <a:endParaRPr lang="hu-HU" dirty="0"/>
-          </a:p>
-          <a:p>
-            <a:pPr marL="285750" indent="-285750">
-              <a:buFont typeface="Arial"/>
-              <a:buChar char="•"/>
-            </a:pPr>
-            <a:r>
-              <a:rPr lang="en-US" dirty="0" err="1"/>
-              <a:t>Könnyen</a:t>
-            </a:r>
-            <a:r>
-              <a:rPr lang="en-US" dirty="0"/>
-              <a:t> </a:t>
-            </a:r>
-            <a:r>
-              <a:rPr lang="en-US" dirty="0" err="1"/>
-              <a:t>bővíthető</a:t>
-            </a:r>
-            <a:r>
-              <a:rPr lang="en-US" dirty="0"/>
-              <a:t> </a:t>
-            </a:r>
-            <a:r>
-              <a:rPr lang="en-US" dirty="0" err="1"/>
-              <a:t>és</a:t>
-            </a:r>
-            <a:r>
-              <a:rPr lang="en-US" dirty="0"/>
-              <a:t> </a:t>
-            </a:r>
-            <a:r>
-              <a:rPr lang="en-US" dirty="0" err="1"/>
-              <a:t>átlátható</a:t>
-            </a:r>
-            <a:r>
-              <a:rPr lang="en-US" dirty="0"/>
-              <a:t> </a:t>
-            </a:r>
-            <a:r>
-              <a:rPr lang="en-US" dirty="0" err="1"/>
-              <a:t>rendszer</a:t>
-            </a:r>
-            <a:endParaRPr lang="hu-HU" dirty="0" err="1"/>
           </a:p>
           <a:p>
             <a:endParaRPr lang="en-US" dirty="0">
               <a:ea typeface="Calibri"/>
-              <a:cs typeface="Calibri"/>
+              <a:cs typeface="+mn-lt"/>
+            </a:endParaRPr>
+          </a:p>
+          <a:p>
+            <a:r>
+              <a:rPr lang="en-US" dirty="0"/>
+              <a:t>A </a:t>
+            </a:r>
+            <a:r>
+              <a:rPr lang="en-US" dirty="0" err="1"/>
+              <a:t>projektben</a:t>
+            </a:r>
+            <a:r>
+              <a:rPr lang="en-US" dirty="0"/>
+              <a:t> </a:t>
+            </a:r>
+            <a:r>
+              <a:rPr lang="en-US" dirty="0" err="1"/>
+              <a:t>külön</a:t>
+            </a:r>
+            <a:r>
+              <a:rPr lang="en-US" dirty="0"/>
+              <a:t> </a:t>
+            </a:r>
+            <a:r>
+              <a:rPr lang="en-US" dirty="0" err="1"/>
+              <a:t>oldalszintű</a:t>
+            </a:r>
+            <a:r>
+              <a:rPr lang="en-US" dirty="0"/>
+              <a:t> </a:t>
+            </a:r>
+            <a:r>
+              <a:rPr lang="en-US" dirty="0" err="1"/>
+              <a:t>komponensek</a:t>
+            </a:r>
+            <a:r>
+              <a:rPr lang="en-US" dirty="0"/>
+              <a:t> </a:t>
+            </a:r>
+            <a:r>
+              <a:rPr lang="en-US" dirty="0" err="1"/>
+              <a:t>vannak</a:t>
+            </a:r>
+            <a:r>
+              <a:rPr lang="en-US" dirty="0"/>
+              <a:t>, </a:t>
+            </a:r>
+            <a:r>
+              <a:rPr lang="en-US" dirty="0" err="1"/>
+              <a:t>például</a:t>
+            </a:r>
+            <a:r>
+              <a:rPr lang="en-US" dirty="0"/>
+              <a:t> a </a:t>
+            </a:r>
+            <a:r>
+              <a:rPr lang="en-US" dirty="0" err="1"/>
+              <a:t>kezdőoldal</a:t>
+            </a:r>
+            <a:r>
+              <a:rPr lang="en-US" dirty="0"/>
+              <a:t>, </a:t>
+            </a:r>
+            <a:r>
+              <a:rPr lang="en-US" dirty="0" err="1"/>
+              <a:t>bemutatkozó</a:t>
+            </a:r>
+            <a:r>
+              <a:rPr lang="en-US" dirty="0"/>
+              <a:t> </a:t>
+            </a:r>
+            <a:r>
+              <a:rPr lang="en-US" dirty="0" err="1"/>
+              <a:t>oldal</a:t>
+            </a:r>
+            <a:r>
+              <a:rPr lang="en-US" dirty="0"/>
+              <a:t>, </a:t>
+            </a:r>
+            <a:r>
+              <a:rPr lang="en-US" dirty="0" err="1"/>
+              <a:t>ötletelős</a:t>
+            </a:r>
+            <a:r>
+              <a:rPr lang="en-US" dirty="0"/>
+              <a:t> </a:t>
+            </a:r>
+            <a:r>
+              <a:rPr lang="en-US" dirty="0" err="1"/>
+              <a:t>oldal</a:t>
+            </a:r>
+            <a:r>
+              <a:rPr lang="en-US" dirty="0"/>
+              <a:t>, </a:t>
+            </a:r>
+            <a:r>
+              <a:rPr lang="en-US" dirty="0" err="1"/>
+              <a:t>rendelés</a:t>
+            </a:r>
+            <a:r>
+              <a:rPr lang="en-US" dirty="0"/>
+              <a:t> </a:t>
+            </a:r>
+            <a:r>
+              <a:rPr lang="en-US" dirty="0" err="1"/>
+              <a:t>és</a:t>
+            </a:r>
+            <a:r>
+              <a:rPr lang="en-US" dirty="0"/>
+              <a:t> </a:t>
+            </a:r>
+            <a:r>
+              <a:rPr lang="en-US" dirty="0" err="1"/>
+              <a:t>profil</a:t>
+            </a:r>
+            <a:r>
+              <a:rPr lang="en-US" dirty="0"/>
+              <a:t> </a:t>
+            </a:r>
+            <a:r>
+              <a:rPr lang="en-US" dirty="0" err="1"/>
+              <a:t>oldal</a:t>
+            </a:r>
+            <a:r>
+              <a:rPr lang="en-US" dirty="0"/>
+              <a:t>. </a:t>
+            </a:r>
+            <a:r>
+              <a:rPr lang="en-US" dirty="0" err="1"/>
+              <a:t>Ezek</a:t>
+            </a:r>
+            <a:r>
+              <a:rPr lang="en-US" dirty="0"/>
+              <a:t> a </a:t>
+            </a:r>
+            <a:r>
+              <a:rPr lang="en-US" dirty="0" err="1"/>
+              <a:t>fő</a:t>
+            </a:r>
+            <a:r>
+              <a:rPr lang="en-US" dirty="0"/>
+              <a:t> </a:t>
+            </a:r>
+            <a:r>
+              <a:rPr lang="en-US" dirty="0" err="1"/>
+              <a:t>funkciókat</a:t>
+            </a:r>
+            <a:r>
+              <a:rPr lang="en-US" dirty="0"/>
+              <a:t> </a:t>
+            </a:r>
+            <a:r>
+              <a:rPr lang="en-US" dirty="0" err="1"/>
+              <a:t>fedik</a:t>
+            </a:r>
+            <a:r>
+              <a:rPr lang="en-US" dirty="0"/>
+              <a:t> le, </a:t>
+            </a:r>
+            <a:r>
+              <a:rPr lang="en-US" dirty="0" err="1"/>
+              <a:t>és</a:t>
+            </a:r>
+            <a:r>
+              <a:rPr lang="en-US" dirty="0"/>
+              <a:t> </a:t>
+            </a:r>
+            <a:r>
+              <a:rPr lang="en-US" dirty="0" err="1"/>
+              <a:t>mindegyiknek</a:t>
+            </a:r>
+            <a:r>
+              <a:rPr lang="en-US" dirty="0"/>
+              <a:t> </a:t>
+            </a:r>
+            <a:r>
+              <a:rPr lang="en-US" dirty="0" err="1"/>
+              <a:t>saját</a:t>
+            </a:r>
+            <a:r>
+              <a:rPr lang="en-US" dirty="0"/>
+              <a:t> </a:t>
+            </a:r>
+            <a:r>
+              <a:rPr lang="en-US" dirty="0" err="1"/>
+              <a:t>felelőssége</a:t>
+            </a:r>
+            <a:r>
+              <a:rPr lang="en-US" dirty="0"/>
+              <a:t> van. </a:t>
+            </a:r>
+            <a:r>
+              <a:rPr lang="en-US" dirty="0" err="1"/>
+              <a:t>Emellett</a:t>
+            </a:r>
+            <a:r>
+              <a:rPr lang="en-US" dirty="0"/>
+              <a:t> </a:t>
+            </a:r>
+            <a:r>
+              <a:rPr lang="en-US" dirty="0" err="1"/>
+              <a:t>vannak</a:t>
+            </a:r>
+            <a:r>
+              <a:rPr lang="en-US" dirty="0"/>
+              <a:t> </a:t>
+            </a:r>
+            <a:r>
+              <a:rPr lang="en-US" dirty="0" err="1"/>
+              <a:t>közös</a:t>
+            </a:r>
+            <a:r>
+              <a:rPr lang="en-US" dirty="0"/>
+              <a:t> </a:t>
+            </a:r>
+            <a:r>
+              <a:rPr lang="en-US" dirty="0" err="1"/>
+              <a:t>elemek</a:t>
+            </a:r>
+            <a:r>
+              <a:rPr lang="en-US" dirty="0"/>
+              <a:t>, </a:t>
+            </a:r>
+            <a:r>
+              <a:rPr lang="en-US" dirty="0" err="1"/>
+              <a:t>például</a:t>
+            </a:r>
+            <a:r>
+              <a:rPr lang="en-US" dirty="0"/>
+              <a:t> a </a:t>
+            </a:r>
+            <a:r>
+              <a:rPr lang="en-US" dirty="0" err="1"/>
+              <a:t>fejléc</a:t>
+            </a:r>
+            <a:r>
+              <a:rPr lang="en-US" dirty="0"/>
+              <a:t> </a:t>
+            </a:r>
+            <a:r>
+              <a:rPr lang="en-US" dirty="0" err="1"/>
+              <a:t>és</a:t>
+            </a:r>
+            <a:r>
+              <a:rPr lang="en-US" dirty="0"/>
+              <a:t> a </a:t>
+            </a:r>
+            <a:r>
+              <a:rPr lang="en-US" dirty="0" err="1"/>
+              <a:t>lábléc</a:t>
+            </a:r>
+            <a:r>
+              <a:rPr lang="en-US" dirty="0"/>
+              <a:t>, </a:t>
+            </a:r>
+            <a:r>
+              <a:rPr lang="en-US" dirty="0" err="1"/>
+              <a:t>amelyek</a:t>
+            </a:r>
+            <a:r>
+              <a:rPr lang="en-US" dirty="0"/>
+              <a:t> </a:t>
+            </a:r>
+            <a:r>
+              <a:rPr lang="en-US" dirty="0" err="1"/>
+              <a:t>minden</a:t>
+            </a:r>
+            <a:r>
+              <a:rPr lang="en-US" dirty="0"/>
+              <a:t> </a:t>
+            </a:r>
+            <a:r>
+              <a:rPr lang="en-US" dirty="0" err="1"/>
+              <a:t>oldalon</a:t>
+            </a:r>
+            <a:r>
+              <a:rPr lang="en-US" dirty="0"/>
+              <a:t> </a:t>
+            </a:r>
+            <a:r>
+              <a:rPr lang="en-US" dirty="0" err="1"/>
+              <a:t>egységes</a:t>
+            </a:r>
+            <a:r>
+              <a:rPr lang="en-US" dirty="0"/>
+              <a:t> </a:t>
+            </a:r>
+            <a:r>
+              <a:rPr lang="en-US" dirty="0" err="1"/>
+              <a:t>megjelenést</a:t>
+            </a:r>
+            <a:r>
+              <a:rPr lang="en-US" dirty="0"/>
+              <a:t> </a:t>
+            </a:r>
+            <a:r>
+              <a:rPr lang="en-US" dirty="0" err="1"/>
+              <a:t>adnak</a:t>
+            </a:r>
+            <a:r>
+              <a:rPr lang="en-US" dirty="0"/>
+              <a:t>.</a:t>
+            </a:r>
+            <a:endParaRPr lang="hu-HU" dirty="0"/>
+          </a:p>
+          <a:p>
+            <a:endParaRPr lang="en-US" dirty="0">
+              <a:cs typeface="+mn-lt"/>
+            </a:endParaRPr>
+          </a:p>
+          <a:p>
+            <a:r>
+              <a:rPr lang="en-US" dirty="0"/>
+              <a:t>A </a:t>
+            </a:r>
+            <a:r>
+              <a:rPr lang="en-US" dirty="0" err="1"/>
+              <a:t>felhasználókezelés</a:t>
+            </a:r>
+            <a:r>
+              <a:rPr lang="en-US" dirty="0"/>
+              <a:t> </a:t>
+            </a:r>
+            <a:r>
+              <a:rPr lang="en-US" dirty="0" err="1"/>
+              <a:t>külön</a:t>
+            </a:r>
+            <a:r>
+              <a:rPr lang="en-US" dirty="0"/>
+              <a:t> </a:t>
+            </a:r>
+            <a:r>
+              <a:rPr lang="en-US" dirty="0" err="1"/>
+              <a:t>komponensekkel</a:t>
+            </a:r>
+            <a:r>
+              <a:rPr lang="en-US" dirty="0"/>
+              <a:t> </a:t>
+            </a:r>
+            <a:r>
+              <a:rPr lang="en-US" dirty="0" err="1"/>
+              <a:t>történik</a:t>
+            </a:r>
+            <a:r>
+              <a:rPr lang="en-US" dirty="0"/>
+              <a:t>: </a:t>
+            </a:r>
+            <a:r>
+              <a:rPr lang="en-US" dirty="0" err="1"/>
+              <a:t>bejelentkezés</a:t>
+            </a:r>
+            <a:r>
+              <a:rPr lang="en-US" dirty="0"/>
+              <a:t>, </a:t>
+            </a:r>
+            <a:r>
+              <a:rPr lang="en-US" dirty="0" err="1"/>
+              <a:t>regisztráció</a:t>
+            </a:r>
+            <a:r>
+              <a:rPr lang="en-US" dirty="0"/>
+              <a:t> </a:t>
+            </a:r>
+            <a:r>
+              <a:rPr lang="en-US" dirty="0" err="1"/>
+              <a:t>és</a:t>
+            </a:r>
+            <a:r>
+              <a:rPr lang="en-US" dirty="0"/>
+              <a:t> </a:t>
+            </a:r>
+            <a:r>
+              <a:rPr lang="en-US" dirty="0" err="1"/>
+              <a:t>egy</a:t>
+            </a:r>
+            <a:r>
+              <a:rPr lang="en-US" dirty="0"/>
+              <a:t> </a:t>
+            </a:r>
+            <a:r>
+              <a:rPr lang="en-US" dirty="0" err="1"/>
+              <a:t>autentikációs</a:t>
+            </a:r>
+            <a:r>
+              <a:rPr lang="en-US" dirty="0"/>
+              <a:t> modal </a:t>
+            </a:r>
+            <a:r>
+              <a:rPr lang="en-US" dirty="0" err="1"/>
+              <a:t>ablak</a:t>
+            </a:r>
+            <a:r>
+              <a:rPr lang="en-US" dirty="0"/>
+              <a:t>. Ez </a:t>
+            </a:r>
+            <a:r>
+              <a:rPr lang="en-US" dirty="0" err="1"/>
+              <a:t>azért</a:t>
+            </a:r>
+            <a:r>
+              <a:rPr lang="en-US" dirty="0"/>
+              <a:t> </a:t>
+            </a:r>
+            <a:r>
+              <a:rPr lang="en-US" dirty="0" err="1"/>
+              <a:t>jó</a:t>
+            </a:r>
+            <a:r>
+              <a:rPr lang="en-US" dirty="0"/>
+              <a:t>, </a:t>
+            </a:r>
+            <a:r>
+              <a:rPr lang="en-US" dirty="0" err="1"/>
+              <a:t>mert</a:t>
+            </a:r>
+            <a:r>
+              <a:rPr lang="en-US" dirty="0"/>
+              <a:t> a </a:t>
+            </a:r>
+            <a:r>
+              <a:rPr lang="en-US" dirty="0" err="1"/>
+              <a:t>hitelesítési</a:t>
+            </a:r>
+            <a:r>
+              <a:rPr lang="en-US" dirty="0"/>
+              <a:t> </a:t>
+            </a:r>
+            <a:r>
+              <a:rPr lang="en-US" dirty="0" err="1"/>
+              <a:t>logika</a:t>
+            </a:r>
+            <a:r>
+              <a:rPr lang="en-US" dirty="0"/>
+              <a:t> </a:t>
+            </a:r>
+            <a:r>
+              <a:rPr lang="en-US" dirty="0" err="1"/>
+              <a:t>elkülönül</a:t>
+            </a:r>
+            <a:r>
+              <a:rPr lang="en-US" dirty="0"/>
+              <a:t> </a:t>
+            </a:r>
+            <a:r>
+              <a:rPr lang="en-US" dirty="0" err="1"/>
+              <a:t>az</a:t>
+            </a:r>
+            <a:r>
+              <a:rPr lang="en-US" dirty="0"/>
+              <a:t> </a:t>
+            </a:r>
+            <a:r>
+              <a:rPr lang="en-US" dirty="0" err="1"/>
+              <a:t>üzleti</a:t>
+            </a:r>
+            <a:r>
+              <a:rPr lang="en-US" dirty="0"/>
+              <a:t> </a:t>
+            </a:r>
+            <a:r>
+              <a:rPr lang="en-US" dirty="0" err="1"/>
+              <a:t>funkcióktól</a:t>
+            </a:r>
+            <a:r>
+              <a:rPr lang="en-US" dirty="0"/>
+              <a:t>, </a:t>
+            </a:r>
+            <a:r>
+              <a:rPr lang="en-US" dirty="0" err="1"/>
+              <a:t>így</a:t>
+            </a:r>
+            <a:r>
+              <a:rPr lang="en-US" dirty="0"/>
+              <a:t> </a:t>
+            </a:r>
+            <a:r>
+              <a:rPr lang="en-US" dirty="0" err="1"/>
+              <a:t>átláthatóbb</a:t>
+            </a:r>
+            <a:r>
+              <a:rPr lang="en-US" dirty="0"/>
+              <a:t> </a:t>
+            </a:r>
+            <a:r>
+              <a:rPr lang="en-US" dirty="0" err="1"/>
+              <a:t>marad</a:t>
+            </a:r>
+            <a:r>
+              <a:rPr lang="en-US" dirty="0"/>
+              <a:t> a </a:t>
+            </a:r>
+            <a:r>
+              <a:rPr lang="en-US" dirty="0" err="1"/>
+              <a:t>kód</a:t>
+            </a:r>
+            <a:r>
+              <a:rPr lang="en-US" dirty="0">
+                <a:highlight>
+                  <a:srgbClr val="191A1B"/>
+                </a:highlight>
+              </a:rPr>
+              <a:t>.</a:t>
+            </a:r>
+            <a:endParaRPr lang="hu-HU" dirty="0"/>
+          </a:p>
+          <a:p>
+            <a:endParaRPr lang="en-US" dirty="0">
+              <a:ea typeface="Calibri"/>
+              <a:cs typeface="+mn-lt"/>
+            </a:endParaRPr>
+          </a:p>
+          <a:p>
+            <a:r>
+              <a:rPr lang="en-US" dirty="0"/>
+              <a:t>A </a:t>
+            </a:r>
+            <a:r>
+              <a:rPr lang="en-US" dirty="0" err="1"/>
+              <a:t>stílusok</a:t>
+            </a:r>
+            <a:r>
+              <a:rPr lang="en-US" dirty="0"/>
+              <a:t> </a:t>
+            </a:r>
+            <a:r>
+              <a:rPr lang="en-US" dirty="0" err="1"/>
+              <a:t>modulárisan</a:t>
+            </a:r>
+            <a:r>
+              <a:rPr lang="en-US" dirty="0"/>
+              <a:t>, </a:t>
+            </a:r>
+            <a:r>
+              <a:rPr lang="en-US" dirty="0" err="1"/>
+              <a:t>külön</a:t>
+            </a:r>
+            <a:r>
+              <a:rPr lang="en-US" dirty="0"/>
+              <a:t> CSS </a:t>
+            </a:r>
+            <a:r>
+              <a:rPr lang="en-US" dirty="0" err="1"/>
+              <a:t>fájlokban</a:t>
+            </a:r>
+            <a:r>
+              <a:rPr lang="en-US" dirty="0"/>
+              <a:t> </a:t>
+            </a:r>
+            <a:r>
+              <a:rPr lang="en-US" dirty="0" err="1"/>
+              <a:t>vannak</a:t>
+            </a:r>
+            <a:r>
+              <a:rPr lang="en-US" dirty="0"/>
+              <a:t> </a:t>
+            </a:r>
+            <a:r>
+              <a:rPr lang="en-US" dirty="0" err="1"/>
+              <a:t>kezelve</a:t>
+            </a:r>
+            <a:r>
+              <a:rPr lang="en-US" dirty="0"/>
+              <a:t>. Ez </a:t>
+            </a:r>
+            <a:r>
+              <a:rPr lang="en-US" dirty="0" err="1"/>
+              <a:t>segít</a:t>
+            </a:r>
+            <a:r>
+              <a:rPr lang="en-US" dirty="0"/>
+              <a:t> </a:t>
+            </a:r>
+            <a:r>
+              <a:rPr lang="en-US" dirty="0" err="1"/>
+              <a:t>abban</a:t>
+            </a:r>
+            <a:r>
+              <a:rPr lang="en-US" dirty="0"/>
+              <a:t>, </a:t>
+            </a:r>
+            <a:r>
+              <a:rPr lang="en-US" dirty="0" err="1"/>
+              <a:t>hogy</a:t>
+            </a:r>
+            <a:r>
+              <a:rPr lang="en-US" dirty="0"/>
+              <a:t> </a:t>
+            </a:r>
+            <a:r>
+              <a:rPr lang="en-US" dirty="0" err="1"/>
+              <a:t>egy-egy</a:t>
+            </a:r>
+            <a:r>
+              <a:rPr lang="en-US" dirty="0"/>
+              <a:t> </a:t>
+            </a:r>
+            <a:r>
+              <a:rPr lang="en-US" dirty="0" err="1"/>
+              <a:t>oldal</a:t>
+            </a:r>
+            <a:r>
+              <a:rPr lang="en-US" dirty="0"/>
+              <a:t> </a:t>
+            </a:r>
+            <a:r>
+              <a:rPr lang="en-US" dirty="0" err="1"/>
+              <a:t>vagy</a:t>
+            </a:r>
+            <a:r>
+              <a:rPr lang="en-US" dirty="0"/>
+              <a:t> </a:t>
+            </a:r>
+            <a:r>
+              <a:rPr lang="en-US" dirty="0" err="1"/>
+              <a:t>funkció</a:t>
+            </a:r>
+            <a:r>
+              <a:rPr lang="en-US" dirty="0"/>
+              <a:t> </a:t>
+            </a:r>
+            <a:r>
+              <a:rPr lang="en-US" dirty="0" err="1"/>
+              <a:t>kinézete</a:t>
+            </a:r>
+            <a:r>
+              <a:rPr lang="en-US" dirty="0"/>
+              <a:t> ne </a:t>
+            </a:r>
+            <a:r>
+              <a:rPr lang="en-US" dirty="0" err="1"/>
+              <a:t>keveredjen</a:t>
+            </a:r>
+            <a:r>
+              <a:rPr lang="en-US" dirty="0"/>
+              <a:t> </a:t>
+            </a:r>
+            <a:r>
+              <a:rPr lang="en-US" dirty="0" err="1"/>
+              <a:t>más</a:t>
+            </a:r>
+            <a:r>
+              <a:rPr lang="en-US" dirty="0"/>
+              <a:t> </a:t>
+            </a:r>
+            <a:r>
+              <a:rPr lang="en-US" dirty="0" err="1"/>
+              <a:t>részekkel</a:t>
+            </a:r>
+            <a:r>
+              <a:rPr lang="en-US" dirty="0"/>
+              <a:t>. </a:t>
+            </a:r>
+            <a:r>
+              <a:rPr lang="en-US" dirty="0" err="1"/>
+              <a:t>Összességében</a:t>
+            </a:r>
+            <a:r>
+              <a:rPr lang="en-US" dirty="0"/>
+              <a:t> </a:t>
+            </a:r>
+            <a:r>
+              <a:rPr lang="en-US" dirty="0" err="1"/>
+              <a:t>ez</a:t>
+            </a:r>
+            <a:r>
+              <a:rPr lang="en-US" dirty="0"/>
+              <a:t> a </a:t>
+            </a:r>
+            <a:r>
+              <a:rPr lang="en-US" dirty="0" err="1"/>
+              <a:t>struktúra</a:t>
+            </a:r>
+            <a:r>
+              <a:rPr lang="en-US" dirty="0"/>
+              <a:t> </a:t>
+            </a:r>
+            <a:r>
+              <a:rPr lang="en-US" dirty="0" err="1"/>
+              <a:t>skálázható</a:t>
+            </a:r>
+            <a:r>
+              <a:rPr lang="en-US" dirty="0"/>
+              <a:t>: ha </a:t>
+            </a:r>
+            <a:r>
+              <a:rPr lang="en-US" dirty="0" err="1"/>
+              <a:t>új</a:t>
+            </a:r>
+            <a:r>
+              <a:rPr lang="en-US" dirty="0"/>
+              <a:t> </a:t>
+            </a:r>
+            <a:r>
+              <a:rPr lang="en-US" dirty="0" err="1"/>
+              <a:t>funkció</a:t>
+            </a:r>
+            <a:r>
+              <a:rPr lang="en-US" dirty="0"/>
+              <a:t> </a:t>
+            </a:r>
+            <a:r>
+              <a:rPr lang="en-US" dirty="0" err="1"/>
+              <a:t>érkezik</a:t>
+            </a:r>
+            <a:r>
+              <a:rPr lang="en-US" dirty="0"/>
+              <a:t>, </a:t>
+            </a:r>
+            <a:r>
+              <a:rPr lang="en-US" dirty="0" err="1"/>
+              <a:t>új</a:t>
+            </a:r>
+            <a:r>
+              <a:rPr lang="en-US" dirty="0"/>
+              <a:t> </a:t>
+            </a:r>
+            <a:r>
+              <a:rPr lang="en-US" dirty="0" err="1"/>
+              <a:t>komponenst</a:t>
+            </a:r>
+            <a:r>
+              <a:rPr lang="en-US" dirty="0"/>
+              <a:t> </a:t>
+            </a:r>
+            <a:r>
+              <a:rPr lang="en-US" dirty="0" err="1"/>
+              <a:t>adunk</a:t>
+            </a:r>
+            <a:r>
+              <a:rPr lang="en-US" dirty="0"/>
+              <a:t> </a:t>
+            </a:r>
+            <a:r>
+              <a:rPr lang="en-US" dirty="0" err="1"/>
+              <a:t>hozzá</a:t>
+            </a:r>
+            <a:r>
+              <a:rPr lang="en-US" dirty="0"/>
+              <a:t> a </a:t>
+            </a:r>
+            <a:r>
+              <a:rPr lang="en-US" dirty="0" err="1"/>
+              <a:t>meglévő</a:t>
+            </a:r>
+            <a:r>
+              <a:rPr lang="en-US" dirty="0"/>
+              <a:t> </a:t>
+            </a:r>
+            <a:r>
+              <a:rPr lang="en-US" dirty="0" err="1"/>
+              <a:t>rendszerhez</a:t>
+            </a:r>
+            <a:r>
+              <a:rPr lang="en-US" dirty="0"/>
+              <a:t>, </a:t>
+            </a:r>
+            <a:r>
+              <a:rPr lang="en-US" dirty="0" err="1"/>
+              <a:t>anélkül</a:t>
+            </a:r>
+            <a:r>
+              <a:rPr lang="en-US" dirty="0"/>
+              <a:t> </a:t>
+            </a:r>
+            <a:r>
+              <a:rPr lang="en-US" dirty="0" err="1"/>
+              <a:t>hogy</a:t>
+            </a:r>
+            <a:r>
+              <a:rPr lang="en-US" dirty="0"/>
+              <a:t> </a:t>
+            </a:r>
+            <a:r>
+              <a:rPr lang="en-US" dirty="0" err="1"/>
+              <a:t>az</a:t>
+            </a:r>
+            <a:r>
+              <a:rPr lang="en-US" dirty="0"/>
+              <a:t> </a:t>
+            </a:r>
+            <a:r>
+              <a:rPr lang="en-US" dirty="0" err="1"/>
+              <a:t>egész</a:t>
+            </a:r>
+            <a:r>
+              <a:rPr lang="en-US" dirty="0"/>
+              <a:t> </a:t>
+            </a:r>
+            <a:r>
+              <a:rPr lang="en-US" dirty="0" err="1"/>
+              <a:t>alkalmazást</a:t>
+            </a:r>
+            <a:r>
+              <a:rPr lang="en-US" dirty="0"/>
+              <a:t> </a:t>
+            </a:r>
+            <a:r>
+              <a:rPr lang="en-US" dirty="0" err="1"/>
+              <a:t>át</a:t>
+            </a:r>
+            <a:r>
+              <a:rPr lang="en-US" dirty="0"/>
+              <a:t> </a:t>
+            </a:r>
+            <a:r>
+              <a:rPr lang="en-US" dirty="0" err="1"/>
+              <a:t>kellene</a:t>
+            </a:r>
+            <a:r>
+              <a:rPr lang="en-US" dirty="0"/>
+              <a:t> </a:t>
+            </a:r>
+            <a:r>
+              <a:rPr lang="en-US" dirty="0" err="1"/>
+              <a:t>szervezni</a:t>
+            </a:r>
+            <a:r>
+              <a:rPr lang="en-US" dirty="0">
+                <a:solidFill>
+                  <a:srgbClr val="BFBFBF"/>
+                </a:solidFill>
+              </a:rPr>
+              <a:t>.</a:t>
+            </a:r>
+            <a:br>
+              <a:rPr lang="en-US" dirty="0">
+                <a:cs typeface="+mn-lt"/>
+              </a:rPr>
+            </a:br>
+            <a:endParaRPr lang="en-US" dirty="0">
+              <a:cs typeface="+mn-lt"/>
             </a:endParaRPr>
           </a:p>
         </p:txBody>
@@ -2029,6 +2649,1311 @@
     <p:extLst>
       <p:ext uri="{BB962C8B-B14F-4D97-AF65-F5344CB8AC3E}">
         <p14:creationId xmlns:p14="http://schemas.microsoft.com/office/powerpoint/2010/main" val="3219335407"/>
+      </p:ext>
+    </p:extLst>
+  </p:cSld>
+  <p:clrMapOvr>
+    <a:masterClrMapping/>
+  </p:clrMapOvr>
+</p:notes>
+</file>
+
+<file path=ppt/notesSlides/notesSlide9.xml><?xml version="1.0" encoding="utf-8"?>
+<p:notes xmlns:a="http://schemas.openxmlformats.org/drawingml/2006/main" xmlns:r="http://schemas.openxmlformats.org/officeDocument/2006/relationships" xmlns:p="http://schemas.openxmlformats.org/presentationml/2006/main">
+  <p:cSld>
+    <p:spTree>
+      <p:nvGrpSpPr>
+        <p:cNvPr id="1" name=""/>
+        <p:cNvGrpSpPr/>
+        <p:nvPr/>
+      </p:nvGrpSpPr>
+      <p:grpSpPr>
+        <a:xfrm>
+          <a:off x="0" y="0"/>
+          <a:ext cx="0" cy="0"/>
+          <a:chOff x="0" y="0"/>
+          <a:chExt cx="0" cy="0"/>
+        </a:xfrm>
+      </p:grpSpPr>
+      <p:sp>
+        <p:nvSpPr>
+          <p:cNvPr id="2" name="Diakép helye 1"/>
+          <p:cNvSpPr>
+            <a:spLocks noGrp="1" noRot="1" noChangeAspect="1"/>
+          </p:cNvSpPr>
+          <p:nvPr>
+            <p:ph type="sldImg"/>
+          </p:nvPr>
+        </p:nvSpPr>
+        <p:spPr/>
+      </p:sp>
+      <p:sp>
+        <p:nvSpPr>
+          <p:cNvPr id="3" name="Jegyzetek helye 2"/>
+          <p:cNvSpPr>
+            <a:spLocks noGrp="1"/>
+          </p:cNvSpPr>
+          <p:nvPr>
+            <p:ph type="body" idx="1"/>
+          </p:nvPr>
+        </p:nvSpPr>
+        <p:spPr/>
+        <p:txBody>
+          <a:bodyPr/>
+          <a:lstStyle/>
+          <a:p>
+            <a:r>
+              <a:rPr lang="en-US" dirty="0"/>
+              <a:t>A </a:t>
+            </a:r>
+            <a:r>
+              <a:rPr lang="en-US" dirty="0" err="1"/>
+              <a:t>reszponzivitás</a:t>
+            </a:r>
+            <a:r>
+              <a:rPr lang="en-US" dirty="0"/>
+              <a:t> </a:t>
+            </a:r>
+            <a:r>
+              <a:rPr lang="en-US" dirty="0" err="1"/>
+              <a:t>célja</a:t>
+            </a:r>
+            <a:r>
+              <a:rPr lang="en-US" dirty="0"/>
+              <a:t>, </a:t>
+            </a:r>
+            <a:r>
+              <a:rPr lang="en-US" dirty="0" err="1"/>
+              <a:t>hogy</a:t>
+            </a:r>
+            <a:r>
+              <a:rPr lang="en-US" dirty="0"/>
+              <a:t> </a:t>
+            </a:r>
+            <a:r>
+              <a:rPr lang="en-US" dirty="0" err="1"/>
+              <a:t>az</a:t>
+            </a:r>
+            <a:r>
+              <a:rPr lang="en-US" dirty="0"/>
+              <a:t> </a:t>
+            </a:r>
+            <a:r>
+              <a:rPr lang="en-US" dirty="0" err="1"/>
+              <a:t>alkalmazás</a:t>
+            </a:r>
+            <a:r>
+              <a:rPr lang="en-US" dirty="0"/>
+              <a:t> </a:t>
+            </a:r>
+            <a:r>
+              <a:rPr lang="en-US" dirty="0" err="1"/>
+              <a:t>asztali</a:t>
+            </a:r>
+            <a:r>
+              <a:rPr lang="en-US" dirty="0"/>
+              <a:t> </a:t>
+            </a:r>
+            <a:r>
+              <a:rPr lang="en-US" dirty="0" err="1"/>
+              <a:t>gépen</a:t>
+            </a:r>
+            <a:r>
+              <a:rPr lang="en-US" dirty="0"/>
+              <a:t>, </a:t>
+            </a:r>
+            <a:r>
+              <a:rPr lang="en-US" dirty="0" err="1"/>
+              <a:t>tableten</a:t>
+            </a:r>
+            <a:r>
+              <a:rPr lang="en-US" dirty="0"/>
+              <a:t> </a:t>
+            </a:r>
+            <a:r>
+              <a:rPr lang="en-US" dirty="0" err="1"/>
+              <a:t>és</a:t>
+            </a:r>
+            <a:r>
+              <a:rPr lang="en-US" dirty="0"/>
+              <a:t> </a:t>
+            </a:r>
+            <a:r>
+              <a:rPr lang="en-US" dirty="0" err="1"/>
+              <a:t>mobilon</a:t>
+            </a:r>
+            <a:r>
+              <a:rPr lang="en-US" dirty="0"/>
+              <a:t> is </a:t>
+            </a:r>
+            <a:r>
+              <a:rPr lang="en-US" dirty="0" err="1"/>
+              <a:t>jól</a:t>
+            </a:r>
+            <a:r>
+              <a:rPr lang="en-US" dirty="0"/>
+              <a:t> </a:t>
+            </a:r>
+            <a:r>
+              <a:rPr lang="en-US" dirty="0" err="1"/>
+              <a:t>használható</a:t>
+            </a:r>
+            <a:r>
+              <a:rPr lang="en-US" dirty="0"/>
+              <a:t> </a:t>
+            </a:r>
+            <a:r>
+              <a:rPr lang="en-US" dirty="0" err="1"/>
+              <a:t>legyen</a:t>
+            </a:r>
+            <a:r>
+              <a:rPr lang="en-US" dirty="0"/>
+              <a:t>. Nem </a:t>
+            </a:r>
+            <a:r>
+              <a:rPr lang="en-US" dirty="0" err="1"/>
+              <a:t>csak</a:t>
+            </a:r>
+            <a:r>
+              <a:rPr lang="en-US" dirty="0"/>
+              <a:t> </a:t>
+            </a:r>
+            <a:r>
+              <a:rPr lang="en-US" dirty="0" err="1"/>
+              <a:t>arról</a:t>
+            </a:r>
+            <a:r>
+              <a:rPr lang="en-US" dirty="0"/>
+              <a:t> van </a:t>
+            </a:r>
+            <a:r>
+              <a:rPr lang="en-US" dirty="0" err="1"/>
+              <a:t>szó</a:t>
+            </a:r>
+            <a:r>
+              <a:rPr lang="en-US" dirty="0"/>
+              <a:t>, </a:t>
+            </a:r>
+            <a:r>
+              <a:rPr lang="en-US" dirty="0" err="1"/>
+              <a:t>hogy</a:t>
+            </a:r>
+            <a:r>
+              <a:rPr lang="en-US" dirty="0"/>
+              <a:t> </a:t>
+            </a:r>
+            <a:r>
+              <a:rPr lang="en-US" dirty="0" err="1"/>
+              <a:t>minden</a:t>
+            </a:r>
+            <a:r>
+              <a:rPr lang="en-US" dirty="0"/>
+              <a:t> “</a:t>
+            </a:r>
+            <a:r>
+              <a:rPr lang="en-US" dirty="0" err="1"/>
+              <a:t>elférjen</a:t>
+            </a:r>
+            <a:r>
+              <a:rPr lang="en-US" dirty="0"/>
+              <a:t>” a </a:t>
+            </a:r>
+            <a:r>
+              <a:rPr lang="en-US" dirty="0" err="1"/>
+              <a:t>képernyőn</a:t>
+            </a:r>
+            <a:r>
+              <a:rPr lang="en-US" dirty="0"/>
+              <a:t>, </a:t>
+            </a:r>
+            <a:r>
+              <a:rPr lang="en-US" dirty="0" err="1"/>
+              <a:t>hanem</a:t>
+            </a:r>
+            <a:r>
+              <a:rPr lang="en-US" dirty="0"/>
+              <a:t> </a:t>
+            </a:r>
+            <a:r>
+              <a:rPr lang="en-US" dirty="0" err="1"/>
+              <a:t>arról</a:t>
+            </a:r>
+            <a:r>
+              <a:rPr lang="en-US" dirty="0"/>
+              <a:t> is, </a:t>
+            </a:r>
+            <a:r>
+              <a:rPr lang="en-US" dirty="0" err="1"/>
+              <a:t>hogy</a:t>
+            </a:r>
+            <a:r>
+              <a:rPr lang="en-US" dirty="0"/>
+              <a:t> a </a:t>
+            </a:r>
+            <a:r>
+              <a:rPr lang="en-US" dirty="0" err="1"/>
+              <a:t>felhasználói</a:t>
+            </a:r>
+            <a:r>
+              <a:rPr lang="en-US" dirty="0"/>
+              <a:t> </a:t>
+            </a:r>
+            <a:r>
+              <a:rPr lang="en-US" dirty="0" err="1"/>
+              <a:t>élmény</a:t>
+            </a:r>
+            <a:r>
+              <a:rPr lang="en-US" dirty="0"/>
+              <a:t> </a:t>
+            </a:r>
+            <a:r>
+              <a:rPr lang="en-US" dirty="0" err="1"/>
+              <a:t>minden</a:t>
+            </a:r>
+            <a:r>
+              <a:rPr lang="en-US" dirty="0"/>
+              <a:t> </a:t>
+            </a:r>
+            <a:r>
+              <a:rPr lang="en-US" dirty="0" err="1"/>
+              <a:t>eszközön</a:t>
+            </a:r>
+            <a:r>
+              <a:rPr lang="en-US" dirty="0"/>
+              <a:t> </a:t>
+            </a:r>
+            <a:r>
+              <a:rPr lang="en-US" dirty="0" err="1"/>
+              <a:t>konzisztens</a:t>
+            </a:r>
+            <a:r>
+              <a:rPr lang="en-US" dirty="0"/>
+              <a:t> </a:t>
+            </a:r>
+            <a:r>
+              <a:rPr lang="en-US" dirty="0" err="1"/>
+              <a:t>maradjon</a:t>
+            </a:r>
+            <a:r>
+              <a:rPr lang="en-US" dirty="0"/>
+              <a:t>.</a:t>
+            </a:r>
+          </a:p>
+          <a:p>
+            <a:endParaRPr lang="en-US" dirty="0">
+              <a:ea typeface="Calibri"/>
+              <a:cs typeface="Calibri"/>
+            </a:endParaRPr>
+          </a:p>
+          <a:p>
+            <a:r>
+              <a:rPr lang="en-US" dirty="0"/>
+              <a:t>A </a:t>
+            </a:r>
+            <a:r>
+              <a:rPr lang="en-US" dirty="0" err="1"/>
+              <a:t>felület</a:t>
+            </a:r>
+            <a:r>
+              <a:rPr lang="en-US" dirty="0"/>
+              <a:t> </a:t>
+            </a:r>
+            <a:r>
+              <a:rPr lang="en-US" dirty="0" err="1"/>
+              <a:t>kialakításánál</a:t>
+            </a:r>
+            <a:r>
+              <a:rPr lang="en-US" dirty="0"/>
+              <a:t> </a:t>
+            </a:r>
+            <a:r>
+              <a:rPr lang="en-US" dirty="0" err="1"/>
+              <a:t>mobil-első</a:t>
+            </a:r>
+            <a:r>
+              <a:rPr lang="en-US" dirty="0"/>
+              <a:t> </a:t>
+            </a:r>
+            <a:r>
+              <a:rPr lang="en-US" dirty="0" err="1"/>
+              <a:t>megközelítést</a:t>
+            </a:r>
+            <a:r>
+              <a:rPr lang="en-US" dirty="0"/>
+              <a:t> </a:t>
+            </a:r>
+            <a:r>
+              <a:rPr lang="en-US" dirty="0" err="1"/>
+              <a:t>érdemes</a:t>
+            </a:r>
+            <a:r>
+              <a:rPr lang="en-US" dirty="0"/>
+              <a:t> </a:t>
+            </a:r>
+            <a:r>
+              <a:rPr lang="en-US" dirty="0" err="1"/>
+              <a:t>követni</a:t>
+            </a:r>
+            <a:r>
+              <a:rPr lang="en-US" dirty="0"/>
+              <a:t>: </a:t>
+            </a:r>
+            <a:r>
+              <a:rPr lang="en-US" dirty="0" err="1"/>
+              <a:t>először</a:t>
+            </a:r>
+            <a:r>
+              <a:rPr lang="en-US" dirty="0"/>
+              <a:t> a </a:t>
+            </a:r>
+            <a:r>
+              <a:rPr lang="en-US" dirty="0" err="1"/>
+              <a:t>kisebb</a:t>
+            </a:r>
+            <a:r>
+              <a:rPr lang="en-US" dirty="0"/>
+              <a:t> </a:t>
+            </a:r>
+            <a:r>
+              <a:rPr lang="en-US" dirty="0" err="1"/>
+              <a:t>kijelzőre</a:t>
+            </a:r>
+            <a:r>
+              <a:rPr lang="en-US" dirty="0"/>
+              <a:t> </a:t>
+            </a:r>
+            <a:r>
+              <a:rPr lang="en-US" dirty="0" err="1"/>
+              <a:t>tervezzük</a:t>
+            </a:r>
+            <a:r>
+              <a:rPr lang="en-US" dirty="0"/>
+              <a:t> meg a </a:t>
+            </a:r>
+            <a:r>
+              <a:rPr lang="en-US" dirty="0" err="1"/>
+              <a:t>tiszta</a:t>
+            </a:r>
+            <a:r>
+              <a:rPr lang="en-US" dirty="0"/>
+              <a:t>, </a:t>
+            </a:r>
+            <a:r>
+              <a:rPr lang="en-US" dirty="0" err="1"/>
+              <a:t>lényegre</a:t>
+            </a:r>
+            <a:r>
+              <a:rPr lang="en-US" dirty="0"/>
+              <a:t> </a:t>
+            </a:r>
+            <a:r>
+              <a:rPr lang="en-US" dirty="0" err="1"/>
+              <a:t>törő</a:t>
+            </a:r>
+            <a:r>
+              <a:rPr lang="en-US" dirty="0"/>
+              <a:t> </a:t>
+            </a:r>
+            <a:r>
+              <a:rPr lang="en-US" dirty="0" err="1"/>
+              <a:t>elrendezést</a:t>
+            </a:r>
+            <a:r>
+              <a:rPr lang="en-US" dirty="0"/>
+              <a:t>, </a:t>
+            </a:r>
+            <a:r>
+              <a:rPr lang="en-US" dirty="0" err="1"/>
+              <a:t>majd</a:t>
+            </a:r>
+            <a:r>
+              <a:rPr lang="en-US" dirty="0"/>
+              <a:t> </a:t>
+            </a:r>
+            <a:r>
+              <a:rPr lang="en-US" dirty="0" err="1"/>
+              <a:t>ezt</a:t>
+            </a:r>
+            <a:r>
+              <a:rPr lang="en-US" dirty="0"/>
+              <a:t> </a:t>
+            </a:r>
+            <a:r>
+              <a:rPr lang="en-US" dirty="0" err="1"/>
+              <a:t>bővítjük</a:t>
+            </a:r>
+            <a:r>
+              <a:rPr lang="en-US" dirty="0"/>
+              <a:t> </a:t>
+            </a:r>
+            <a:r>
+              <a:rPr lang="en-US" dirty="0" err="1"/>
+              <a:t>nagyobb</a:t>
+            </a:r>
+            <a:r>
+              <a:rPr lang="en-US" dirty="0"/>
+              <a:t> </a:t>
+            </a:r>
+            <a:r>
+              <a:rPr lang="en-US" dirty="0" err="1"/>
+              <a:t>képernyőkre</a:t>
+            </a:r>
+            <a:r>
+              <a:rPr lang="en-US" dirty="0"/>
+              <a:t>. </a:t>
+            </a:r>
+            <a:r>
+              <a:rPr lang="en-US" dirty="0" err="1"/>
+              <a:t>Így</a:t>
+            </a:r>
+            <a:r>
+              <a:rPr lang="en-US" dirty="0"/>
+              <a:t> </a:t>
+            </a:r>
+            <a:r>
+              <a:rPr lang="en-US" dirty="0" err="1"/>
+              <a:t>biztos</a:t>
+            </a:r>
+            <a:r>
+              <a:rPr lang="en-US" dirty="0"/>
+              <a:t>, </a:t>
+            </a:r>
+            <a:r>
+              <a:rPr lang="en-US" dirty="0" err="1"/>
+              <a:t>hogy</a:t>
+            </a:r>
+            <a:r>
+              <a:rPr lang="en-US" dirty="0"/>
+              <a:t> a </a:t>
+            </a:r>
+            <a:r>
+              <a:rPr lang="en-US" dirty="0" err="1"/>
+              <a:t>legszűkebb</a:t>
+            </a:r>
+            <a:r>
+              <a:rPr lang="en-US" dirty="0"/>
+              <a:t> </a:t>
+            </a:r>
+            <a:r>
+              <a:rPr lang="en-US" dirty="0" err="1"/>
+              <a:t>helyzetben</a:t>
+            </a:r>
+            <a:r>
+              <a:rPr lang="en-US" dirty="0"/>
+              <a:t> is </a:t>
+            </a:r>
+            <a:r>
+              <a:rPr lang="en-US" dirty="0" err="1"/>
+              <a:t>jól</a:t>
+            </a:r>
+            <a:r>
+              <a:rPr lang="en-US" dirty="0"/>
+              <a:t> </a:t>
+            </a:r>
+            <a:r>
+              <a:rPr lang="en-US" dirty="0" err="1"/>
+              <a:t>működik</a:t>
+            </a:r>
+            <a:r>
+              <a:rPr lang="en-US" dirty="0"/>
+              <a:t> </a:t>
+            </a:r>
+            <a:r>
+              <a:rPr lang="en-US" dirty="0" err="1"/>
+              <a:t>az</a:t>
+            </a:r>
+            <a:r>
+              <a:rPr lang="en-US" dirty="0"/>
+              <a:t> </a:t>
+            </a:r>
+            <a:r>
+              <a:rPr lang="en-US" dirty="0" err="1"/>
+              <a:t>alkalmazás</a:t>
+            </a:r>
+            <a:r>
+              <a:rPr lang="en-US" dirty="0"/>
+              <a:t>. A </a:t>
+            </a:r>
+            <a:r>
+              <a:rPr lang="en-US" dirty="0" err="1"/>
+              <a:t>layoutok</a:t>
+            </a:r>
+            <a:r>
+              <a:rPr lang="en-US" dirty="0"/>
+              <a:t> </a:t>
+            </a:r>
+            <a:r>
+              <a:rPr lang="en-US" dirty="0" err="1"/>
+              <a:t>rugalmasak</a:t>
+            </a:r>
+            <a:r>
+              <a:rPr lang="en-US" dirty="0"/>
+              <a:t>: a </a:t>
+            </a:r>
+            <a:r>
+              <a:rPr lang="en-US" dirty="0" err="1"/>
+              <a:t>blokkok</a:t>
+            </a:r>
+            <a:r>
+              <a:rPr lang="en-US" dirty="0"/>
+              <a:t> </a:t>
+            </a:r>
+            <a:r>
+              <a:rPr lang="en-US" dirty="0" err="1"/>
+              <a:t>egymás</a:t>
+            </a:r>
+            <a:r>
+              <a:rPr lang="en-US" dirty="0"/>
+              <a:t> </a:t>
+            </a:r>
+            <a:r>
+              <a:rPr lang="en-US" dirty="0" err="1"/>
+              <a:t>alá</a:t>
+            </a:r>
+            <a:r>
+              <a:rPr lang="en-US" dirty="0"/>
+              <a:t> </a:t>
+            </a:r>
+            <a:r>
+              <a:rPr lang="en-US" dirty="0" err="1"/>
+              <a:t>rendeződnek</a:t>
+            </a:r>
+            <a:r>
+              <a:rPr lang="en-US" dirty="0"/>
+              <a:t> </a:t>
+            </a:r>
+            <a:r>
+              <a:rPr lang="en-US" dirty="0" err="1"/>
+              <a:t>mobilon</a:t>
+            </a:r>
+            <a:r>
+              <a:rPr lang="en-US" dirty="0"/>
+              <a:t>, </a:t>
+            </a:r>
+            <a:r>
+              <a:rPr lang="en-US" dirty="0" err="1"/>
+              <a:t>nagyobb</a:t>
+            </a:r>
+            <a:r>
+              <a:rPr lang="en-US" dirty="0"/>
+              <a:t> </a:t>
+            </a:r>
+            <a:r>
+              <a:rPr lang="en-US" dirty="0" err="1"/>
+              <a:t>képernyőn</a:t>
+            </a:r>
+            <a:r>
+              <a:rPr lang="en-US" dirty="0"/>
+              <a:t> </a:t>
+            </a:r>
+            <a:r>
+              <a:rPr lang="en-US" dirty="0" err="1"/>
+              <a:t>pedig</a:t>
+            </a:r>
+            <a:r>
+              <a:rPr lang="en-US" dirty="0"/>
+              <a:t> </a:t>
+            </a:r>
+            <a:r>
+              <a:rPr lang="en-US" dirty="0" err="1"/>
+              <a:t>több</a:t>
+            </a:r>
+            <a:r>
+              <a:rPr lang="en-US" dirty="0"/>
+              <a:t> </a:t>
+            </a:r>
+            <a:r>
+              <a:rPr lang="en-US" dirty="0" err="1"/>
+              <a:t>oszlopban</a:t>
+            </a:r>
+            <a:r>
+              <a:rPr lang="en-US" dirty="0"/>
+              <a:t> is </a:t>
+            </a:r>
+            <a:r>
+              <a:rPr lang="en-US" dirty="0" err="1"/>
+              <a:t>megjelenhetnek</a:t>
+            </a:r>
+            <a:r>
+              <a:rPr lang="en-US" dirty="0"/>
+              <a:t>.</a:t>
+            </a:r>
+          </a:p>
+          <a:p>
+            <a:endParaRPr lang="en-US" dirty="0">
+              <a:ea typeface="Calibri"/>
+              <a:cs typeface="Calibri"/>
+            </a:endParaRPr>
+          </a:p>
+          <a:p>
+            <a:r>
+              <a:rPr lang="en-US" dirty="0"/>
+              <a:t>A </a:t>
+            </a:r>
+            <a:r>
+              <a:rPr lang="en-US" dirty="0" err="1"/>
+              <a:t>töréspontokkal</a:t>
+            </a:r>
+            <a:r>
+              <a:rPr lang="en-US" dirty="0"/>
+              <a:t> </a:t>
+            </a:r>
+            <a:r>
+              <a:rPr lang="en-US" dirty="0" err="1"/>
+              <a:t>szabályozzuk</a:t>
+            </a:r>
+            <a:r>
+              <a:rPr lang="en-US" dirty="0"/>
+              <a:t>, </a:t>
+            </a:r>
+            <a:r>
+              <a:rPr lang="en-US" dirty="0" err="1"/>
+              <a:t>mikor</a:t>
+            </a:r>
+            <a:r>
+              <a:rPr lang="en-US" dirty="0"/>
+              <a:t> </a:t>
+            </a:r>
+            <a:r>
+              <a:rPr lang="en-US" dirty="0" err="1"/>
+              <a:t>változzon</a:t>
+            </a:r>
+            <a:r>
+              <a:rPr lang="en-US" dirty="0"/>
+              <a:t> </a:t>
+            </a:r>
+            <a:r>
+              <a:rPr lang="en-US" dirty="0" err="1"/>
+              <a:t>az</a:t>
+            </a:r>
+            <a:r>
+              <a:rPr lang="en-US" dirty="0"/>
+              <a:t> </a:t>
+            </a:r>
+            <a:r>
+              <a:rPr lang="en-US" dirty="0" err="1"/>
+              <a:t>elrendezés</a:t>
+            </a:r>
+            <a:r>
+              <a:rPr lang="en-US" dirty="0"/>
+              <a:t>, a </a:t>
+            </a:r>
+            <a:r>
+              <a:rPr lang="en-US" dirty="0" err="1"/>
+              <a:t>betűméret</a:t>
+            </a:r>
+            <a:r>
+              <a:rPr lang="en-US" dirty="0"/>
+              <a:t> </a:t>
+            </a:r>
+            <a:r>
+              <a:rPr lang="en-US" dirty="0" err="1"/>
+              <a:t>vagy</a:t>
+            </a:r>
+            <a:r>
+              <a:rPr lang="en-US" dirty="0"/>
+              <a:t> a </a:t>
+            </a:r>
+            <a:r>
+              <a:rPr lang="en-US" dirty="0" err="1"/>
+              <a:t>térköz</a:t>
+            </a:r>
+            <a:r>
+              <a:rPr lang="en-US" dirty="0"/>
+              <a:t>. </a:t>
+            </a:r>
+          </a:p>
+          <a:p>
+            <a:r>
+              <a:rPr lang="en-US" dirty="0" err="1"/>
+              <a:t>Kiemelten</a:t>
+            </a:r>
+            <a:r>
+              <a:rPr lang="en-US" dirty="0"/>
+              <a:t> </a:t>
+            </a:r>
+            <a:r>
+              <a:rPr lang="en-US" dirty="0" err="1"/>
+              <a:t>fontos</a:t>
+            </a:r>
+            <a:r>
+              <a:rPr lang="en-US" dirty="0"/>
+              <a:t> </a:t>
+            </a:r>
+            <a:r>
+              <a:rPr lang="en-US" dirty="0" err="1"/>
+              <a:t>az</a:t>
+            </a:r>
+            <a:r>
+              <a:rPr lang="en-US" dirty="0"/>
+              <a:t> </a:t>
+            </a:r>
+            <a:r>
+              <a:rPr lang="en-US" dirty="0" err="1"/>
+              <a:t>olvashatóság</a:t>
+            </a:r>
+            <a:r>
+              <a:rPr lang="en-US" dirty="0"/>
+              <a:t>: </a:t>
+            </a:r>
+            <a:r>
+              <a:rPr lang="en-US" dirty="0" err="1"/>
+              <a:t>megfelelő</a:t>
+            </a:r>
+            <a:r>
+              <a:rPr lang="en-US" dirty="0"/>
+              <a:t> </a:t>
+            </a:r>
+            <a:r>
+              <a:rPr lang="en-US" dirty="0" err="1"/>
+              <a:t>kontraszt</a:t>
+            </a:r>
+            <a:r>
+              <a:rPr lang="en-US" dirty="0"/>
+              <a:t>, </a:t>
+            </a:r>
+            <a:r>
+              <a:rPr lang="en-US" dirty="0" err="1"/>
+              <a:t>kényelmes</a:t>
+            </a:r>
+            <a:r>
+              <a:rPr lang="en-US" dirty="0"/>
+              <a:t> </a:t>
+            </a:r>
+            <a:r>
+              <a:rPr lang="en-US" dirty="0" err="1"/>
+              <a:t>betűméret</a:t>
+            </a:r>
+            <a:r>
+              <a:rPr lang="en-US" dirty="0"/>
+              <a:t> </a:t>
+            </a:r>
+            <a:r>
+              <a:rPr lang="en-US" dirty="0" err="1"/>
+              <a:t>és</a:t>
+            </a:r>
+            <a:r>
+              <a:rPr lang="en-US" dirty="0"/>
+              <a:t> </a:t>
+            </a:r>
+            <a:r>
+              <a:rPr lang="en-US" dirty="0" err="1"/>
+              <a:t>jól</a:t>
+            </a:r>
+            <a:r>
+              <a:rPr lang="en-US" dirty="0"/>
+              <a:t> </a:t>
+            </a:r>
+            <a:r>
+              <a:rPr lang="en-US" dirty="0" err="1"/>
+              <a:t>elkülöníthető</a:t>
+            </a:r>
+            <a:r>
+              <a:rPr lang="en-US" dirty="0"/>
+              <a:t> </a:t>
+            </a:r>
+            <a:r>
+              <a:rPr lang="en-US" dirty="0" err="1"/>
+              <a:t>tartalmi</a:t>
+            </a:r>
+            <a:r>
+              <a:rPr lang="en-US" dirty="0"/>
+              <a:t> </a:t>
+            </a:r>
+            <a:r>
+              <a:rPr lang="en-US" dirty="0" err="1"/>
+              <a:t>egységek</a:t>
+            </a:r>
+            <a:r>
+              <a:rPr lang="en-US" dirty="0"/>
+              <a:t>. </a:t>
+            </a:r>
+            <a:endParaRPr lang="en-US"/>
+          </a:p>
+          <a:p>
+            <a:r>
+              <a:rPr lang="en-US" dirty="0" err="1"/>
+              <a:t>Mobilon</a:t>
+            </a:r>
+            <a:r>
+              <a:rPr lang="en-US" dirty="0"/>
+              <a:t> </a:t>
+            </a:r>
+            <a:r>
+              <a:rPr lang="en-US" dirty="0" err="1"/>
+              <a:t>külön</a:t>
+            </a:r>
+            <a:r>
+              <a:rPr lang="en-US" dirty="0"/>
+              <a:t> </a:t>
+            </a:r>
+            <a:r>
+              <a:rPr lang="en-US" dirty="0" err="1"/>
+              <a:t>figyelni</a:t>
+            </a:r>
+            <a:r>
+              <a:rPr lang="en-US" dirty="0"/>
+              <a:t> </a:t>
+            </a:r>
+            <a:r>
+              <a:rPr lang="en-US" dirty="0" err="1"/>
+              <a:t>kell</a:t>
+            </a:r>
+            <a:r>
+              <a:rPr lang="en-US" dirty="0"/>
+              <a:t> </a:t>
+            </a:r>
+            <a:r>
+              <a:rPr lang="en-US" dirty="0" err="1"/>
+              <a:t>arra</a:t>
+            </a:r>
+            <a:r>
+              <a:rPr lang="en-US" dirty="0"/>
+              <a:t>, </a:t>
+            </a:r>
+            <a:r>
+              <a:rPr lang="en-US" dirty="0" err="1"/>
+              <a:t>hogy</a:t>
+            </a:r>
+            <a:r>
+              <a:rPr lang="en-US" dirty="0"/>
+              <a:t> a </a:t>
+            </a:r>
+            <a:r>
+              <a:rPr lang="en-US" dirty="0" err="1"/>
+              <a:t>gombok</a:t>
+            </a:r>
+            <a:r>
+              <a:rPr lang="en-US" dirty="0"/>
+              <a:t> </a:t>
+            </a:r>
+            <a:r>
+              <a:rPr lang="en-US" dirty="0" err="1"/>
+              <a:t>és</a:t>
+            </a:r>
+            <a:r>
+              <a:rPr lang="en-US" dirty="0"/>
+              <a:t> </a:t>
+            </a:r>
+            <a:r>
+              <a:rPr lang="en-US" dirty="0" err="1"/>
+              <a:t>kattintható</a:t>
+            </a:r>
+            <a:r>
+              <a:rPr lang="en-US" dirty="0"/>
+              <a:t> </a:t>
+            </a:r>
+            <a:r>
+              <a:rPr lang="en-US" dirty="0" err="1"/>
+              <a:t>elemek</a:t>
+            </a:r>
+            <a:r>
+              <a:rPr lang="en-US" dirty="0"/>
+              <a:t> </a:t>
+            </a:r>
+            <a:r>
+              <a:rPr lang="en-US" dirty="0" err="1"/>
+              <a:t>elég</a:t>
+            </a:r>
+            <a:r>
+              <a:rPr lang="en-US" dirty="0"/>
+              <a:t> </a:t>
+            </a:r>
+            <a:r>
+              <a:rPr lang="en-US" dirty="0" err="1"/>
+              <a:t>nagyok</a:t>
+            </a:r>
+            <a:r>
+              <a:rPr lang="en-US" dirty="0"/>
+              <a:t> </a:t>
+            </a:r>
+            <a:r>
+              <a:rPr lang="en-US" dirty="0" err="1"/>
+              <a:t>legyenek</a:t>
+            </a:r>
+            <a:r>
+              <a:rPr lang="en-US" dirty="0"/>
+              <a:t> </a:t>
+            </a:r>
+            <a:r>
+              <a:rPr lang="en-US" dirty="0" err="1"/>
+              <a:t>az</a:t>
+            </a:r>
+            <a:r>
+              <a:rPr lang="en-US" dirty="0"/>
+              <a:t> </a:t>
+            </a:r>
+            <a:r>
+              <a:rPr lang="en-US" dirty="0" err="1"/>
+              <a:t>érintéshez</a:t>
+            </a:r>
+            <a:r>
+              <a:rPr lang="en-US" dirty="0"/>
+              <a:t>, </a:t>
+            </a:r>
+            <a:r>
+              <a:rPr lang="en-US" dirty="0" err="1"/>
+              <a:t>és</a:t>
+            </a:r>
+            <a:r>
+              <a:rPr lang="en-US" dirty="0"/>
+              <a:t> </a:t>
+            </a:r>
+            <a:r>
+              <a:rPr lang="en-US" dirty="0" err="1"/>
+              <a:t>legyen</a:t>
+            </a:r>
+            <a:r>
+              <a:rPr lang="en-US" dirty="0"/>
+              <a:t> </a:t>
+            </a:r>
+            <a:r>
+              <a:rPr lang="en-US" dirty="0" err="1"/>
+              <a:t>köztük</a:t>
+            </a:r>
+            <a:r>
+              <a:rPr lang="en-US" dirty="0"/>
+              <a:t> </a:t>
+            </a:r>
+            <a:r>
+              <a:rPr lang="en-US" dirty="0" err="1"/>
+              <a:t>elég</a:t>
+            </a:r>
+            <a:r>
+              <a:rPr lang="en-US" dirty="0"/>
+              <a:t> </a:t>
+            </a:r>
+            <a:r>
+              <a:rPr lang="en-US" dirty="0" err="1"/>
+              <a:t>hely</a:t>
+            </a:r>
+            <a:r>
+              <a:rPr lang="en-US" dirty="0"/>
+              <a:t>, </a:t>
+            </a:r>
+            <a:r>
+              <a:rPr lang="en-US" dirty="0" err="1"/>
+              <a:t>hogy</a:t>
+            </a:r>
+            <a:r>
+              <a:rPr lang="en-US" dirty="0"/>
+              <a:t> ne </a:t>
+            </a:r>
+            <a:r>
+              <a:rPr lang="en-US" dirty="0" err="1"/>
+              <a:t>történjen</a:t>
+            </a:r>
+            <a:r>
+              <a:rPr lang="en-US" dirty="0"/>
+              <a:t> </a:t>
+            </a:r>
+            <a:r>
+              <a:rPr lang="en-US" dirty="0" err="1"/>
+              <a:t>félrekattintás</a:t>
+            </a:r>
+            <a:r>
+              <a:rPr lang="en-US" dirty="0"/>
+              <a:t>.</a:t>
+            </a:r>
+          </a:p>
+          <a:p>
+            <a:endParaRPr lang="en-US" dirty="0">
+              <a:ea typeface="Calibri"/>
+              <a:cs typeface="Calibri"/>
+            </a:endParaRPr>
+          </a:p>
+          <a:p>
+            <a:r>
+              <a:rPr lang="en-US" dirty="0" err="1">
+                <a:ea typeface="Calibri"/>
+                <a:cs typeface="Calibri"/>
+              </a:rPr>
+              <a:t>Egy</a:t>
+            </a:r>
+            <a:r>
+              <a:rPr lang="en-US" dirty="0">
+                <a:ea typeface="Calibri"/>
+                <a:cs typeface="Calibri"/>
+              </a:rPr>
+              <a:t> </a:t>
+            </a:r>
+            <a:r>
+              <a:rPr lang="en-US" dirty="0" err="1">
+                <a:ea typeface="Calibri"/>
+                <a:cs typeface="Calibri"/>
+              </a:rPr>
+              <a:t>kett</a:t>
+            </a:r>
+            <a:r>
+              <a:rPr lang="en-US" dirty="0">
+                <a:ea typeface="Calibri"/>
+                <a:cs typeface="Calibri"/>
+              </a:rPr>
+              <a:t> </a:t>
+            </a:r>
+            <a:r>
+              <a:rPr lang="en-US" dirty="0" err="1">
+                <a:ea typeface="Calibri"/>
+                <a:cs typeface="Calibri"/>
+              </a:rPr>
+              <a:t>helyen</a:t>
+            </a:r>
+            <a:r>
+              <a:rPr lang="en-US" dirty="0">
+                <a:ea typeface="Calibri"/>
+                <a:cs typeface="Calibri"/>
+              </a:rPr>
+              <a:t> </a:t>
+            </a:r>
+            <a:r>
+              <a:rPr lang="en-US" dirty="0" err="1">
+                <a:ea typeface="Calibri"/>
+                <a:cs typeface="Calibri"/>
+              </a:rPr>
+              <a:t>boostrapet</a:t>
+            </a:r>
+            <a:r>
+              <a:rPr lang="en-US" dirty="0">
+                <a:ea typeface="Calibri"/>
+                <a:cs typeface="Calibri"/>
+              </a:rPr>
+              <a:t> </a:t>
+            </a:r>
+            <a:r>
+              <a:rPr lang="en-US" dirty="0" err="1">
+                <a:ea typeface="Calibri"/>
+                <a:cs typeface="Calibri"/>
+              </a:rPr>
+              <a:t>hasznaltam</a:t>
+            </a:r>
+            <a:r>
+              <a:rPr lang="en-US" dirty="0">
+                <a:ea typeface="Calibri"/>
+                <a:cs typeface="Calibri"/>
+              </a:rPr>
+              <a:t> </a:t>
+            </a:r>
+          </a:p>
+          <a:p>
+            <a:r>
+              <a:rPr lang="en-US" dirty="0"/>
+              <a:t>A </a:t>
+            </a:r>
+            <a:r>
+              <a:rPr lang="en-US" dirty="0" err="1"/>
+              <a:t>frontendben</a:t>
+            </a:r>
+            <a:r>
+              <a:rPr lang="en-US" dirty="0"/>
+              <a:t> a </a:t>
+            </a:r>
+            <a:r>
+              <a:rPr lang="en-US" dirty="0" err="1"/>
+              <a:t>reszponzivitást</a:t>
+            </a:r>
+            <a:r>
+              <a:rPr lang="en-US" dirty="0"/>
+              <a:t> </a:t>
+            </a:r>
+            <a:r>
+              <a:rPr lang="en-US" dirty="0" err="1"/>
+              <a:t>nem</a:t>
+            </a:r>
+            <a:r>
+              <a:rPr lang="en-US" dirty="0"/>
+              <a:t> Bootstrap-pel </a:t>
+            </a:r>
+            <a:r>
+              <a:rPr lang="en-US" dirty="0" err="1"/>
+              <a:t>oldottam</a:t>
+            </a:r>
+            <a:r>
+              <a:rPr lang="en-US" dirty="0"/>
+              <a:t> meg, </a:t>
+            </a:r>
+            <a:r>
+              <a:rPr lang="en-US" dirty="0" err="1"/>
+              <a:t>hanem</a:t>
+            </a:r>
+            <a:r>
+              <a:rPr lang="en-US" dirty="0"/>
+              <a:t> </a:t>
+            </a:r>
+            <a:r>
+              <a:rPr lang="en-US" dirty="0" err="1"/>
+              <a:t>saját</a:t>
+            </a:r>
+            <a:r>
+              <a:rPr lang="en-US" dirty="0"/>
+              <a:t>, </a:t>
+            </a:r>
+            <a:r>
+              <a:rPr lang="en-US" dirty="0" err="1"/>
+              <a:t>komponensenként</a:t>
+            </a:r>
+            <a:r>
+              <a:rPr lang="en-US" dirty="0"/>
+              <a:t> </a:t>
+            </a:r>
+            <a:r>
+              <a:rPr lang="en-US" dirty="0" err="1"/>
+              <a:t>szétválasztott</a:t>
+            </a:r>
+            <a:r>
+              <a:rPr lang="en-US" dirty="0"/>
+              <a:t> CSS </a:t>
+            </a:r>
+            <a:r>
+              <a:rPr lang="en-US" dirty="0" err="1"/>
+              <a:t>fájlokkal</a:t>
+            </a:r>
+          </a:p>
+          <a:p>
+            <a:r>
+              <a:rPr lang="en-US" dirty="0"/>
+              <a:t> </a:t>
+            </a:r>
+            <a:r>
+              <a:rPr lang="en-US" dirty="0" err="1"/>
+              <a:t>Egyes</a:t>
+            </a:r>
+            <a:r>
+              <a:rPr lang="en-US" dirty="0"/>
+              <a:t> </a:t>
+            </a:r>
+            <a:r>
+              <a:rPr lang="en-US" dirty="0" err="1"/>
+              <a:t>elemeknel</a:t>
+            </a:r>
+            <a:r>
+              <a:rPr lang="en-US" dirty="0"/>
+              <a:t> a media </a:t>
+            </a:r>
+            <a:r>
+              <a:rPr lang="en-US" dirty="0" err="1"/>
+              <a:t>querykkel</a:t>
+            </a:r>
+            <a:r>
+              <a:rPr lang="en-US" dirty="0"/>
+              <a:t> </a:t>
+            </a:r>
+            <a:r>
+              <a:rPr lang="en-US" dirty="0" err="1"/>
+              <a:t>külön</a:t>
+            </a:r>
+            <a:r>
+              <a:rPr lang="en-US" dirty="0"/>
+              <a:t> </a:t>
+            </a:r>
+            <a:r>
+              <a:rPr lang="en-US" dirty="0" err="1"/>
+              <a:t>kezeltem</a:t>
+            </a:r>
+            <a:r>
+              <a:rPr lang="en-US" dirty="0"/>
+              <a:t> a </a:t>
+            </a:r>
+            <a:r>
+              <a:rPr lang="en-US" dirty="0" err="1"/>
+              <a:t>kisebb</a:t>
+            </a:r>
+            <a:r>
+              <a:rPr lang="en-US" dirty="0"/>
+              <a:t> </a:t>
+            </a:r>
+            <a:r>
+              <a:rPr lang="en-US" dirty="0" err="1"/>
+              <a:t>kijelzőket</a:t>
+            </a:r>
+            <a:r>
+              <a:rPr lang="en-US" dirty="0"/>
+              <a:t>.</a:t>
+            </a:r>
+          </a:p>
+          <a:p>
+            <a:r>
+              <a:rPr lang="en-US" dirty="0" err="1">
+                <a:ea typeface="Calibri" panose="020F0502020204030204"/>
+                <a:cs typeface="Calibri" panose="020F0502020204030204"/>
+              </a:rPr>
+              <a:t>Illetve</a:t>
+            </a:r>
+            <a:r>
+              <a:rPr lang="en-US" dirty="0">
+                <a:ea typeface="Calibri" panose="020F0502020204030204"/>
+                <a:cs typeface="Calibri" panose="020F0502020204030204"/>
+              </a:rPr>
+              <a:t> a navbar </a:t>
+            </a:r>
+            <a:r>
+              <a:rPr lang="en-US" dirty="0" err="1">
+                <a:ea typeface="Calibri" panose="020F0502020204030204"/>
+                <a:cs typeface="Calibri" panose="020F0502020204030204"/>
+              </a:rPr>
+              <a:t>menupontnal</a:t>
+            </a:r>
+            <a:r>
+              <a:rPr lang="en-US" dirty="0">
+                <a:ea typeface="Calibri" panose="020F0502020204030204"/>
+                <a:cs typeface="Calibri" panose="020F0502020204030204"/>
+              </a:rPr>
+              <a:t> hamburger </a:t>
+            </a:r>
+            <a:r>
+              <a:rPr lang="en-US" dirty="0" err="1">
+                <a:ea typeface="Calibri" panose="020F0502020204030204"/>
+                <a:cs typeface="Calibri" panose="020F0502020204030204"/>
+              </a:rPr>
+              <a:t>menut</a:t>
+            </a:r>
+            <a:r>
+              <a:rPr lang="en-US" dirty="0">
+                <a:ea typeface="Calibri" panose="020F0502020204030204"/>
+                <a:cs typeface="Calibri" panose="020F0502020204030204"/>
+              </a:rPr>
+              <a:t> </a:t>
+            </a:r>
+            <a:r>
+              <a:rPr lang="en-US" dirty="0" err="1">
+                <a:ea typeface="Calibri" panose="020F0502020204030204"/>
+                <a:cs typeface="Calibri" panose="020F0502020204030204"/>
+              </a:rPr>
+              <a:t>hasznalok</a:t>
+            </a:r>
+            <a:endParaRPr lang="en-US" dirty="0">
+              <a:ea typeface="Calibri" panose="020F0502020204030204"/>
+              <a:cs typeface="Calibri" panose="020F0502020204030204"/>
+            </a:endParaRPr>
+          </a:p>
+        </p:txBody>
+      </p:sp>
+      <p:sp>
+        <p:nvSpPr>
+          <p:cNvPr id="4" name="Dia számának helye 3"/>
+          <p:cNvSpPr>
+            <a:spLocks noGrp="1"/>
+          </p:cNvSpPr>
+          <p:nvPr>
+            <p:ph type="sldNum" sz="quarter" idx="5"/>
+          </p:nvPr>
+        </p:nvSpPr>
+        <p:spPr/>
+        <p:txBody>
+          <a:bodyPr/>
+          <a:lstStyle/>
+          <a:p>
+            <a:fld id="{68CBD90C-AA85-4993-8EB6-76EB5E29832B}" type="slidenum">
+              <a:rPr lang="hu-HU" smtClean="0"/>
+              <a:t>10</a:t>
+            </a:fld>
+            <a:endParaRPr lang="hu-HU"/>
+          </a:p>
+        </p:txBody>
+      </p:sp>
+    </p:spTree>
+    <p:extLst>
+      <p:ext uri="{BB962C8B-B14F-4D97-AF65-F5344CB8AC3E}">
+        <p14:creationId xmlns:p14="http://schemas.microsoft.com/office/powerpoint/2010/main" val="879563202"/>
       </p:ext>
     </p:extLst>
   </p:cSld>
@@ -2171,7 +4096,7 @@
           <a:p>
             <a:fld id="{257EDC9E-3FF7-41AA-B8B8-BFACC835DF58}" type="datetimeFigureOut">
               <a:rPr lang="hu-HU" smtClean="0"/>
-              <a:t>2026. 04. 12.</a:t>
+              <a:t>2026. 04. 18.</a:t>
             </a:fld>
             <a:endParaRPr lang="hu-HU"/>
           </a:p>
@@ -2458,7 +4383,7 @@
           <a:p>
             <a:fld id="{257EDC9E-3FF7-41AA-B8B8-BFACC835DF58}" type="datetimeFigureOut">
               <a:rPr lang="hu-HU" smtClean="0"/>
-              <a:t>2026. 04. 12.</a:t>
+              <a:t>2026. 04. 18.</a:t>
             </a:fld>
             <a:endParaRPr lang="hu-HU"/>
           </a:p>
@@ -2650,7 +4575,7 @@
           <a:p>
             <a:fld id="{257EDC9E-3FF7-41AA-B8B8-BFACC835DF58}" type="datetimeFigureOut">
               <a:rPr lang="hu-HU" smtClean="0"/>
-              <a:t>2026. 04. 12.</a:t>
+              <a:t>2026. 04. 18.</a:t>
             </a:fld>
             <a:endParaRPr lang="hu-HU"/>
           </a:p>
@@ -2911,7 +4836,7 @@
           <a:p>
             <a:fld id="{257EDC9E-3FF7-41AA-B8B8-BFACC835DF58}" type="datetimeFigureOut">
               <a:rPr lang="hu-HU" smtClean="0"/>
-              <a:t>2026. 04. 12.</a:t>
+              <a:t>2026. 04. 18.</a:t>
             </a:fld>
             <a:endParaRPr lang="hu-HU"/>
           </a:p>
@@ -3335,7 +5260,7 @@
           <a:p>
             <a:fld id="{257EDC9E-3FF7-41AA-B8B8-BFACC835DF58}" type="datetimeFigureOut">
               <a:rPr lang="hu-HU" smtClean="0"/>
-              <a:t>2026. 04. 12.</a:t>
+              <a:t>2026. 04. 18.</a:t>
             </a:fld>
             <a:endParaRPr lang="hu-HU"/>
           </a:p>
@@ -3881,7 +5806,7 @@
           <a:p>
             <a:fld id="{257EDC9E-3FF7-41AA-B8B8-BFACC835DF58}" type="datetimeFigureOut">
               <a:rPr lang="hu-HU" smtClean="0"/>
-              <a:t>2026. 04. 12.</a:t>
+              <a:t>2026. 04. 18.</a:t>
             </a:fld>
             <a:endParaRPr lang="hu-HU"/>
           </a:p>
@@ -4721,7 +6646,7 @@
           <a:p>
             <a:fld id="{257EDC9E-3FF7-41AA-B8B8-BFACC835DF58}" type="datetimeFigureOut">
               <a:rPr lang="hu-HU" smtClean="0"/>
-              <a:t>2026. 04. 12.</a:t>
+              <a:t>2026. 04. 18.</a:t>
             </a:fld>
             <a:endParaRPr lang="hu-HU"/>
           </a:p>
@@ -4891,7 +6816,7 @@
           <a:p>
             <a:fld id="{257EDC9E-3FF7-41AA-B8B8-BFACC835DF58}" type="datetimeFigureOut">
               <a:rPr lang="hu-HU" smtClean="0"/>
-              <a:t>2026. 04. 12.</a:t>
+              <a:t>2026. 04. 18.</a:t>
             </a:fld>
             <a:endParaRPr lang="hu-HU"/>
           </a:p>
@@ -5075,7 +7000,7 @@
           <a:p>
             <a:fld id="{257EDC9E-3FF7-41AA-B8B8-BFACC835DF58}" type="datetimeFigureOut">
               <a:rPr lang="hu-HU" smtClean="0"/>
-              <a:t>2026. 04. 12.</a:t>
+              <a:t>2026. 04. 18.</a:t>
             </a:fld>
             <a:endParaRPr lang="hu-HU"/>
           </a:p>
@@ -5245,7 +7170,7 @@
           <a:p>
             <a:fld id="{257EDC9E-3FF7-41AA-B8B8-BFACC835DF58}" type="datetimeFigureOut">
               <a:rPr lang="hu-HU" smtClean="0"/>
-              <a:t>2026. 04. 12.</a:t>
+              <a:t>2026. 04. 18.</a:t>
             </a:fld>
             <a:endParaRPr lang="hu-HU"/>
           </a:p>
@@ -5493,7 +7418,7 @@
           <a:p>
             <a:fld id="{257EDC9E-3FF7-41AA-B8B8-BFACC835DF58}" type="datetimeFigureOut">
               <a:rPr lang="hu-HU" smtClean="0"/>
-              <a:t>2026. 04. 12.</a:t>
+              <a:t>2026. 04. 18.</a:t>
             </a:fld>
             <a:endParaRPr lang="hu-HU"/>
           </a:p>
@@ -5730,7 +7655,7 @@
           <a:p>
             <a:fld id="{257EDC9E-3FF7-41AA-B8B8-BFACC835DF58}" type="datetimeFigureOut">
               <a:rPr lang="hu-HU" smtClean="0"/>
-              <a:t>2026. 04. 12.</a:t>
+              <a:t>2026. 04. 18.</a:t>
             </a:fld>
             <a:endParaRPr lang="hu-HU"/>
           </a:p>
@@ -6103,7 +8028,7 @@
           <a:p>
             <a:fld id="{257EDC9E-3FF7-41AA-B8B8-BFACC835DF58}" type="datetimeFigureOut">
               <a:rPr lang="hu-HU" smtClean="0"/>
-              <a:t>2026. 04. 12.</a:t>
+              <a:t>2026. 04. 18.</a:t>
             </a:fld>
             <a:endParaRPr lang="hu-HU"/>
           </a:p>
@@ -6221,7 +8146,7 @@
           <a:p>
             <a:fld id="{257EDC9E-3FF7-41AA-B8B8-BFACC835DF58}" type="datetimeFigureOut">
               <a:rPr lang="hu-HU" smtClean="0"/>
-              <a:t>2026. 04. 12.</a:t>
+              <a:t>2026. 04. 18.</a:t>
             </a:fld>
             <a:endParaRPr lang="hu-HU"/>
           </a:p>
@@ -6316,7 +8241,7 @@
           <a:p>
             <a:fld id="{257EDC9E-3FF7-41AA-B8B8-BFACC835DF58}" type="datetimeFigureOut">
               <a:rPr lang="hu-HU" smtClean="0"/>
-              <a:t>2026. 04. 12.</a:t>
+              <a:t>2026. 04. 18.</a:t>
             </a:fld>
             <a:endParaRPr lang="hu-HU"/>
           </a:p>
@@ -6567,7 +8492,7 @@
           <a:p>
             <a:fld id="{257EDC9E-3FF7-41AA-B8B8-BFACC835DF58}" type="datetimeFigureOut">
               <a:rPr lang="hu-HU" smtClean="0"/>
-              <a:t>2026. 04. 12.</a:t>
+              <a:t>2026. 04. 18.</a:t>
             </a:fld>
             <a:endParaRPr lang="hu-HU"/>
           </a:p>
@@ -6854,7 +8779,7 @@
           <a:p>
             <a:fld id="{257EDC9E-3FF7-41AA-B8B8-BFACC835DF58}" type="datetimeFigureOut">
               <a:rPr lang="hu-HU" smtClean="0"/>
-              <a:t>2026. 04. 12.</a:t>
+              <a:t>2026. 04. 18.</a:t>
             </a:fld>
             <a:endParaRPr lang="hu-HU"/>
           </a:p>
@@ -7067,7 +8992,7 @@
           <a:p>
             <a:fld id="{257EDC9E-3FF7-41AA-B8B8-BFACC835DF58}" type="datetimeFigureOut">
               <a:rPr lang="hu-HU" smtClean="0"/>
-              <a:t>2026. 04. 12.</a:t>
+              <a:t>2026. 04. 18.</a:t>
             </a:fld>
             <a:endParaRPr lang="hu-HU"/>
           </a:p>
@@ -7735,7 +9660,7 @@
           </p:nvPr>
         </p:nvPicPr>
         <p:blipFill>
-          <a:blip r:embed="rId2">
+          <a:blip r:embed="rId3">
             <a:extLst>
               <a:ext uri="{28A0092B-C50C-407E-A947-70E740481C1C}">
                 <a14:useLocalDpi xmlns:a14="http://schemas.microsoft.com/office/drawing/2010/main" val="0"/>
@@ -7812,7 +9737,7 @@
           <p:nvPr/>
         </p:nvPicPr>
         <p:blipFill>
-          <a:blip r:embed="rId3"/>
+          <a:blip r:embed="rId4"/>
           <a:stretch>
             <a:fillRect/>
           </a:stretch>
@@ -7842,7 +9767,7 @@
           <p:nvPr/>
         </p:nvPicPr>
         <p:blipFill>
-          <a:blip r:embed="rId4"/>
+          <a:blip r:embed="rId5"/>
           <a:stretch>
             <a:fillRect/>
           </a:stretch>
@@ -7872,7 +9797,7 @@
           <p:nvPr/>
         </p:nvPicPr>
         <p:blipFill>
-          <a:blip r:embed="rId5"/>
+          <a:blip r:embed="rId6"/>
           <a:stretch>
             <a:fillRect/>
           </a:stretch>
@@ -8057,6 +9982,290 @@
 </file>
 
 <file path=ppt/slides/slide11.xml><?xml version="1.0" encoding="utf-8"?>
+<p:sld xmlns:a="http://schemas.openxmlformats.org/drawingml/2006/main" xmlns:r="http://schemas.openxmlformats.org/officeDocument/2006/relationships" xmlns:p="http://schemas.openxmlformats.org/presentationml/2006/main">
+  <p:cSld>
+    <p:spTree>
+      <p:nvGrpSpPr>
+        <p:cNvPr id="1" name="">
+          <a:extLst>
+            <a:ext uri="{FF2B5EF4-FFF2-40B4-BE49-F238E27FC236}">
+              <a16:creationId xmlns:a16="http://schemas.microsoft.com/office/drawing/2014/main" id="{BD3DBE83-A67D-9EB2-A3EC-36C51B4FCC2E}"/>
+            </a:ext>
+          </a:extLst>
+        </p:cNvPr>
+        <p:cNvGrpSpPr/>
+        <p:nvPr/>
+      </p:nvGrpSpPr>
+      <p:grpSpPr>
+        <a:xfrm>
+          <a:off x="0" y="0"/>
+          <a:ext cx="0" cy="0"/>
+          <a:chOff x="0" y="0"/>
+          <a:chExt cx="0" cy="0"/>
+        </a:xfrm>
+      </p:grpSpPr>
+      <p:pic>
+        <p:nvPicPr>
+          <p:cNvPr id="5" name="Tartalom helye 4">
+            <a:extLst>
+              <a:ext uri="{FF2B5EF4-FFF2-40B4-BE49-F238E27FC236}">
+                <a16:creationId xmlns:a16="http://schemas.microsoft.com/office/drawing/2014/main" id="{C353DB0C-0934-B3B8-0917-1253AE468535}"/>
+              </a:ext>
+            </a:extLst>
+          </p:cNvPr>
+          <p:cNvPicPr>
+            <a:picLocks noGrp="1" noChangeAspect="1"/>
+          </p:cNvPicPr>
+          <p:nvPr>
+            <p:ph idx="1"/>
+          </p:nvPr>
+        </p:nvPicPr>
+        <p:blipFill>
+          <a:blip r:embed="rId3">
+            <a:extLst>
+              <a:ext uri="{28A0092B-C50C-407E-A947-70E740481C1C}">
+                <a14:useLocalDpi xmlns:a14="http://schemas.microsoft.com/office/drawing/2010/main" val="0"/>
+              </a:ext>
+            </a:extLst>
+          </a:blip>
+          <a:stretch>
+            <a:fillRect/>
+          </a:stretch>
+        </p:blipFill>
+        <p:spPr>
+          <a:xfrm>
+            <a:off x="0" y="0"/>
+            <a:ext cx="12192000" cy="6858000"/>
+          </a:xfrm>
+        </p:spPr>
+      </p:pic>
+      <p:sp>
+        <p:nvSpPr>
+          <p:cNvPr id="2" name="Cím 1">
+            <a:extLst>
+              <a:ext uri="{FF2B5EF4-FFF2-40B4-BE49-F238E27FC236}">
+                <a16:creationId xmlns:a16="http://schemas.microsoft.com/office/drawing/2014/main" id="{159DAE13-FAA4-C78C-0AB8-8EC7D6A1D5C3}"/>
+              </a:ext>
+            </a:extLst>
+          </p:cNvPr>
+          <p:cNvSpPr>
+            <a:spLocks noGrp="1"/>
+          </p:cNvSpPr>
+          <p:nvPr>
+            <p:ph type="title"/>
+          </p:nvPr>
+        </p:nvSpPr>
+        <p:spPr>
+          <a:xfrm>
+            <a:off x="929145" y="0"/>
+            <a:ext cx="10353761" cy="1053736"/>
+          </a:xfrm>
+        </p:spPr>
+        <p:txBody>
+          <a:bodyPr>
+            <a:normAutofit/>
+          </a:bodyPr>
+          <a:lstStyle/>
+          <a:p>
+            <a:r>
+              <a:rPr lang="hu-HU" sz="4000">
+                <a:solidFill>
+                  <a:srgbClr val="01F10C"/>
+                </a:solidFill>
+              </a:rPr>
+              <a:t>Jövöbeli tervek</a:t>
+            </a:r>
+            <a:endParaRPr lang="hu-HU" sz="4000" dirty="0">
+              <a:solidFill>
+                <a:srgbClr val="01F10C"/>
+              </a:solidFill>
+            </a:endParaRPr>
+          </a:p>
+        </p:txBody>
+      </p:sp>
+      <p:sp>
+        <p:nvSpPr>
+          <p:cNvPr id="9" name="Téglalap 8">
+            <a:extLst>
+              <a:ext uri="{FF2B5EF4-FFF2-40B4-BE49-F238E27FC236}">
+                <a16:creationId xmlns:a16="http://schemas.microsoft.com/office/drawing/2014/main" id="{A3F1B03C-D66C-A957-BCBA-B93C7A606E51}"/>
+              </a:ext>
+            </a:extLst>
+          </p:cNvPr>
+          <p:cNvSpPr/>
+          <p:nvPr/>
+        </p:nvSpPr>
+        <p:spPr>
+          <a:xfrm>
+            <a:off x="569992" y="1053007"/>
+            <a:ext cx="5348103" cy="5457159"/>
+          </a:xfrm>
+          <a:prstGeom prst="rect">
+            <a:avLst/>
+          </a:prstGeom>
+          <a:solidFill>
+            <a:schemeClr val="accent2">
+              <a:lumMod val="50000"/>
+              <a:alpha val="50000"/>
+            </a:schemeClr>
+          </a:solidFill>
+          <a:ln w="28575">
+            <a:solidFill>
+              <a:srgbClr val="00CC00"/>
+            </a:solidFill>
+          </a:ln>
+        </p:spPr>
+        <p:style>
+          <a:lnRef idx="0">
+            <a:scrgbClr r="0" g="0" b="0"/>
+          </a:lnRef>
+          <a:fillRef idx="0">
+            <a:scrgbClr r="0" g="0" b="0"/>
+          </a:fillRef>
+          <a:effectRef idx="0">
+            <a:scrgbClr r="0" g="0" b="0"/>
+          </a:effectRef>
+          <a:fontRef idx="minor">
+            <a:schemeClr val="lt1"/>
+          </a:fontRef>
+        </p:style>
+        <p:txBody>
+          <a:bodyPr rtlCol="0" anchor="ctr"/>
+          <a:lstStyle/>
+          <a:p>
+            <a:pPr algn="ctr"/>
+            <a:endParaRPr lang="hu-HU" dirty="0"/>
+          </a:p>
+        </p:txBody>
+      </p:sp>
+      <p:sp>
+        <p:nvSpPr>
+          <p:cNvPr id="11" name="Szövegdoboz 10">
+            <a:extLst>
+              <a:ext uri="{FF2B5EF4-FFF2-40B4-BE49-F238E27FC236}">
+                <a16:creationId xmlns:a16="http://schemas.microsoft.com/office/drawing/2014/main" id="{F4567934-CAC1-FF63-0CBD-C6AD60624F29}"/>
+              </a:ext>
+            </a:extLst>
+          </p:cNvPr>
+          <p:cNvSpPr txBox="1"/>
+          <p:nvPr/>
+        </p:nvSpPr>
+        <p:spPr>
+          <a:xfrm>
+            <a:off x="724784" y="2770597"/>
+            <a:ext cx="4917804" cy="1754326"/>
+          </a:xfrm>
+          <a:prstGeom prst="rect">
+            <a:avLst/>
+          </a:prstGeom>
+          <a:noFill/>
+        </p:spPr>
+        <p:txBody>
+          <a:bodyPr wrap="square" lIns="91440" tIns="45720" rIns="91440" bIns="45720" rtlCol="0" anchor="t">
+            <a:spAutoFit/>
+          </a:bodyPr>
+          <a:lstStyle/>
+          <a:p>
+            <a:pPr marL="285750" indent="-285750">
+              <a:buFont typeface="Arial" panose="020B0604020202020204" pitchFamily="34" charset="0"/>
+              <a:buChar char="•"/>
+            </a:pPr>
+            <a:r>
+              <a:rPr lang="hu-HU" sz="3600">
+                <a:solidFill>
+                  <a:srgbClr val="01F10C"/>
+                </a:solidFill>
+                <a:latin typeface="Berlin Sans FB"/>
+              </a:rPr>
+              <a:t>Online fizetés</a:t>
+            </a:r>
+            <a:endParaRPr lang="hu-HU" sz="3600" dirty="0">
+              <a:solidFill>
+                <a:srgbClr val="01F10C"/>
+              </a:solidFill>
+              <a:latin typeface="Berlin Sans FB" panose="020E0602020502020306" pitchFamily="34" charset="0"/>
+            </a:endParaRPr>
+          </a:p>
+          <a:p>
+            <a:pPr marL="285750" indent="-285750">
+              <a:buFont typeface="Arial" panose="020B0604020202020204" pitchFamily="34" charset="0"/>
+              <a:buChar char="•"/>
+            </a:pPr>
+            <a:endParaRPr lang="hu-HU" sz="3600" dirty="0">
+              <a:solidFill>
+                <a:srgbClr val="01F10C"/>
+              </a:solidFill>
+              <a:latin typeface="Berlin Sans FB" panose="020E0602020502020306" pitchFamily="34" charset="0"/>
+            </a:endParaRPr>
+          </a:p>
+          <a:p>
+            <a:pPr marL="285750" indent="-285750">
+              <a:buFont typeface="Arial" panose="020B0604020202020204" pitchFamily="34" charset="0"/>
+              <a:buChar char="•"/>
+            </a:pPr>
+            <a:r>
+              <a:rPr lang="hu-HU" sz="3600">
+                <a:solidFill>
+                  <a:srgbClr val="01F10C"/>
+                </a:solidFill>
+                <a:latin typeface="Berlin Sans FB"/>
+              </a:rPr>
+              <a:t>Nyelvforditó gomb</a:t>
+            </a:r>
+            <a:endParaRPr lang="hu-HU" sz="3600" dirty="0">
+              <a:solidFill>
+                <a:srgbClr val="01F10C"/>
+              </a:solidFill>
+              <a:latin typeface="Berlin Sans FB" panose="020E0602020502020306" pitchFamily="34" charset="0"/>
+            </a:endParaRPr>
+          </a:p>
+        </p:txBody>
+      </p:sp>
+      <p:pic>
+        <p:nvPicPr>
+          <p:cNvPr id="13" name="Kép 12" descr="The Top 10 Most Popular Online Payment Solutions">
+            <a:extLst>
+              <a:ext uri="{FF2B5EF4-FFF2-40B4-BE49-F238E27FC236}">
+                <a16:creationId xmlns:a16="http://schemas.microsoft.com/office/drawing/2014/main" id="{4F0DF4D4-4FCB-E154-A46C-C3D07ADB59AF}"/>
+              </a:ext>
+            </a:extLst>
+          </p:cNvPr>
+          <p:cNvPicPr>
+            <a:picLocks noChangeAspect="1"/>
+          </p:cNvPicPr>
+          <p:nvPr/>
+        </p:nvPicPr>
+        <p:blipFill>
+          <a:blip r:embed="rId4"/>
+          <a:srcRect l="15982" t="78" r="14223" b="-78"/>
+          <a:stretch>
+            <a:fillRect/>
+          </a:stretch>
+        </p:blipFill>
+        <p:spPr>
+          <a:xfrm>
+            <a:off x="6356350" y="1291167"/>
+            <a:ext cx="5501862" cy="4921255"/>
+          </a:xfrm>
+          <a:prstGeom prst="rect">
+            <a:avLst/>
+          </a:prstGeom>
+        </p:spPr>
+      </p:pic>
+    </p:spTree>
+    <p:extLst>
+      <p:ext uri="{BB962C8B-B14F-4D97-AF65-F5344CB8AC3E}">
+        <p14:creationId xmlns:p14="http://schemas.microsoft.com/office/powerpoint/2010/main" val="3756856892"/>
+      </p:ext>
+    </p:extLst>
+  </p:cSld>
+  <p:clrMapOvr>
+    <a:masterClrMapping/>
+  </p:clrMapOvr>
+</p:sld>
+</file>
+
+<file path=ppt/slides/slide12.xml><?xml version="1.0" encoding="utf-8"?>
 <p:sld xmlns:a="http://schemas.openxmlformats.org/drawingml/2006/main" xmlns:r="http://schemas.openxmlformats.org/officeDocument/2006/relationships" xmlns:p="http://schemas.openxmlformats.org/presentationml/2006/main">
   <p:cSld>
     <p:spTree>
@@ -8096,7 +10305,7 @@
           </p:nvPr>
         </p:nvPicPr>
         <p:blipFill>
-          <a:blip r:embed="rId2">
+          <a:blip r:embed="rId3">
             <a:extLst>
               <a:ext uri="{28A0092B-C50C-407E-A947-70E740481C1C}">
                 <a14:useLocalDpi xmlns:a14="http://schemas.microsoft.com/office/drawing/2010/main" val="0"/>
@@ -9005,310 +11214,6 @@
     <p:extLst>
       <p:ext uri="{BB962C8B-B14F-4D97-AF65-F5344CB8AC3E}">
         <p14:creationId xmlns:p14="http://schemas.microsoft.com/office/powerpoint/2010/main" val="4068225047"/>
-      </p:ext>
-    </p:extLst>
-  </p:cSld>
-  <p:clrMapOvr>
-    <a:masterClrMapping/>
-  </p:clrMapOvr>
-</p:sld>
-</file>
-
-<file path=ppt/slides/slide12.xml><?xml version="1.0" encoding="utf-8"?>
-<p:sld xmlns:a="http://schemas.openxmlformats.org/drawingml/2006/main" xmlns:r="http://schemas.openxmlformats.org/officeDocument/2006/relationships" xmlns:p="http://schemas.openxmlformats.org/presentationml/2006/main">
-  <p:cSld>
-    <p:spTree>
-      <p:nvGrpSpPr>
-        <p:cNvPr id="1" name="">
-          <a:extLst>
-            <a:ext uri="{FF2B5EF4-FFF2-40B4-BE49-F238E27FC236}">
-              <a16:creationId xmlns:a16="http://schemas.microsoft.com/office/drawing/2014/main" id="{BD3DBE83-A67D-9EB2-A3EC-36C51B4FCC2E}"/>
-            </a:ext>
-          </a:extLst>
-        </p:cNvPr>
-        <p:cNvGrpSpPr/>
-        <p:nvPr/>
-      </p:nvGrpSpPr>
-      <p:grpSpPr>
-        <a:xfrm>
-          <a:off x="0" y="0"/>
-          <a:ext cx="0" cy="0"/>
-          <a:chOff x="0" y="0"/>
-          <a:chExt cx="0" cy="0"/>
-        </a:xfrm>
-      </p:grpSpPr>
-      <p:pic>
-        <p:nvPicPr>
-          <p:cNvPr id="5" name="Tartalom helye 4">
-            <a:extLst>
-              <a:ext uri="{FF2B5EF4-FFF2-40B4-BE49-F238E27FC236}">
-                <a16:creationId xmlns:a16="http://schemas.microsoft.com/office/drawing/2014/main" id="{C353DB0C-0934-B3B8-0917-1253AE468535}"/>
-              </a:ext>
-            </a:extLst>
-          </p:cNvPr>
-          <p:cNvPicPr>
-            <a:picLocks noGrp="1" noChangeAspect="1"/>
-          </p:cNvPicPr>
-          <p:nvPr>
-            <p:ph idx="1"/>
-          </p:nvPr>
-        </p:nvPicPr>
-        <p:blipFill>
-          <a:blip r:embed="rId2">
-            <a:extLst>
-              <a:ext uri="{28A0092B-C50C-407E-A947-70E740481C1C}">
-                <a14:useLocalDpi xmlns:a14="http://schemas.microsoft.com/office/drawing/2010/main" val="0"/>
-              </a:ext>
-            </a:extLst>
-          </a:blip>
-          <a:stretch>
-            <a:fillRect/>
-          </a:stretch>
-        </p:blipFill>
-        <p:spPr>
-          <a:xfrm>
-            <a:off x="0" y="0"/>
-            <a:ext cx="12192000" cy="6858000"/>
-          </a:xfrm>
-        </p:spPr>
-      </p:pic>
-      <p:sp>
-        <p:nvSpPr>
-          <p:cNvPr id="2" name="Cím 1">
-            <a:extLst>
-              <a:ext uri="{FF2B5EF4-FFF2-40B4-BE49-F238E27FC236}">
-                <a16:creationId xmlns:a16="http://schemas.microsoft.com/office/drawing/2014/main" id="{159DAE13-FAA4-C78C-0AB8-8EC7D6A1D5C3}"/>
-              </a:ext>
-            </a:extLst>
-          </p:cNvPr>
-          <p:cNvSpPr>
-            <a:spLocks noGrp="1"/>
-          </p:cNvSpPr>
-          <p:nvPr>
-            <p:ph type="title"/>
-          </p:nvPr>
-        </p:nvSpPr>
-        <p:spPr>
-          <a:xfrm>
-            <a:off x="929145" y="0"/>
-            <a:ext cx="10353761" cy="1053736"/>
-          </a:xfrm>
-        </p:spPr>
-        <p:txBody>
-          <a:bodyPr>
-            <a:normAutofit/>
-          </a:bodyPr>
-          <a:lstStyle/>
-          <a:p>
-            <a:r>
-              <a:rPr lang="hu-HU" sz="4000">
-                <a:solidFill>
-                  <a:srgbClr val="01F10C"/>
-                </a:solidFill>
-              </a:rPr>
-              <a:t>Jövöbeli tervek</a:t>
-            </a:r>
-            <a:endParaRPr lang="hu-HU" sz="4000" dirty="0">
-              <a:solidFill>
-                <a:srgbClr val="01F10C"/>
-              </a:solidFill>
-            </a:endParaRPr>
-          </a:p>
-        </p:txBody>
-      </p:sp>
-      <p:sp>
-        <p:nvSpPr>
-          <p:cNvPr id="9" name="Téglalap 8">
-            <a:extLst>
-              <a:ext uri="{FF2B5EF4-FFF2-40B4-BE49-F238E27FC236}">
-                <a16:creationId xmlns:a16="http://schemas.microsoft.com/office/drawing/2014/main" id="{A3F1B03C-D66C-A957-BCBA-B93C7A606E51}"/>
-              </a:ext>
-            </a:extLst>
-          </p:cNvPr>
-          <p:cNvSpPr/>
-          <p:nvPr/>
-        </p:nvSpPr>
-        <p:spPr>
-          <a:xfrm>
-            <a:off x="569992" y="1053007"/>
-            <a:ext cx="5348103" cy="5457159"/>
-          </a:xfrm>
-          <a:prstGeom prst="rect">
-            <a:avLst/>
-          </a:prstGeom>
-          <a:solidFill>
-            <a:schemeClr val="accent2">
-              <a:lumMod val="50000"/>
-              <a:alpha val="50000"/>
-            </a:schemeClr>
-          </a:solidFill>
-          <a:ln w="28575">
-            <a:solidFill>
-              <a:srgbClr val="00CC00"/>
-            </a:solidFill>
-          </a:ln>
-        </p:spPr>
-        <p:style>
-          <a:lnRef idx="0">
-            <a:scrgbClr r="0" g="0" b="0"/>
-          </a:lnRef>
-          <a:fillRef idx="0">
-            <a:scrgbClr r="0" g="0" b="0"/>
-          </a:fillRef>
-          <a:effectRef idx="0">
-            <a:scrgbClr r="0" g="0" b="0"/>
-          </a:effectRef>
-          <a:fontRef idx="minor">
-            <a:schemeClr val="lt1"/>
-          </a:fontRef>
-        </p:style>
-        <p:txBody>
-          <a:bodyPr rtlCol="0" anchor="ctr"/>
-          <a:lstStyle/>
-          <a:p>
-            <a:pPr algn="ctr"/>
-            <a:endParaRPr lang="hu-HU" dirty="0"/>
-          </a:p>
-        </p:txBody>
-      </p:sp>
-      <p:sp>
-        <p:nvSpPr>
-          <p:cNvPr id="11" name="Szövegdoboz 10">
-            <a:extLst>
-              <a:ext uri="{FF2B5EF4-FFF2-40B4-BE49-F238E27FC236}">
-                <a16:creationId xmlns:a16="http://schemas.microsoft.com/office/drawing/2014/main" id="{F4567934-CAC1-FF63-0CBD-C6AD60624F29}"/>
-              </a:ext>
-            </a:extLst>
-          </p:cNvPr>
-          <p:cNvSpPr txBox="1"/>
-          <p:nvPr/>
-        </p:nvSpPr>
-        <p:spPr>
-          <a:xfrm>
-            <a:off x="785141" y="2702695"/>
-            <a:ext cx="4917804" cy="2677656"/>
-          </a:xfrm>
-          <a:prstGeom prst="rect">
-            <a:avLst/>
-          </a:prstGeom>
-          <a:noFill/>
-        </p:spPr>
-        <p:txBody>
-          <a:bodyPr wrap="square" lIns="91440" tIns="45720" rIns="91440" bIns="45720" rtlCol="0" anchor="t">
-            <a:spAutoFit/>
-          </a:bodyPr>
-          <a:lstStyle/>
-          <a:p>
-            <a:pPr marL="285750" indent="-285750">
-              <a:buFont typeface="Arial" panose="020B0604020202020204" pitchFamily="34" charset="0"/>
-              <a:buChar char="•"/>
-            </a:pPr>
-            <a:r>
-              <a:rPr lang="hu-HU" sz="3600">
-                <a:solidFill>
-                  <a:srgbClr val="01F10C"/>
-                </a:solidFill>
-                <a:latin typeface="Berlin Sans FB"/>
-              </a:rPr>
-              <a:t>Online fizetés</a:t>
-            </a:r>
-            <a:endParaRPr lang="hu-HU" sz="3600" dirty="0">
-              <a:solidFill>
-                <a:srgbClr val="01F10C"/>
-              </a:solidFill>
-              <a:latin typeface="Berlin Sans FB" panose="020E0602020502020306" pitchFamily="34" charset="0"/>
-            </a:endParaRPr>
-          </a:p>
-          <a:p>
-            <a:pPr marL="285750" indent="-285750">
-              <a:buFont typeface="Arial" panose="020B0604020202020204" pitchFamily="34" charset="0"/>
-              <a:buChar char="•"/>
-            </a:pPr>
-            <a:endParaRPr lang="hu-HU" sz="3600" dirty="0">
-              <a:solidFill>
-                <a:srgbClr val="01F10C"/>
-              </a:solidFill>
-              <a:latin typeface="Berlin Sans FB" panose="020E0602020502020306" pitchFamily="34" charset="0"/>
-            </a:endParaRPr>
-          </a:p>
-          <a:p>
-            <a:pPr marL="285750" indent="-285750">
-              <a:buFont typeface="Arial" panose="020B0604020202020204" pitchFamily="34" charset="0"/>
-              <a:buChar char="•"/>
-            </a:pPr>
-            <a:r>
-              <a:rPr lang="hu-HU" sz="3600">
-                <a:solidFill>
-                  <a:srgbClr val="01F10C"/>
-                </a:solidFill>
-                <a:latin typeface="Berlin Sans FB"/>
-              </a:rPr>
-              <a:t>Nyelvforditó gomb</a:t>
-            </a:r>
-            <a:endParaRPr lang="hu-HU" sz="3600" dirty="0">
-              <a:solidFill>
-                <a:srgbClr val="01F10C"/>
-              </a:solidFill>
-              <a:latin typeface="Berlin Sans FB" panose="020E0602020502020306" pitchFamily="34" charset="0"/>
-            </a:endParaRPr>
-          </a:p>
-          <a:p>
-            <a:pPr marL="285750" indent="-285750">
-              <a:buFont typeface="Arial" panose="020B0604020202020204" pitchFamily="34" charset="0"/>
-              <a:buChar char="•"/>
-            </a:pPr>
-            <a:endParaRPr lang="hu-HU" sz="3000" dirty="0">
-              <a:solidFill>
-                <a:srgbClr val="01F10C"/>
-              </a:solidFill>
-              <a:latin typeface="Berlin Sans FB" panose="020E0602020502020306" pitchFamily="34" charset="0"/>
-            </a:endParaRPr>
-          </a:p>
-          <a:p>
-            <a:endParaRPr lang="hu-HU" sz="3000" dirty="0">
-              <a:solidFill>
-                <a:srgbClr val="01F10C"/>
-              </a:solidFill>
-              <a:latin typeface="Berlin Sans FB" panose="020E0602020502020306" pitchFamily="34" charset="0"/>
-            </a:endParaRPr>
-          </a:p>
-        </p:txBody>
-      </p:sp>
-      <p:pic>
-        <p:nvPicPr>
-          <p:cNvPr id="13" name="Kép 12" descr="The Top 10 Most Popular Online Payment Solutions">
-            <a:extLst>
-              <a:ext uri="{FF2B5EF4-FFF2-40B4-BE49-F238E27FC236}">
-                <a16:creationId xmlns:a16="http://schemas.microsoft.com/office/drawing/2014/main" id="{4F0DF4D4-4FCB-E154-A46C-C3D07ADB59AF}"/>
-              </a:ext>
-            </a:extLst>
-          </p:cNvPr>
-          <p:cNvPicPr>
-            <a:picLocks noChangeAspect="1"/>
-          </p:cNvPicPr>
-          <p:nvPr/>
-        </p:nvPicPr>
-        <p:blipFill>
-          <a:blip r:embed="rId3"/>
-          <a:srcRect l="15982" t="78" r="14223" b="-78"/>
-          <a:stretch>
-            <a:fillRect/>
-          </a:stretch>
-        </p:blipFill>
-        <p:spPr>
-          <a:xfrm>
-            <a:off x="6356350" y="1291167"/>
-            <a:ext cx="5501862" cy="4921255"/>
-          </a:xfrm>
-          <a:prstGeom prst="rect">
-            <a:avLst/>
-          </a:prstGeom>
-        </p:spPr>
-      </p:pic>
-    </p:spTree>
-    <p:extLst>
-      <p:ext uri="{BB962C8B-B14F-4D97-AF65-F5344CB8AC3E}">
-        <p14:creationId xmlns:p14="http://schemas.microsoft.com/office/powerpoint/2010/main" val="3756856892"/>
       </p:ext>
     </p:extLst>
   </p:cSld>
@@ -9356,7 +11261,7 @@
           <p:nvPr/>
         </p:nvPicPr>
         <p:blipFill>
-          <a:blip r:embed="rId2">
+          <a:blip r:embed="rId3">
             <a:extLst>
               <a:ext uri="{28A0092B-C50C-407E-A947-70E740481C1C}">
                 <a14:useLocalDpi xmlns:a14="http://schemas.microsoft.com/office/drawing/2010/main" val="0"/>
@@ -9461,7 +11366,7 @@
           </p:nvPr>
         </p:nvPicPr>
         <p:blipFill>
-          <a:blip r:embed="rId2">
+          <a:blip r:embed="rId3">
             <a:extLst>
               <a:ext uri="{28A0092B-C50C-407E-A947-70E740481C1C}">
                 <a14:useLocalDpi xmlns:a14="http://schemas.microsoft.com/office/drawing/2010/main" val="0"/>
@@ -9718,7 +11623,7 @@
           </p:nvPr>
         </p:nvPicPr>
         <p:blipFill>
-          <a:blip r:embed="rId2">
+          <a:blip r:embed="rId3">
             <a:extLst>
               <a:ext uri="{28A0092B-C50C-407E-A947-70E740481C1C}">
                 <a14:useLocalDpi xmlns:a14="http://schemas.microsoft.com/office/drawing/2010/main" val="0"/>
@@ -10011,7 +11916,7 @@
           </p:nvPr>
         </p:nvPicPr>
         <p:blipFill>
-          <a:blip r:embed="rId2">
+          <a:blip r:embed="rId3">
             <a:extLst>
               <a:ext uri="{28A0092B-C50C-407E-A947-70E740481C1C}">
                 <a14:useLocalDpi xmlns:a14="http://schemas.microsoft.com/office/drawing/2010/main" val="0"/>
@@ -10756,7 +12661,7 @@
           </p:nvPr>
         </p:nvPicPr>
         <p:blipFill>
-          <a:blip r:embed="rId2">
+          <a:blip r:embed="rId3">
             <a:extLst>
               <a:ext uri="{28A0092B-C50C-407E-A947-70E740481C1C}">
                 <a14:useLocalDpi xmlns:a14="http://schemas.microsoft.com/office/drawing/2010/main" val="0"/>
@@ -11066,7 +12971,7 @@
           </p:nvPr>
         </p:nvPicPr>
         <p:blipFill>
-          <a:blip r:embed="rId2">
+          <a:blip r:embed="rId3">
             <a:extLst>
               <a:ext uri="{28A0092B-C50C-407E-A947-70E740481C1C}">
                 <a14:useLocalDpi xmlns:a14="http://schemas.microsoft.com/office/drawing/2010/main" val="0"/>
@@ -11326,7 +13231,7 @@
           <p:nvPr/>
         </p:nvPicPr>
         <p:blipFill>
-          <a:blip r:embed="rId3"/>
+          <a:blip r:embed="rId4"/>
           <a:stretch>
             <a:fillRect/>
           </a:stretch>
@@ -11440,7 +13345,7 @@
           </p:nvPr>
         </p:nvPicPr>
         <p:blipFill>
-          <a:blip r:embed="rId2">
+          <a:blip r:embed="rId3">
             <a:extLst>
               <a:ext uri="{28A0092B-C50C-407E-A947-70E740481C1C}">
                 <a14:useLocalDpi xmlns:a14="http://schemas.microsoft.com/office/drawing/2010/main" val="0"/>
@@ -11721,7 +13626,7 @@
           <p:nvPr/>
         </p:nvPicPr>
         <p:blipFill>
-          <a:blip r:embed="rId3"/>
+          <a:blip r:embed="rId4"/>
           <a:stretch>
             <a:fillRect/>
           </a:stretch>
@@ -11843,7 +13748,7 @@
           </p:nvPr>
         </p:nvPicPr>
         <p:blipFill>
-          <a:blip r:embed="rId2">
+          <a:blip r:embed="rId3">
             <a:extLst>
               <a:ext uri="{28A0092B-C50C-407E-A947-70E740481C1C}">
                 <a14:useLocalDpi xmlns:a14="http://schemas.microsoft.com/office/drawing/2010/main" val="0"/>
@@ -12178,7 +14083,7 @@
           <p:nvPr/>
         </p:nvPicPr>
         <p:blipFill>
-          <a:blip r:embed="rId3"/>
+          <a:blip r:embed="rId4"/>
           <a:stretch>
             <a:fillRect/>
           </a:stretch>
